--- a/docs/GKK-Leaders-Census-Training.pptx
+++ b/docs/GKK-Leaders-Census-Training.pptx
@@ -119,22 +119,22 @@
   <p:extLst>
     <p:ext uri="{521415D9-36F7-43E2-AB2F-B90AF26B5E84}">
       <p14:sectionLst xmlns:p14="http://schemas.microsoft.com/office/powerpoint/2010/main">
-        <p14:section name="Introduction" id="{73b34716-0606-84e8-5cf6-74905677beb7}">
+        <p14:section name="Introduction" id="{3ab82798-5c67-7c14-c814-8b8a69267027}">
           <p14:sldIdLst>
             <p14:sldId id="256"/>
           </p14:sldIdLst>
         </p14:section>
-        <p14:section name="The census process" id="{2910e714-c420-682b-04e7-b480be644e40}">
+        <p14:section name="The census process" id="{8d66efe1-2e9f-146f-6fd0-e54add9936d1}">
           <p14:sldIdLst>
             <p14:sldId id="257"/>
           </p14:sldIdLst>
         </p14:section>
-        <p14:section name="Before the census" id="{cd89c426-f1db-3544-f34a-202b4cd96e1b}">
+        <p14:section name="Before the census" id="{e05c6f85-4a0d-64c4-764f-931e85287c51}">
           <p14:sldIdLst>
             <p14:sldId id="258"/>
           </p14:sldIdLst>
         </p14:section>
-        <p14:section name="Running the census" id="{5875addd-71d2-9c17-dbba-8d0a24d91573}">
+        <p14:section name="Running the census" id="{81dda036-33c3-d957-32ca-7af5c9392aaf}">
           <p14:sldIdLst>
             <p14:sldId id="259"/>
             <p14:sldId id="260"/>
@@ -144,7 +144,7 @@
             <p14:sldId id="264"/>
           </p14:sldIdLst>
         </p14:section>
-        <p14:section name="After the census" id="{45db66eb-6fd3-a018-a4ce-c982cbccce20}">
+        <p14:section name="After the census" id="{74a6843e-301c-1e3e-bf96-2db30f0d404c}">
           <p14:sldIdLst>
             <p14:sldId id="265"/>
             <p14:sldId id="266"/>
@@ -556,7 +556,7 @@
           <a:p>
             <a:r>
               <a:rPr lang="en-US" dirty="0"/>
-              <a:t>Welcome. This session shows GKK Leaders how to use the Parish Members Registry for the coming census: what to set up first, how the census starts, how to record and review answers, and how to follow up. Bring a phone or laptop and your sign-in details so you can follow along.</a:t>
+              <a:t>Welcome. This session shows GKK Leaders how to use the Parish Members Registry for the coming census: what to set up first, how the census starts, how families answer online and how you approve their updates, and how to follow up. Bring a phone or laptop and your sign-in details so you can follow along.</a:t>
             </a:r>
             <a:endParaRPr lang="en-US" dirty="0"/>
           </a:p>
@@ -732,7 +732,7 @@
           <a:p>
             <a:r>
               <a:rPr lang="en-US" dirty="0"/>
-              <a:t>You're handling families' personal details, including children's. The printed forms carry a Data Privacy Act notice; treat them like any confidential parish record. Never share your sign-in, and only give a family its own code. On accuracy: save as you go, explain moved and deceased members with a note, and check Duplicates before adding someone new. Every change is logged with the name of whoever made it.</a:t>
+              <a:t>You're handling families' personal details, including children's. Each census code opens one family's record, so send it only to that family, never to a group chat. Never share your sign-in. If any paper forms are used, they carry a Data Privacy Act notice; treat them like any confidential parish record. On accuracy: review updates daily, explain moved and deceased members with a note, and check Duplicates before adding someone new. Every change is logged with the name of whoever made it.</a:t>
             </a:r>
             <a:endParaRPr lang="en-US" dirty="0"/>
           </a:p>
@@ -820,7 +820,7 @@
           <a:p>
             <a:r>
               <a:rPr lang="en-US" dirty="0"/>
-              <a:t>The questions that come up most. Leave time here for leaders' own questions.</a:t>
+              <a:t>The questions that come up most. If the app says the census is closed, only the parish office can reopen it. Leave time here for leaders' own questions.</a:t>
             </a:r>
             <a:endParaRPr lang="en-US" dirty="0"/>
           </a:p>
@@ -908,7 +908,7 @@
           <a:p>
             <a:r>
               <a:rPr lang="en-US" dirty="0"/>
-              <a:t>To close: the checklist on one page. Before the census, finish your setup. During, print, record, review and visit. After, check your results and follow up anyone not confirmed. Thank the leaders, and remind them the parish office can help with anything only it can do: starting or reopening the census, moving households between GKKs, and staff accounts.</a:t>
+              <a:t>To close: the checklist on one page. Before the census, finish your setup. During, send codes, approve updates every day, help families without a phone, and remind the rest. After, check your results and follow up anyone not confirmed. Thank the leaders, and remind them the parish office can help with anything only it can do: starting or reopening the census, moving households between GKKs, and staff accounts.</a:t>
             </a:r>
             <a:endParaRPr lang="en-US" dirty="0"/>
           </a:p>
@@ -996,7 +996,7 @@
           <a:p>
             <a:r>
               <a:rPr lang="en-US" dirty="0"/>
-              <a:t>The big picture. The parish office starts the census and later closes it. In between, the work is in the GKKs: you print a form for each household, families answer on paper or online, and you record the paper answers and approve the online ones. The census asks about each person, not just each household, so every member ends up with one of five statuses. Reassure leaders: starting the census changes nothing, and nothing is saved until they click Save census.</a:t>
+              <a:t>The big picture. The parish office starts the census and later closes it. In between, the work is in the GKKs, and it is done online: you send each family its reference number and code, the family updates its own record on the parish website from a phone, and you review and approve each update. Families without a phone are not left out: you visit or call them and enter their answers yourself in the app. Printing paper forms is optional, only for families who really need paper. The census asks about each person, not just each household, so every member ends up with one of five statuses. Reassure leaders: starting the census changes nothing, and nothing is saved until they click Save census.</a:t>
             </a:r>
             <a:endParaRPr lang="en-US" dirty="0"/>
           </a:p>
@@ -1084,7 +1084,7 @@
           <a:p>
             <a:r>
               <a:rPr lang="en-US" dirty="0"/>
-              <a:t>Do these before the census opens. First, your account: the parish office creates it as a Census Coordinator tied to your GKK; on first sign-in you must set your own password. Second, open Settings, GKK Config, My GKK and complete the chapel details. Only the chapel address is required, but the rest appears on the parish website. Third, history and documents. Fourth, officers come from each member's Responsibility in GKK field. Fifth, tidy your households so the forms print correctly. Sixth, turn on notifications on your phone so you see online updates quickly.</a:t>
+              <a:t>Do these before the census opens. First, your account: the parish office creates it as a Census Coordinator tied to your GKK; on first sign-in you must set your own password. Second, open Settings, GKK Config, My GKK and complete the chapel details. Only the chapel address is required, but the rest appears on the parish website. Third, history and documents. Fourth, officers come from each member's Responsibility in GKK field. Fifth, check your households: every family needs a working mobile number, because that is how they will receive their census code. Sixth, turn on notifications on your phone so you see online updates quickly.</a:t>
             </a:r>
             <a:endParaRPr lang="en-US" dirty="0"/>
           </a:p>
@@ -1172,7 +1172,7 @@
           <a:p>
             <a:r>
               <a:rPr lang="en-US" dirty="0"/>
-              <a:t>Starting is the parish office's job: Census, Start a new census, give it a name and dates, Start census. Every current member starts as not confirmed. As a leader, you will see a note that starting or closing is done by the parish office, and you only see your own GKK. Your part of starting is printing: choose Print forms for your GKK to get one pre-filled page per household. Each page has the household's QR code and online code, so the family can answer either way. Printing again gives the same codes.</a:t>
+              <a:t>Starting is the parish office's job: Census, Start a new census, give it a name and dates, Start census. Every current member starts as not confirmed. As a leader, you will see a note that starting or closing is done by the parish office, and you only see your own GKK. Your part of starting is getting every family online. On the Households page, open a household's row menu and choose Get codes: it shows the reference number and the census code, each with a Copy button. Send both privately to that family by text or Messenger. Then announce it at your GKK gatherings: when a census is open, the parish website shows a button, Narehistro na? I-update ang inyong rekord. Printing is optional: Print forms for your GKK gives a pre-filled paper form with a QR code, only for families who truly need paper. The code stays the same whether you send it or print it.</a:t>
             </a:r>
             <a:endParaRPr lang="en-US" dirty="0"/>
           </a:p>
@@ -1260,7 +1260,7 @@
           <a:p>
             <a:r>
               <a:rPr lang="en-US" dirty="0"/>
-              <a:t>This is your home base during the census. The tabs across the top: Households is where you record answers, Online updates holds what families sent from their phones (the number shows how many are waiting, and the sidebar shows a badge too), Results by GKK shows your totals, and Last year's list helps you find families not yet counted. The tiles show your progress. Each household row shows Not started, Partly confirmed or Confirmed, and a blue badge if the family sent an update online. A good daily routine: filter by Not started, record the forms that came back, then clear the Online updates tab.</a:t>
+              <a:t>This is your home base during the census. The tab you'll use most is Online updates: it holds what families sent from their phones, and the number shows how many are waiting (the sidebar shows a badge too). Households shows every family and who has answered, Results by GKK shows your totals, and Last year's list helps you find families not yet counted. The tiles show your progress. Each household row shows Not started, Partly confirmed or Confirmed, and a blue badge if the family sent an update online. A good daily routine: clear the Online updates tab, then filter Households by Not started and send those families a friendly reminder with their code.</a:t>
             </a:r>
             <a:endParaRPr lang="en-US" dirty="0"/>
           </a:p>
@@ -1348,7 +1348,7 @@
           <a:p>
             <a:r>
               <a:rPr lang="en-US" dirty="0"/>
-              <a:t>Walk through one household live. Record census opens a panel. First say where the answers came from: the paper form, or your own home visit. Then for each member mark A for Aktibo, P for Panagsa or W for Wala on each of the six items. The app suggests a status from the answers, but you decide; once you pick a status yourself, changing the answers no longer changes it. Use Edit details for corrections and Add a new member for newborns. Nothing is saved until Save census. If you made a mistake on a saved member, Clear answer sets them back to not confirmed.</a:t>
+              <a:t>This is the main way the census is done. The family opens the parish website on a phone, taps Narehistro na? I-update ang inyong rekord, signs in with the reference number and code you sent, checks each member's answers, adds newborns, ticks the privacy consent and sends. Families who did get a printed form can scan its QR code instead. Nothing changes in the registry until you approve. Open Online updates, click Review, and you'll see only what changed. Approve applies just those changes, so anything the office edited in the meantime is kept. Reject if something is wrong and give the reason. If a family lost its code, open Get codes again and resend it; if the code may have been seen by others, use New code.</a:t>
             </a:r>
             <a:endParaRPr lang="en-US" dirty="0"/>
           </a:p>
@@ -1436,7 +1436,7 @@
           <a:p>
             <a:r>
               <a:rPr lang="en-US" dirty="0"/>
-              <a:t>The status matters because it decides who the parish counts as an active Catholic. Choose per person. Moved away and Deceased keep the record but take the person out of lists, counts and the next census's forms, so always add a note. Use Left the Church only when the family tells you. If you don't know yet, leave the member as Not confirmed yet rather than guessing; those members are listed for follow-up after the census closes.</a:t>
+              <a:t>Some families have no phone or internet. Don't leave them out: visit them, call them, or let them use your phone. You can also enter their answers yourself, which is still the online census. Walk through one household live. Record census opens a panel. First say where the answers came from: Staff / GKK home visit, or Paper census form only if they filled in a printed one. Then for each member mark A for Aktibo, P for Panagsa or W for Wala on each of the six items. The app suggests a status from the answers, but you decide; once you pick a status yourself, changing the answers no longer changes it. Use Edit details for corrections and Add a new member for newborns. Nothing is saved until Save census. If you made a mistake on a saved member, Clear answer sets them back to not confirmed.</a:t>
             </a:r>
             <a:endParaRPr lang="en-US" dirty="0"/>
           </a:p>
@@ -1524,7 +1524,7 @@
           <a:p>
             <a:r>
               <a:rPr lang="en-US" dirty="0"/>
-              <a:t>Families with phones can answer on their own. They scan the QR code on the form, sign in with the reference number and code, update their answers and send. Nothing changes in the registry until you approve. Open Online updates, click Review, and you'll see only what changed. Approve applies just those changes, so anything the office edited in the meantime is kept. Reject if something is wrong and give the reason. If a family lost its code, get a new one from the household's row menu or the Record census panel.</a:t>
+              <a:t>The status matters because it decides who the parish counts as an active Catholic. Choose per person. Moved away and Deceased keep the record but take the person out of lists, counts and the next census, so always add a note. Use Left the Church only when the family tells you. If you don't know yet, leave the member as Not confirmed yet rather than guessing; those members are listed for follow-up after the census closes.</a:t>
             </a:r>
             <a:endParaRPr lang="en-US" dirty="0"/>
           </a:p>
@@ -1612,7 +1612,7 @@
           <a:p>
             <a:r>
               <a:rPr lang="en-US" dirty="0"/>
-              <a:t>Some families won't return a form. If the parish has turned on Last year's list, it shows which families from last year's paper list are registered and which are not yet. The app matches names automatically; you confirm the matches. Print not yet registered gives you a visit sheet with a column for the result. Also check Households filtered by Not started. On the visit, record the answers, or for a family that isn't in the registry at all, help them use the registration form on the parish website.</a:t>
+              <a:t>Some families won't send their update. If the parish has turned on Last year's list, it shows which families from last year's paper list are registered and which are not yet. The app matches names automatically; you confirm the matches. Each week, filter Households by Not started: those families haven't sent their update yet. Resend their code with a reminder, call them, or visit and help them update on their phone. For a family with no phone, enter the answers yourself with Record census. A family that isn't in the registry at all registers online with the form on the parish website. Last year's list can also print a visit sheet of names not yet registered.</a:t>
             </a:r>
             <a:endParaRPr lang="en-US" dirty="0"/>
           </a:p>
@@ -2516,7 +2516,7 @@
                 <a:ea typeface="Calibri" pitchFamily="34" charset="-122"/>
                 <a:cs typeface="Calibri" pitchFamily="34" charset="-120"/>
               </a:rPr>
-              <a:t>Running the census for your GKK in the Parish Members Registry</a:t>
+              <a:t>Running the online census for your GKK in the Parish Members Registry</a:t>
             </a:r>
             <a:endParaRPr lang="en-US" sz="1600" dirty="0"/>
           </a:p>
@@ -3554,7 +3554,7 @@
                   <a:schemeClr val="tx2"/>
                 </a:solidFill>
               </a:rPr>
-              <a:t>Printed forms are confidential under the Data Privacy Act of 2012. Store them safely.</a:t>
+              <a:t>Send each family its code privately, never in a group chat.</a:t>
             </a:r>
             <a:endParaRPr lang="en-US" sz="1150" dirty="0"/>
           </a:p>
@@ -3614,7 +3614,7 @@
                   <a:schemeClr val="tx2"/>
                 </a:solidFill>
               </a:rPr>
-              <a:t>Never share your password. Give each family only its own code.</a:t>
+              <a:t>Never share your password. You’re signed out after 20 minutes idle.</a:t>
             </a:r>
             <a:endParaRPr lang="en-US" sz="1150" dirty="0"/>
           </a:p>
@@ -3734,7 +3734,7 @@
                   <a:schemeClr val="tx2"/>
                 </a:solidFill>
               </a:rPr>
-              <a:t>You’re signed out after 20 minutes without activity.</a:t>
+              <a:t>Any printed forms are confidential under the Data Privacy Act of 2012.</a:t>
             </a:r>
             <a:endParaRPr lang="en-US" sz="1150" dirty="0"/>
           </a:p>
@@ -3899,7 +3899,7 @@
                   <a:schemeClr val="tx2"/>
                 </a:solidFill>
               </a:rPr>
-              <a:t>Save census after each household, not at the end of the day.</a:t>
+              <a:t>Review online updates daily, before they pile up.</a:t>
             </a:r>
             <a:endParaRPr lang="en-US" sz="1150" dirty="0"/>
           </a:p>
@@ -4844,7 +4844,7 @@
                   <a:schemeClr val="tx1"/>
                 </a:solidFill>
               </a:rPr>
-              <a:t>It says the census is closed.</a:t>
+              <a:t>A family has no phone or internet.</a:t>
             </a:r>
             <a:endParaRPr lang="en-US" sz="1250" dirty="0"/>
           </a:p>
@@ -4880,7 +4880,7 @@
                   <a:schemeClr val="tx2"/>
                 </a:solidFill>
               </a:rPr>
-              <a:t>Only the parish office can reopen a census. Contact them if you still have answers to record.</a:t>
+              <a:t>Visit them, or let them use your phone. Or enter their answers with Record census.</a:t>
             </a:r>
             <a:endParaRPr lang="en-US" sz="1050" dirty="0"/>
           </a:p>
@@ -5555,7 +5555,7 @@
                   <a:schemeClr val="bg1"/>
                 </a:solidFill>
               </a:rPr>
-              <a:t>Print forms for your GKK</a:t>
+              <a:t>Send each family its code</a:t>
             </a:r>
             <a:endParaRPr lang="en-US" sz="1250" dirty="0"/>
           </a:p>
@@ -5615,7 +5615,7 @@
                   <a:schemeClr val="bg1"/>
                 </a:solidFill>
               </a:rPr>
-              <a:t>Record census for each form</a:t>
+              <a:t>Approve online updates daily</a:t>
             </a:r>
             <a:endParaRPr lang="en-US" sz="1250" dirty="0"/>
           </a:p>
@@ -5675,7 +5675,7 @@
                   <a:schemeClr val="bg1"/>
                 </a:solidFill>
               </a:rPr>
-              <a:t>Review online updates daily</a:t>
+              <a:t>Enter answers for families without a phone</a:t>
             </a:r>
             <a:endParaRPr lang="en-US" sz="1250" dirty="0"/>
           </a:p>
@@ -5735,7 +5735,7 @@
                   <a:schemeClr val="bg1"/>
                 </a:solidFill>
               </a:rPr>
-              <a:t>Visit families not yet reached</a:t>
+              <a:t>Remind families not yet answered</a:t>
             </a:r>
             <a:endParaRPr lang="en-US" sz="1250" dirty="0"/>
           </a:p>
@@ -5978,7 +5978,7 @@
                   <a:schemeClr val="bg1"/>
                 </a:solidFill>
               </a:rPr>
-              <a:t>Keep printed forms safe</a:t>
+              <a:t>Keep any printed forms safe</a:t>
             </a:r>
             <a:endParaRPr lang="en-US" sz="1250" dirty="0"/>
           </a:p>
@@ -6161,7 +6161,7 @@
                   <a:schemeClr val="tx2"/>
                 </a:solidFill>
               </a:rPr>
-              <a:t>Five steps from start to finish. You lead steps 2 to 4 for your GKK.</a:t>
+              <a:t>The census is done online. You lead steps 2 to 4 for your GKK. Printed forms are optional.</a:t>
             </a:r>
             <a:endParaRPr lang="en-US" sz="1300" dirty="0"/>
           </a:p>
@@ -6561,7 +6561,7 @@
                   <a:schemeClr val="tx1"/>
                 </a:solidFill>
               </a:rPr>
-              <a:t>You print the forms</a:t>
+              <a:t>You send each family its code</a:t>
             </a:r>
             <a:endParaRPr lang="en-US" sz="1250" dirty="0"/>
           </a:p>
@@ -6597,7 +6597,7 @@
                   <a:schemeClr val="tx2"/>
                 </a:solidFill>
               </a:rPr>
-              <a:t>One pre-filled page per household, with its QR code and online code.</a:t>
+              <a:t>Its reference number and online code, privately by text or Messenger.</a:t>
             </a:r>
             <a:endParaRPr lang="en-US" sz="1050" dirty="0"/>
           </a:p>
@@ -6820,7 +6820,7 @@
                   <a:schemeClr val="tx1"/>
                 </a:solidFill>
               </a:rPr>
-              <a:t>Families answer</a:t>
+              <a:t>Families update online</a:t>
             </a:r>
             <a:endParaRPr lang="en-US" sz="1250" dirty="0"/>
           </a:p>
@@ -6856,7 +6856,7 @@
                   <a:schemeClr val="tx2"/>
                 </a:solidFill>
               </a:rPr>
-              <a:t>On the paper form, or online by scanning the QR code on their form.</a:t>
+              <a:t>On the parish website, from their own phone. They check every member and send.</a:t>
             </a:r>
             <a:endParaRPr lang="en-US" sz="1050" dirty="0"/>
           </a:p>
@@ -7079,7 +7079,7 @@
                   <a:schemeClr val="tx1"/>
                 </a:solidFill>
               </a:rPr>
-              <a:t>You record and review</a:t>
+              <a:t>You review and approve</a:t>
             </a:r>
             <a:endParaRPr lang="en-US" sz="1250" dirty="0"/>
           </a:p>
@@ -7115,7 +7115,7 @@
                   <a:schemeClr val="tx2"/>
                 </a:solidFill>
               </a:rPr>
-              <a:t>Type in the paper answers and approve the families’ online updates.</a:t>
+              <a:t>Approve each update. For a family without a phone, enter their answers yourself.</a:t>
             </a:r>
             <a:endParaRPr lang="en-US" sz="1050" dirty="0"/>
           </a:p>
@@ -8763,7 +8763,7 @@
                   <a:schemeClr val="tx2"/>
                 </a:solidFill>
               </a:rPr>
-              <a:t>Is each household in the right Family Grouping (FG 1–10)? Open </a:t>
+              <a:t>Each household needs a working mobile number to receive its code, and the right Family Grouping (FG 1–10). </a:t>
             </a:r>
             <a:pPr indent="0" marL="0">
               <a:buNone/>
@@ -8785,7 +8785,7 @@
                   <a:schemeClr val="tx2"/>
                 </a:solidFill>
               </a:rPr>
-              <a:t> to find members listed twice.</a:t>
+              <a:t> finds members listed twice.</a:t>
             </a:r>
             <a:endParaRPr lang="en-US" sz="1100" dirty="0"/>
           </a:p>
@@ -9379,12 +9379,12 @@
         </p:nvSpPr>
         <p:spPr>
           <a:xfrm>
-            <a:off x="3474720" y="1417320"/>
-            <a:ext cx="5212080" cy="713232"/>
+            <a:off x="3474720" y="1371600"/>
+            <a:ext cx="5212080" cy="658368"/>
           </a:xfrm>
           <a:prstGeom prst="roundRect">
             <a:avLst>
-              <a:gd name="adj" fmla="val 10256"/>
+              <a:gd name="adj" fmla="val 11111"/>
             </a:avLst>
           </a:prstGeom>
           <a:solidFill>
@@ -9401,7 +9401,7 @@
         </p:nvSpPr>
         <p:spPr>
           <a:xfrm>
-            <a:off x="3611880" y="1581912"/>
+            <a:off x="3611880" y="1508760"/>
             <a:ext cx="384048" cy="384048"/>
           </a:xfrm>
           <a:prstGeom prst="ellipse">
@@ -9421,7 +9421,7 @@
         </p:nvSpPr>
         <p:spPr>
           <a:xfrm>
-            <a:off x="3611880" y="1581912"/>
+            <a:off x="3611880" y="1508760"/>
             <a:ext cx="384048" cy="384048"/>
           </a:xfrm>
           <a:prstGeom prst="rect">
@@ -9457,7 +9457,7 @@
         </p:nvSpPr>
         <p:spPr>
           <a:xfrm>
-            <a:off x="4160520" y="1490472"/>
+            <a:off x="4160520" y="1444752"/>
             <a:ext cx="4389120" cy="246888"/>
           </a:xfrm>
           <a:prstGeom prst="rect">
@@ -9493,8 +9493,8 @@
         </p:nvSpPr>
         <p:spPr>
           <a:xfrm>
-            <a:off x="4160520" y="1746504"/>
-            <a:ext cx="4389120" cy="347472"/>
+            <a:off x="4160520" y="1673352"/>
+            <a:ext cx="4389120" cy="329184"/>
           </a:xfrm>
           <a:prstGeom prst="rect">
             <a:avLst/>
@@ -9529,12 +9529,12 @@
         </p:nvSpPr>
         <p:spPr>
           <a:xfrm>
-            <a:off x="3474720" y="2231136"/>
-            <a:ext cx="5212080" cy="713232"/>
+            <a:off x="3474720" y="2103120"/>
+            <a:ext cx="5212080" cy="658368"/>
           </a:xfrm>
           <a:prstGeom prst="roundRect">
             <a:avLst>
-              <a:gd name="adj" fmla="val 10256"/>
+              <a:gd name="adj" fmla="val 11111"/>
             </a:avLst>
           </a:prstGeom>
           <a:solidFill>
@@ -9551,7 +9551,7 @@
         </p:nvSpPr>
         <p:spPr>
           <a:xfrm>
-            <a:off x="3611880" y="2395728"/>
+            <a:off x="3611880" y="2240280"/>
             <a:ext cx="384048" cy="384048"/>
           </a:xfrm>
           <a:prstGeom prst="ellipse">
@@ -9571,7 +9571,7 @@
         </p:nvSpPr>
         <p:spPr>
           <a:xfrm>
-            <a:off x="3611880" y="2395728"/>
+            <a:off x="3611880" y="2240280"/>
             <a:ext cx="384048" cy="384048"/>
           </a:xfrm>
           <a:prstGeom prst="rect">
@@ -9607,7 +9607,7 @@
         </p:nvSpPr>
         <p:spPr>
           <a:xfrm>
-            <a:off x="4160520" y="2304288"/>
+            <a:off x="4160520" y="2176272"/>
             <a:ext cx="4389120" cy="246888"/>
           </a:xfrm>
           <a:prstGeom prst="rect">
@@ -9643,8 +9643,8 @@
         </p:nvSpPr>
         <p:spPr>
           <a:xfrm>
-            <a:off x="4160520" y="2560320"/>
-            <a:ext cx="4389120" cy="347472"/>
+            <a:off x="4160520" y="2404872"/>
+            <a:ext cx="4389120" cy="329184"/>
           </a:xfrm>
           <a:prstGeom prst="rect">
             <a:avLst/>
@@ -9679,12 +9679,12 @@
         </p:nvSpPr>
         <p:spPr>
           <a:xfrm>
-            <a:off x="3474720" y="3044952"/>
-            <a:ext cx="5212080" cy="713232"/>
+            <a:off x="3474720" y="2834640"/>
+            <a:ext cx="5212080" cy="658368"/>
           </a:xfrm>
           <a:prstGeom prst="roundRect">
             <a:avLst>
-              <a:gd name="adj" fmla="val 10256"/>
+              <a:gd name="adj" fmla="val 11111"/>
             </a:avLst>
           </a:prstGeom>
           <a:solidFill>
@@ -9701,7 +9701,7 @@
         </p:nvSpPr>
         <p:spPr>
           <a:xfrm>
-            <a:off x="3611880" y="3209544"/>
+            <a:off x="3611880" y="2971800"/>
             <a:ext cx="384048" cy="384048"/>
           </a:xfrm>
           <a:prstGeom prst="ellipse">
@@ -9721,7 +9721,7 @@
         </p:nvSpPr>
         <p:spPr>
           <a:xfrm>
-            <a:off x="3611880" y="3209544"/>
+            <a:off x="3611880" y="2971800"/>
             <a:ext cx="384048" cy="384048"/>
           </a:xfrm>
           <a:prstGeom prst="rect">
@@ -9757,7 +9757,7 @@
         </p:nvSpPr>
         <p:spPr>
           <a:xfrm>
-            <a:off x="4160520" y="3118104"/>
+            <a:off x="4160520" y="2907792"/>
             <a:ext cx="4389120" cy="246888"/>
           </a:xfrm>
           <a:prstGeom prst="rect">
@@ -9779,7 +9779,7 @@
                   <a:schemeClr val="tx1"/>
                 </a:solidFill>
               </a:rPr>
-              <a:t>Click “Print forms for [your GKK]”</a:t>
+              <a:t>Send each family its code</a:t>
             </a:r>
             <a:endParaRPr lang="en-US" sz="1250" dirty="0"/>
           </a:p>
@@ -9793,8 +9793,8 @@
         </p:nvSpPr>
         <p:spPr>
           <a:xfrm>
-            <a:off x="4160520" y="3374136"/>
-            <a:ext cx="4389120" cy="347472"/>
+            <a:off x="4160520" y="3136392"/>
+            <a:ext cx="4389120" cy="329184"/>
           </a:xfrm>
           <a:prstGeom prst="rect">
             <a:avLst/>
@@ -9815,7 +9815,7 @@
                   <a:schemeClr val="tx2"/>
                 </a:solidFill>
               </a:rPr>
-              <a:t>One pre-filled page per household, with its QR code and online code. Print form on a row prints just one.</a:t>
+              <a:t>Households → row menu → Get codes. Copy the reference number and code, and send them privately by text or Messenger.</a:t>
             </a:r>
             <a:endParaRPr lang="en-US" sz="1050" dirty="0"/>
           </a:p>
@@ -9829,12 +9829,12 @@
         </p:nvSpPr>
         <p:spPr>
           <a:xfrm>
-            <a:off x="3474720" y="3858768"/>
-            <a:ext cx="5212080" cy="713232"/>
+            <a:off x="3474720" y="3566160"/>
+            <a:ext cx="5212080" cy="658368"/>
           </a:xfrm>
           <a:prstGeom prst="roundRect">
             <a:avLst>
-              <a:gd name="adj" fmla="val 10256"/>
+              <a:gd name="adj" fmla="val 11111"/>
             </a:avLst>
           </a:prstGeom>
           <a:solidFill>
@@ -9851,7 +9851,7 @@
         </p:nvSpPr>
         <p:spPr>
           <a:xfrm>
-            <a:off x="3611880" y="4023360"/>
+            <a:off x="3611880" y="3703320"/>
             <a:ext cx="384048" cy="384048"/>
           </a:xfrm>
           <a:prstGeom prst="ellipse">
@@ -9871,7 +9871,7 @@
         </p:nvSpPr>
         <p:spPr>
           <a:xfrm>
-            <a:off x="3611880" y="4023360"/>
+            <a:off x="3611880" y="3703320"/>
             <a:ext cx="384048" cy="384048"/>
           </a:xfrm>
           <a:prstGeom prst="rect">
@@ -9907,7 +9907,7 @@
         </p:nvSpPr>
         <p:spPr>
           <a:xfrm>
-            <a:off x="4160520" y="3931920"/>
+            <a:off x="4160520" y="3639312"/>
             <a:ext cx="4389120" cy="246888"/>
           </a:xfrm>
           <a:prstGeom prst="rect">
@@ -9929,7 +9929,7 @@
                   <a:schemeClr val="tx1"/>
                 </a:solidFill>
               </a:rPr>
-              <a:t>Hand out the forms</a:t>
+              <a:t>Announce the online census</a:t>
             </a:r>
             <a:endParaRPr lang="en-US" sz="1250" dirty="0"/>
           </a:p>
@@ -9943,8 +9943,8 @@
         </p:nvSpPr>
         <p:spPr>
           <a:xfrm>
-            <a:off x="4160520" y="4187952"/>
-            <a:ext cx="4389120" cy="347472"/>
+            <a:off x="4160520" y="3867912"/>
+            <a:ext cx="4389120" cy="329184"/>
           </a:xfrm>
           <a:prstGeom prst="rect">
             <a:avLst/>
@@ -9965,7 +9965,105 @@
                   <a:schemeClr val="tx2"/>
                 </a:solidFill>
               </a:rPr>
-              <a:t>Go by Family Grouping. Tell families they can fill in the paper form or scan the QR code to answer online.</a:t>
+              <a:t>At GKK meetings and Bible sharing: open the parish website and tap “Narehistro na? I-update ang inyong rekord”.</a:t>
+            </a:r>
+            <a:endParaRPr lang="en-US" sz="1050" dirty="0"/>
+          </a:p>
+        </p:txBody>
+      </p:sp>
+      <p:sp>
+        <p:nvSpPr>
+          <p:cNvPr id="30" name="Optional print card"/>
+          <p:cNvSpPr/>
+          <p:nvPr/>
+        </p:nvSpPr>
+        <p:spPr>
+          <a:xfrm>
+            <a:off x="3474720" y="4343400"/>
+            <a:ext cx="5212080" cy="347472"/>
+          </a:xfrm>
+          <a:prstGeom prst="roundRect">
+            <a:avLst>
+              <a:gd name="adj" fmla="val 21053"/>
+            </a:avLst>
+          </a:prstGeom>
+          <a:solidFill>
+            <a:schemeClr val="bg1"/>
+          </a:solidFill>
+          <a:ln w="9525">
+            <a:solidFill>
+              <a:srgbClr val="C39B4E"/>
+            </a:solidFill>
+            <a:prstDash val="dash"/>
+          </a:ln>
+        </p:spPr>
+      </p:sp>
+      <p:pic>
+        <p:nvPicPr>
+          <p:cNvPr id="31" name="Optional print icon" descr="preencoded.png">    </p:cNvPr>
+          <p:cNvPicPr>
+            <a:picLocks noChangeAspect="1"/>
+          </p:cNvPicPr>
+          <p:nvPr/>
+        </p:nvPicPr>
+        <p:blipFill>
+          <a:blip r:embed="rId2"/>
+          <a:stretch>
+            <a:fillRect/>
+          </a:stretch>
+        </p:blipFill>
+        <p:spPr>
+          <a:xfrm>
+            <a:off x="3611880" y="4407408"/>
+            <a:ext cx="219456" cy="219456"/>
+          </a:xfrm>
+          <a:prstGeom prst="rect">
+            <a:avLst/>
+          </a:prstGeom>
+        </p:spPr>
+      </p:pic>
+      <p:sp>
+        <p:nvSpPr>
+          <p:cNvPr id="32" name="Optional print text"/>
+          <p:cNvSpPr txBox="1"/>
+          <p:nvPr/>
+        </p:nvSpPr>
+        <p:spPr>
+          <a:xfrm>
+            <a:off x="3931920" y="4343400"/>
+            <a:ext cx="4663440" cy="347472"/>
+          </a:xfrm>
+          <a:prstGeom prst="rect">
+            <a:avLst/>
+          </a:prstGeom>
+          <a:noFill/>
+          <a:ln/>
+        </p:spPr>
+        <p:txBody>
+          <a:bodyPr wrap="square" lIns="0" tIns="0" rIns="0" bIns="0" rtlCol="0" anchor="ctr"/>
+          <a:lstStyle/>
+          <a:p>
+            <a:pPr indent="0" marL="0">
+              <a:buNone/>
+            </a:pPr>
+            <a:r>
+              <a:rPr lang="en-US" sz="1050" b="1" dirty="0">
+                <a:solidFill>
+                  <a:schemeClr val="accent4"/>
+                </a:solidFill>
+              </a:rPr>
+              <a:t>Optional: </a:t>
+            </a:r>
+            <a:pPr indent="0" marL="0">
+              <a:buNone/>
+            </a:pPr>
+            <a:r>
+              <a:rPr lang="en-US" sz="1050" dirty="0">
+                <a:solidFill>
+                  <a:schemeClr val="tx2"/>
+                </a:solidFill>
+              </a:rPr>
+              <a:t>Print forms for [your GKK], only for families who need paper.</a:t>
             </a:r>
             <a:endParaRPr lang="en-US" sz="1050" dirty="0"/>
           </a:p>
@@ -10133,7 +10231,7 @@
             </a:avLst>
           </a:prstGeom>
           <a:solidFill>
-            <a:schemeClr val="tx1"/>
+            <a:schemeClr val="bg2"/>
           </a:solidFill>
           <a:ln/>
         </p:spPr>
@@ -10165,7 +10263,7 @@
             <a:r>
               <a:rPr lang="en-US" sz="1000" b="1" dirty="0">
                 <a:solidFill>
-                  <a:schemeClr val="bg1"/>
+                  <a:schemeClr val="tx1"/>
                 </a:solidFill>
               </a:rPr>
               <a:t>Households</a:t>
@@ -10191,7 +10289,7 @@
             </a:avLst>
           </a:prstGeom>
           <a:solidFill>
-            <a:schemeClr val="bg2"/>
+            <a:schemeClr val="tx1"/>
           </a:solidFill>
           <a:ln/>
         </p:spPr>
@@ -10223,7 +10321,7 @@
             <a:r>
               <a:rPr lang="en-US" sz="1000" b="1" dirty="0">
                 <a:solidFill>
-                  <a:schemeClr val="tx1"/>
+                  <a:schemeClr val="bg1"/>
                 </a:solidFill>
               </a:rPr>
               <a:t>Online updates (2)</a:t>
@@ -11020,7 +11118,7 @@
             </a:avLst>
           </a:prstGeom>
           <a:solidFill>
-            <a:schemeClr val="accent2"/>
+            <a:schemeClr val="tx2"/>
           </a:solidFill>
           <a:ln/>
         </p:spPr>
@@ -11055,7 +11153,7 @@
                   <a:schemeClr val="bg1"/>
                 </a:solidFill>
               </a:rPr>
-              <a:t>Partly confirmed</a:t>
+              <a:t>Not started</a:t>
             </a:r>
             <a:endParaRPr lang="en-US" sz="900" dirty="0"/>
           </a:p>
@@ -11063,7 +11161,65 @@
       </p:sp>
       <p:sp>
         <p:nvSpPr>
-          <p:cNvPr id="34" name="Row 2 button"/>
+          <p:cNvPr id="34" name="Row 2 online chip"/>
+          <p:cNvSpPr/>
+          <p:nvPr/>
+        </p:nvSpPr>
+        <p:spPr>
+          <a:xfrm>
+            <a:off x="3172968" y="3127248"/>
+            <a:ext cx="1261872" cy="237744"/>
+          </a:xfrm>
+          <a:prstGeom prst="roundRect">
+            <a:avLst>
+              <a:gd name="adj" fmla="val 50000"/>
+            </a:avLst>
+          </a:prstGeom>
+          <a:solidFill>
+            <a:schemeClr val="accent1"/>
+          </a:solidFill>
+          <a:ln/>
+        </p:spPr>
+      </p:sp>
+      <p:sp>
+        <p:nvSpPr>
+          <p:cNvPr id="35" name="Row 2 online label"/>
+          <p:cNvSpPr txBox="1"/>
+          <p:nvPr/>
+        </p:nvSpPr>
+        <p:spPr>
+          <a:xfrm>
+            <a:off x="3172968" y="3127248"/>
+            <a:ext cx="1261872" cy="237744"/>
+          </a:xfrm>
+          <a:prstGeom prst="rect">
+            <a:avLst/>
+          </a:prstGeom>
+          <a:noFill/>
+          <a:ln/>
+        </p:spPr>
+        <p:txBody>
+          <a:bodyPr wrap="square" lIns="0" tIns="0" rIns="0" bIns="0" rtlCol="0" anchor="ctr"/>
+          <a:lstStyle/>
+          <a:p>
+            <a:pPr algn="ctr" indent="0" marL="0">
+              <a:buNone/>
+            </a:pPr>
+            <a:r>
+              <a:rPr lang="en-US" sz="850" b="1" dirty="0">
+                <a:solidFill>
+                  <a:schemeClr val="bg1"/>
+                </a:solidFill>
+              </a:rPr>
+              <a:t>Sent online · to review</a:t>
+            </a:r>
+            <a:endParaRPr lang="en-US" sz="850" dirty="0"/>
+          </a:p>
+        </p:txBody>
+      </p:sp>
+      <p:sp>
+        <p:nvSpPr>
+          <p:cNvPr id="36" name="Row 2 button"/>
           <p:cNvSpPr/>
           <p:nvPr/>
         </p:nvSpPr>
@@ -11090,7 +11246,7 @@
       </p:sp>
       <p:sp>
         <p:nvSpPr>
-          <p:cNvPr id="35" name="Row 2 button label"/>
+          <p:cNvPr id="37" name="Row 2 button label"/>
           <p:cNvSpPr txBox="1"/>
           <p:nvPr/>
         </p:nvSpPr>
@@ -11126,7 +11282,7 @@
       </p:sp>
       <p:sp>
         <p:nvSpPr>
-          <p:cNvPr id="36" name="Row 3 divider"/>
+          <p:cNvPr id="38" name="Row 3 divider"/>
           <p:cNvSpPr/>
           <p:nvPr/>
         </p:nvSpPr>
@@ -11149,7 +11305,7 @@
       </p:sp>
       <p:sp>
         <p:nvSpPr>
-          <p:cNvPr id="37" name="Row 3 household"/>
+          <p:cNvPr id="39" name="Row 3 household"/>
           <p:cNvSpPr txBox="1"/>
           <p:nvPr/>
         </p:nvSpPr>
@@ -11199,7 +11355,7 @@
       </p:sp>
       <p:sp>
         <p:nvSpPr>
-          <p:cNvPr id="38" name="Row 3 progress chip"/>
+          <p:cNvPr id="40" name="Row 3 progress chip"/>
           <p:cNvSpPr/>
           <p:nvPr/>
         </p:nvSpPr>
@@ -11221,7 +11377,7 @@
       </p:sp>
       <p:sp>
         <p:nvSpPr>
-          <p:cNvPr id="39" name="Row 3 progress label"/>
+          <p:cNvPr id="41" name="Row 3 progress label"/>
           <p:cNvSpPr txBox="1"/>
           <p:nvPr/>
         </p:nvSpPr>
@@ -11252,64 +11408,6 @@
               <a:t>Not started</a:t>
             </a:r>
             <a:endParaRPr lang="en-US" sz="900" dirty="0"/>
-          </a:p>
-        </p:txBody>
-      </p:sp>
-      <p:sp>
-        <p:nvSpPr>
-          <p:cNvPr id="40" name="Row 3 online chip"/>
-          <p:cNvSpPr/>
-          <p:nvPr/>
-        </p:nvSpPr>
-        <p:spPr>
-          <a:xfrm>
-            <a:off x="3172968" y="3675888"/>
-            <a:ext cx="1261872" cy="237744"/>
-          </a:xfrm>
-          <a:prstGeom prst="roundRect">
-            <a:avLst>
-              <a:gd name="adj" fmla="val 50000"/>
-            </a:avLst>
-          </a:prstGeom>
-          <a:solidFill>
-            <a:schemeClr val="accent1"/>
-          </a:solidFill>
-          <a:ln/>
-        </p:spPr>
-      </p:sp>
-      <p:sp>
-        <p:nvSpPr>
-          <p:cNvPr id="41" name="Row 3 online label"/>
-          <p:cNvSpPr txBox="1"/>
-          <p:nvPr/>
-        </p:nvSpPr>
-        <p:spPr>
-          <a:xfrm>
-            <a:off x="3172968" y="3675888"/>
-            <a:ext cx="1261872" cy="237744"/>
-          </a:xfrm>
-          <a:prstGeom prst="rect">
-            <a:avLst/>
-          </a:prstGeom>
-          <a:noFill/>
-          <a:ln/>
-        </p:spPr>
-        <p:txBody>
-          <a:bodyPr wrap="square" lIns="0" tIns="0" rIns="0" bIns="0" rtlCol="0" anchor="ctr"/>
-          <a:lstStyle/>
-          <a:p>
-            <a:pPr algn="ctr" indent="0" marL="0">
-              <a:buNone/>
-            </a:pPr>
-            <a:r>
-              <a:rPr lang="en-US" sz="850" b="1" dirty="0">
-                <a:solidFill>
-                  <a:schemeClr val="bg1"/>
-                </a:solidFill>
-              </a:rPr>
-              <a:t>Sent online · to review</a:t>
-            </a:r>
-            <a:endParaRPr lang="en-US" sz="850" dirty="0"/>
           </a:p>
         </p:txBody>
       </p:sp>
@@ -11522,7 +11620,7 @@
                   <a:schemeClr val="tx2"/>
                 </a:solidFill>
               </a:rPr>
-              <a:t>Households to record, Online updates to review, Results by GKK, and Last year’s list.</a:t>
+              <a:t>Online updates to approve, Households to see who has answered, Results by GKK, Last year’s list.</a:t>
             </a:r>
             <a:endParaRPr lang="en-US" sz="1050" dirty="0"/>
           </a:p>
@@ -11754,7 +11852,7 @@
                   <a:schemeClr val="tx2"/>
                 </a:solidFill>
               </a:rPr>
-              <a:t>Not started → Partly confirmed → Confirmed. Filter by Not started to see who is left.</a:t>
+              <a:t>Not started → Partly confirmed → Confirmed. Filter by Not started and send those families a reminder.</a:t>
             </a:r>
             <a:endParaRPr lang="en-US" sz="1050" dirty="0"/>
           </a:p>
@@ -11870,7 +11968,7 @@
                   <a:schemeClr val="tx2"/>
                 </a:solidFill>
               </a:rPr>
-              <a:t>The family answered online. Approve it under Online updates.</a:t>
+              <a:t>The family sent its update online. Approve it under Online updates.</a:t>
             </a:r>
             <a:endParaRPr lang="en-US" sz="1050" dirty="0"/>
           </a:p>
@@ -11981,7 +12079,7 @@
                 <a:ea typeface="Cambria" pitchFamily="34" charset="-122"/>
                 <a:cs typeface="Cambria" pitchFamily="34" charset="-120"/>
               </a:rPr>
-              <a:t>Recording a household’s answers</a:t>
+              <a:t>The main route: families update online</a:t>
             </a:r>
             <a:endParaRPr lang="en-US" sz="2600" dirty="0"/>
           </a:p>
@@ -11989,13 +12087,1113 @@
       </p:sp>
       <p:sp>
         <p:nvSpPr>
-          <p:cNvPr id="3" name="Record step 1 number circle"/>
+          <p:cNvPr id="3" name="The family lane label"/>
           <p:cNvSpPr/>
           <p:nvPr/>
         </p:nvSpPr>
         <p:spPr>
           <a:xfrm>
-            <a:off x="457200" y="1115568"/>
+            <a:off x="457200" y="1051560"/>
+            <a:ext cx="1143000" cy="1161288"/>
+          </a:xfrm>
+          <a:prstGeom prst="roundRect">
+            <a:avLst>
+              <a:gd name="adj" fmla="val 6400"/>
+            </a:avLst>
+          </a:prstGeom>
+          <a:solidFill>
+            <a:schemeClr val="accent3"/>
+          </a:solidFill>
+          <a:ln/>
+        </p:spPr>
+      </p:sp>
+      <p:sp>
+        <p:nvSpPr>
+          <p:cNvPr id="4" name="The family lane circle"/>
+          <p:cNvSpPr/>
+          <p:nvPr/>
+        </p:nvSpPr>
+        <p:spPr>
+          <a:xfrm>
+            <a:off x="786384" y="1207008"/>
+            <a:ext cx="475488" cy="475488"/>
+          </a:xfrm>
+          <a:prstGeom prst="ellipse">
+            <a:avLst/>
+          </a:prstGeom>
+          <a:solidFill>
+            <a:schemeClr val="bg1"/>
+          </a:solidFill>
+          <a:ln/>
+        </p:spPr>
+      </p:sp>
+      <p:pic>
+        <p:nvPicPr>
+          <p:cNvPr id="5" name="The family lane icon" descr="The family lane">    </p:cNvPr>
+          <p:cNvPicPr>
+            <a:picLocks noChangeAspect="1"/>
+          </p:cNvPicPr>
+          <p:nvPr/>
+        </p:nvPicPr>
+        <p:blipFill>
+          <a:blip r:embed="rId1"/>
+          <a:stretch>
+            <a:fillRect/>
+          </a:stretch>
+        </p:blipFill>
+        <p:spPr>
+          <a:xfrm>
+            <a:off x="900501" y="1321125"/>
+            <a:ext cx="247254" cy="247254"/>
+          </a:xfrm>
+          <a:prstGeom prst="rect">
+            <a:avLst/>
+          </a:prstGeom>
+        </p:spPr>
+      </p:pic>
+      <p:sp>
+        <p:nvSpPr>
+          <p:cNvPr id="6" name="The family lane name"/>
+          <p:cNvSpPr txBox="1"/>
+          <p:nvPr/>
+        </p:nvSpPr>
+        <p:spPr>
+          <a:xfrm>
+            <a:off x="457200" y="1764792"/>
+            <a:ext cx="1143000" cy="320040"/>
+          </a:xfrm>
+          <a:prstGeom prst="rect">
+            <a:avLst/>
+          </a:prstGeom>
+          <a:noFill/>
+          <a:ln/>
+        </p:spPr>
+        <p:txBody>
+          <a:bodyPr wrap="square" lIns="0" tIns="0" rIns="0" bIns="0" rtlCol="0" anchor="t"/>
+          <a:lstStyle/>
+          <a:p>
+            <a:pPr algn="ctr" indent="0" marL="0">
+              <a:buNone/>
+            </a:pPr>
+            <a:r>
+              <a:rPr lang="en-US" sz="1300" b="1" dirty="0">
+                <a:solidFill>
+                  <a:schemeClr val="bg1"/>
+                </a:solidFill>
+              </a:rPr>
+              <a:t>The family</a:t>
+            </a:r>
+            <a:endParaRPr lang="en-US" sz="1300" dirty="0"/>
+          </a:p>
+        </p:txBody>
+      </p:sp>
+      <p:sp>
+        <p:nvSpPr>
+          <p:cNvPr id="7" name="The family step 1 card"/>
+          <p:cNvSpPr/>
+          <p:nvPr/>
+        </p:nvSpPr>
+        <p:spPr>
+          <a:xfrm>
+            <a:off x="1737360" y="1051560"/>
+            <a:ext cx="1600200" cy="1161288"/>
+          </a:xfrm>
+          <a:prstGeom prst="roundRect">
+            <a:avLst>
+              <a:gd name="adj" fmla="val 6299"/>
+            </a:avLst>
+          </a:prstGeom>
+          <a:solidFill>
+            <a:schemeClr val="bg2"/>
+          </a:solidFill>
+          <a:ln/>
+        </p:spPr>
+      </p:sp>
+      <p:sp>
+        <p:nvSpPr>
+          <p:cNvPr id="8" name="The family step 1 heading"/>
+          <p:cNvSpPr txBox="1"/>
+          <p:nvPr/>
+        </p:nvSpPr>
+        <p:spPr>
+          <a:xfrm>
+            <a:off x="1856232" y="1161288"/>
+            <a:ext cx="1371600" cy="256032"/>
+          </a:xfrm>
+          <a:prstGeom prst="rect">
+            <a:avLst/>
+          </a:prstGeom>
+          <a:noFill/>
+          <a:ln/>
+        </p:spPr>
+        <p:txBody>
+          <a:bodyPr wrap="square" lIns="0" tIns="0" rIns="0" bIns="0" rtlCol="0" anchor="t"/>
+          <a:lstStyle/>
+          <a:p>
+            <a:pPr indent="0" marL="0">
+              <a:buNone/>
+            </a:pPr>
+            <a:r>
+              <a:rPr lang="en-US" sz="1200" b="1" dirty="0">
+                <a:solidFill>
+                  <a:schemeClr val="tx1"/>
+                </a:solidFill>
+              </a:rPr>
+              <a:t>Open the website</a:t>
+            </a:r>
+            <a:endParaRPr lang="en-US" sz="1200" dirty="0"/>
+          </a:p>
+        </p:txBody>
+      </p:sp>
+      <p:sp>
+        <p:nvSpPr>
+          <p:cNvPr id="9" name="The family step 1 text"/>
+          <p:cNvSpPr txBox="1"/>
+          <p:nvPr/>
+        </p:nvSpPr>
+        <p:spPr>
+          <a:xfrm>
+            <a:off x="1856232" y="1444752"/>
+            <a:ext cx="1371600" cy="713232"/>
+          </a:xfrm>
+          <a:prstGeom prst="rect">
+            <a:avLst/>
+          </a:prstGeom>
+          <a:noFill/>
+          <a:ln/>
+        </p:spPr>
+        <p:txBody>
+          <a:bodyPr wrap="square" lIns="0" tIns="0" rIns="0" bIns="0" rtlCol="0" anchor="t"/>
+          <a:lstStyle/>
+          <a:p>
+            <a:pPr indent="0" marL="0">
+              <a:buNone/>
+            </a:pPr>
+            <a:r>
+              <a:rPr lang="en-US" sz="1050" dirty="0">
+                <a:solidFill>
+                  <a:schemeClr val="tx2"/>
+                </a:solidFill>
+              </a:rPr>
+              <a:t>On the parish website, tap “Narehistro na? I‑update ang inyong rekord”.</a:t>
+            </a:r>
+            <a:endParaRPr lang="en-US" sz="1050" dirty="0"/>
+          </a:p>
+        </p:txBody>
+      </p:sp>
+      <p:pic>
+        <p:nvPicPr>
+          <p:cNvPr id="10" name="The family arrow 1" descr="preencoded.png">    </p:cNvPr>
+          <p:cNvPicPr>
+            <a:picLocks noChangeAspect="1"/>
+          </p:cNvPicPr>
+          <p:nvPr/>
+        </p:nvPicPr>
+        <p:blipFill>
+          <a:blip r:embed="rId2"/>
+          <a:stretch>
+            <a:fillRect/>
+          </a:stretch>
+        </p:blipFill>
+        <p:spPr>
+          <a:xfrm>
+            <a:off x="3355848" y="1563624"/>
+            <a:ext cx="146304" cy="146304"/>
+          </a:xfrm>
+          <a:prstGeom prst="rect">
+            <a:avLst/>
+          </a:prstGeom>
+        </p:spPr>
+      </p:pic>
+      <p:sp>
+        <p:nvSpPr>
+          <p:cNvPr id="11" name="The family step 2 card"/>
+          <p:cNvSpPr/>
+          <p:nvPr/>
+        </p:nvSpPr>
+        <p:spPr>
+          <a:xfrm>
+            <a:off x="3520440" y="1051560"/>
+            <a:ext cx="1600200" cy="1161288"/>
+          </a:xfrm>
+          <a:prstGeom prst="roundRect">
+            <a:avLst>
+              <a:gd name="adj" fmla="val 6299"/>
+            </a:avLst>
+          </a:prstGeom>
+          <a:solidFill>
+            <a:schemeClr val="bg2"/>
+          </a:solidFill>
+          <a:ln/>
+        </p:spPr>
+      </p:sp>
+      <p:sp>
+        <p:nvSpPr>
+          <p:cNvPr id="12" name="The family step 2 heading"/>
+          <p:cNvSpPr txBox="1"/>
+          <p:nvPr/>
+        </p:nvSpPr>
+        <p:spPr>
+          <a:xfrm>
+            <a:off x="3639312" y="1161288"/>
+            <a:ext cx="1371600" cy="256032"/>
+          </a:xfrm>
+          <a:prstGeom prst="rect">
+            <a:avLst/>
+          </a:prstGeom>
+          <a:noFill/>
+          <a:ln/>
+        </p:spPr>
+        <p:txBody>
+          <a:bodyPr wrap="square" lIns="0" tIns="0" rIns="0" bIns="0" rtlCol="0" anchor="t"/>
+          <a:lstStyle/>
+          <a:p>
+            <a:pPr indent="0" marL="0">
+              <a:buNone/>
+            </a:pPr>
+            <a:r>
+              <a:rPr lang="en-US" sz="1200" b="1" dirty="0">
+                <a:solidFill>
+                  <a:schemeClr val="tx1"/>
+                </a:solidFill>
+              </a:rPr>
+              <a:t>Sign in</a:t>
+            </a:r>
+            <a:endParaRPr lang="en-US" sz="1200" dirty="0"/>
+          </a:p>
+        </p:txBody>
+      </p:sp>
+      <p:sp>
+        <p:nvSpPr>
+          <p:cNvPr id="13" name="The family step 2 text"/>
+          <p:cNvSpPr txBox="1"/>
+          <p:nvPr/>
+        </p:nvSpPr>
+        <p:spPr>
+          <a:xfrm>
+            <a:off x="3639312" y="1444752"/>
+            <a:ext cx="1371600" cy="713232"/>
+          </a:xfrm>
+          <a:prstGeom prst="rect">
+            <a:avLst/>
+          </a:prstGeom>
+          <a:noFill/>
+          <a:ln/>
+        </p:spPr>
+        <p:txBody>
+          <a:bodyPr wrap="square" lIns="0" tIns="0" rIns="0" bIns="0" rtlCol="0" anchor="t"/>
+          <a:lstStyle/>
+          <a:p>
+            <a:pPr indent="0" marL="0">
+              <a:buNone/>
+            </a:pPr>
+            <a:r>
+              <a:rPr lang="en-US" sz="1050" dirty="0">
+                <a:solidFill>
+                  <a:schemeClr val="tx2"/>
+                </a:solidFill>
+              </a:rPr>
+              <a:t>With the reference number and code you sent them.</a:t>
+            </a:r>
+            <a:endParaRPr lang="en-US" sz="1050" dirty="0"/>
+          </a:p>
+        </p:txBody>
+      </p:sp>
+      <p:pic>
+        <p:nvPicPr>
+          <p:cNvPr id="14" name="The family arrow 2" descr="preencoded.png">    </p:cNvPr>
+          <p:cNvPicPr>
+            <a:picLocks noChangeAspect="1"/>
+          </p:cNvPicPr>
+          <p:nvPr/>
+        </p:nvPicPr>
+        <p:blipFill>
+          <a:blip r:embed="rId3"/>
+          <a:stretch>
+            <a:fillRect/>
+          </a:stretch>
+        </p:blipFill>
+        <p:spPr>
+          <a:xfrm>
+            <a:off x="5138928" y="1563624"/>
+            <a:ext cx="146304" cy="146304"/>
+          </a:xfrm>
+          <a:prstGeom prst="rect">
+            <a:avLst/>
+          </a:prstGeom>
+        </p:spPr>
+      </p:pic>
+      <p:sp>
+        <p:nvSpPr>
+          <p:cNvPr id="15" name="The family step 3 card"/>
+          <p:cNvSpPr/>
+          <p:nvPr/>
+        </p:nvSpPr>
+        <p:spPr>
+          <a:xfrm>
+            <a:off x="5303520" y="1051560"/>
+            <a:ext cx="1600200" cy="1161288"/>
+          </a:xfrm>
+          <a:prstGeom prst="roundRect">
+            <a:avLst>
+              <a:gd name="adj" fmla="val 6299"/>
+            </a:avLst>
+          </a:prstGeom>
+          <a:solidFill>
+            <a:schemeClr val="bg2"/>
+          </a:solidFill>
+          <a:ln/>
+        </p:spPr>
+      </p:sp>
+      <p:sp>
+        <p:nvSpPr>
+          <p:cNvPr id="16" name="The family step 3 heading"/>
+          <p:cNvSpPr txBox="1"/>
+          <p:nvPr/>
+        </p:nvSpPr>
+        <p:spPr>
+          <a:xfrm>
+            <a:off x="5422392" y="1161288"/>
+            <a:ext cx="1371600" cy="256032"/>
+          </a:xfrm>
+          <a:prstGeom prst="rect">
+            <a:avLst/>
+          </a:prstGeom>
+          <a:noFill/>
+          <a:ln/>
+        </p:spPr>
+        <p:txBody>
+          <a:bodyPr wrap="square" lIns="0" tIns="0" rIns="0" bIns="0" rtlCol="0" anchor="t"/>
+          <a:lstStyle/>
+          <a:p>
+            <a:pPr indent="0" marL="0">
+              <a:buNone/>
+            </a:pPr>
+            <a:r>
+              <a:rPr lang="en-US" sz="1200" b="1" dirty="0">
+                <a:solidFill>
+                  <a:schemeClr val="tx1"/>
+                </a:solidFill>
+              </a:rPr>
+              <a:t>Update the record</a:t>
+            </a:r>
+            <a:endParaRPr lang="en-US" sz="1200" dirty="0"/>
+          </a:p>
+        </p:txBody>
+      </p:sp>
+      <p:sp>
+        <p:nvSpPr>
+          <p:cNvPr id="17" name="The family step 3 text"/>
+          <p:cNvSpPr txBox="1"/>
+          <p:nvPr/>
+        </p:nvSpPr>
+        <p:spPr>
+          <a:xfrm>
+            <a:off x="5422392" y="1444752"/>
+            <a:ext cx="1371600" cy="713232"/>
+          </a:xfrm>
+          <a:prstGeom prst="rect">
+            <a:avLst/>
+          </a:prstGeom>
+          <a:noFill/>
+          <a:ln/>
+        </p:spPr>
+        <p:txBody>
+          <a:bodyPr wrap="square" lIns="0" tIns="0" rIns="0" bIns="0" rtlCol="0" anchor="t"/>
+          <a:lstStyle/>
+          <a:p>
+            <a:pPr indent="0" marL="0">
+              <a:buNone/>
+            </a:pPr>
+            <a:r>
+              <a:rPr lang="en-US" sz="1050" dirty="0">
+                <a:solidFill>
+                  <a:schemeClr val="tx2"/>
+                </a:solidFill>
+              </a:rPr>
+              <a:t>Each member’s answers, contact details and any newborns.</a:t>
+            </a:r>
+            <a:endParaRPr lang="en-US" sz="1050" dirty="0"/>
+          </a:p>
+        </p:txBody>
+      </p:sp>
+      <p:pic>
+        <p:nvPicPr>
+          <p:cNvPr id="18" name="The family arrow 3" descr="preencoded.png">    </p:cNvPr>
+          <p:cNvPicPr>
+            <a:picLocks noChangeAspect="1"/>
+          </p:cNvPicPr>
+          <p:nvPr/>
+        </p:nvPicPr>
+        <p:blipFill>
+          <a:blip r:embed="rId4"/>
+          <a:stretch>
+            <a:fillRect/>
+          </a:stretch>
+        </p:blipFill>
+        <p:spPr>
+          <a:xfrm>
+            <a:off x="6922008" y="1563624"/>
+            <a:ext cx="146304" cy="146304"/>
+          </a:xfrm>
+          <a:prstGeom prst="rect">
+            <a:avLst/>
+          </a:prstGeom>
+        </p:spPr>
+      </p:pic>
+      <p:sp>
+        <p:nvSpPr>
+          <p:cNvPr id="19" name="The family step 4 card"/>
+          <p:cNvSpPr/>
+          <p:nvPr/>
+        </p:nvSpPr>
+        <p:spPr>
+          <a:xfrm>
+            <a:off x="7086600" y="1051560"/>
+            <a:ext cx="1600200" cy="1161288"/>
+          </a:xfrm>
+          <a:prstGeom prst="roundRect">
+            <a:avLst>
+              <a:gd name="adj" fmla="val 6299"/>
+            </a:avLst>
+          </a:prstGeom>
+          <a:solidFill>
+            <a:schemeClr val="bg2"/>
+          </a:solidFill>
+          <a:ln/>
+        </p:spPr>
+      </p:sp>
+      <p:sp>
+        <p:nvSpPr>
+          <p:cNvPr id="20" name="The family step 4 heading"/>
+          <p:cNvSpPr txBox="1"/>
+          <p:nvPr/>
+        </p:nvSpPr>
+        <p:spPr>
+          <a:xfrm>
+            <a:off x="7205472" y="1161288"/>
+            <a:ext cx="1371600" cy="256032"/>
+          </a:xfrm>
+          <a:prstGeom prst="rect">
+            <a:avLst/>
+          </a:prstGeom>
+          <a:noFill/>
+          <a:ln/>
+        </p:spPr>
+        <p:txBody>
+          <a:bodyPr wrap="square" lIns="0" tIns="0" rIns="0" bIns="0" rtlCol="0" anchor="t"/>
+          <a:lstStyle/>
+          <a:p>
+            <a:pPr indent="0" marL="0">
+              <a:buNone/>
+            </a:pPr>
+            <a:r>
+              <a:rPr lang="en-US" sz="1200" b="1" dirty="0">
+                <a:solidFill>
+                  <a:schemeClr val="tx1"/>
+                </a:solidFill>
+              </a:rPr>
+              <a:t>Send</a:t>
+            </a:r>
+            <a:endParaRPr lang="en-US" sz="1200" dirty="0"/>
+          </a:p>
+        </p:txBody>
+      </p:sp>
+      <p:sp>
+        <p:nvSpPr>
+          <p:cNvPr id="21" name="The family step 4 text"/>
+          <p:cNvSpPr txBox="1"/>
+          <p:nvPr/>
+        </p:nvSpPr>
+        <p:spPr>
+          <a:xfrm>
+            <a:off x="7205472" y="1444752"/>
+            <a:ext cx="1371600" cy="713232"/>
+          </a:xfrm>
+          <a:prstGeom prst="rect">
+            <a:avLst/>
+          </a:prstGeom>
+          <a:noFill/>
+          <a:ln/>
+        </p:spPr>
+        <p:txBody>
+          <a:bodyPr wrap="square" lIns="0" tIns="0" rIns="0" bIns="0" rtlCol="0" anchor="t"/>
+          <a:lstStyle/>
+          <a:p>
+            <a:pPr indent="0" marL="0">
+              <a:buNone/>
+            </a:pPr>
+            <a:r>
+              <a:rPr lang="en-US" sz="1050" dirty="0">
+                <a:solidFill>
+                  <a:schemeClr val="tx2"/>
+                </a:solidFill>
+              </a:rPr>
+              <a:t>Tick the privacy consent, then “Ipadala sa parokya”.</a:t>
+            </a:r>
+            <a:endParaRPr lang="en-US" sz="1050" dirty="0"/>
+          </a:p>
+        </p:txBody>
+      </p:sp>
+      <p:sp>
+        <p:nvSpPr>
+          <p:cNvPr id="22" name="You lane label"/>
+          <p:cNvSpPr/>
+          <p:nvPr/>
+        </p:nvSpPr>
+        <p:spPr>
+          <a:xfrm>
+            <a:off x="457200" y="2350008"/>
+            <a:ext cx="1143000" cy="1161288"/>
+          </a:xfrm>
+          <a:prstGeom prst="roundRect">
+            <a:avLst>
+              <a:gd name="adj" fmla="val 6400"/>
+            </a:avLst>
+          </a:prstGeom>
+          <a:solidFill>
+            <a:schemeClr val="accent2"/>
+          </a:solidFill>
+          <a:ln/>
+        </p:spPr>
+      </p:sp>
+      <p:sp>
+        <p:nvSpPr>
+          <p:cNvPr id="23" name="You lane circle"/>
+          <p:cNvSpPr/>
+          <p:nvPr/>
+        </p:nvSpPr>
+        <p:spPr>
+          <a:xfrm>
+            <a:off x="786384" y="2505456"/>
+            <a:ext cx="475488" cy="475488"/>
+          </a:xfrm>
+          <a:prstGeom prst="ellipse">
+            <a:avLst/>
+          </a:prstGeom>
+          <a:solidFill>
+            <a:schemeClr val="bg1"/>
+          </a:solidFill>
+          <a:ln/>
+        </p:spPr>
+      </p:sp>
+      <p:pic>
+        <p:nvPicPr>
+          <p:cNvPr id="24" name="You lane icon" descr="You lane">    </p:cNvPr>
+          <p:cNvPicPr>
+            <a:picLocks noChangeAspect="1"/>
+          </p:cNvPicPr>
+          <p:nvPr/>
+        </p:nvPicPr>
+        <p:blipFill>
+          <a:blip r:embed="rId5"/>
+          <a:stretch>
+            <a:fillRect/>
+          </a:stretch>
+        </p:blipFill>
+        <p:spPr>
+          <a:xfrm>
+            <a:off x="900501" y="2619573"/>
+            <a:ext cx="247254" cy="247254"/>
+          </a:xfrm>
+          <a:prstGeom prst="rect">
+            <a:avLst/>
+          </a:prstGeom>
+        </p:spPr>
+      </p:pic>
+      <p:sp>
+        <p:nvSpPr>
+          <p:cNvPr id="25" name="You lane name"/>
+          <p:cNvSpPr txBox="1"/>
+          <p:nvPr/>
+        </p:nvSpPr>
+        <p:spPr>
+          <a:xfrm>
+            <a:off x="457200" y="3063240"/>
+            <a:ext cx="1143000" cy="320040"/>
+          </a:xfrm>
+          <a:prstGeom prst="rect">
+            <a:avLst/>
+          </a:prstGeom>
+          <a:noFill/>
+          <a:ln/>
+        </p:spPr>
+        <p:txBody>
+          <a:bodyPr wrap="square" lIns="0" tIns="0" rIns="0" bIns="0" rtlCol="0" anchor="t"/>
+          <a:lstStyle/>
+          <a:p>
+            <a:pPr algn="ctr" indent="0" marL="0">
+              <a:buNone/>
+            </a:pPr>
+            <a:r>
+              <a:rPr lang="en-US" sz="1300" b="1" dirty="0">
+                <a:solidFill>
+                  <a:schemeClr val="bg1"/>
+                </a:solidFill>
+              </a:rPr>
+              <a:t>You</a:t>
+            </a:r>
+            <a:endParaRPr lang="en-US" sz="1300" dirty="0"/>
+          </a:p>
+        </p:txBody>
+      </p:sp>
+      <p:sp>
+        <p:nvSpPr>
+          <p:cNvPr id="26" name="You step 1 card"/>
+          <p:cNvSpPr/>
+          <p:nvPr/>
+        </p:nvSpPr>
+        <p:spPr>
+          <a:xfrm>
+            <a:off x="1737360" y="2350008"/>
+            <a:ext cx="1600200" cy="1161288"/>
+          </a:xfrm>
+          <a:prstGeom prst="roundRect">
+            <a:avLst>
+              <a:gd name="adj" fmla="val 6299"/>
+            </a:avLst>
+          </a:prstGeom>
+          <a:solidFill>
+            <a:schemeClr val="bg2"/>
+          </a:solidFill>
+          <a:ln/>
+        </p:spPr>
+      </p:sp>
+      <p:sp>
+        <p:nvSpPr>
+          <p:cNvPr id="27" name="You step 1 heading"/>
+          <p:cNvSpPr txBox="1"/>
+          <p:nvPr/>
+        </p:nvSpPr>
+        <p:spPr>
+          <a:xfrm>
+            <a:off x="1856232" y="2459736"/>
+            <a:ext cx="1371600" cy="256032"/>
+          </a:xfrm>
+          <a:prstGeom prst="rect">
+            <a:avLst/>
+          </a:prstGeom>
+          <a:noFill/>
+          <a:ln/>
+        </p:spPr>
+        <p:txBody>
+          <a:bodyPr wrap="square" lIns="0" tIns="0" rIns="0" bIns="0" rtlCol="0" anchor="t"/>
+          <a:lstStyle/>
+          <a:p>
+            <a:pPr indent="0" marL="0">
+              <a:buNone/>
+            </a:pPr>
+            <a:r>
+              <a:rPr lang="en-US" sz="1200" b="1" dirty="0">
+                <a:solidFill>
+                  <a:schemeClr val="tx1"/>
+                </a:solidFill>
+              </a:rPr>
+              <a:t>See the update</a:t>
+            </a:r>
+            <a:endParaRPr lang="en-US" sz="1200" dirty="0"/>
+          </a:p>
+        </p:txBody>
+      </p:sp>
+      <p:sp>
+        <p:nvSpPr>
+          <p:cNvPr id="28" name="You step 1 text"/>
+          <p:cNvSpPr txBox="1"/>
+          <p:nvPr/>
+        </p:nvSpPr>
+        <p:spPr>
+          <a:xfrm>
+            <a:off x="1856232" y="2743200"/>
+            <a:ext cx="1371600" cy="713232"/>
+          </a:xfrm>
+          <a:prstGeom prst="rect">
+            <a:avLst/>
+          </a:prstGeom>
+          <a:noFill/>
+          <a:ln/>
+        </p:spPr>
+        <p:txBody>
+          <a:bodyPr wrap="square" lIns="0" tIns="0" rIns="0" bIns="0" rtlCol="0" anchor="t"/>
+          <a:lstStyle/>
+          <a:p>
+            <a:pPr indent="0" marL="0">
+              <a:buNone/>
+            </a:pPr>
+            <a:r>
+              <a:rPr lang="en-US" sz="1050" dirty="0">
+                <a:solidFill>
+                  <a:schemeClr val="tx2"/>
+                </a:solidFill>
+              </a:rPr>
+              <a:t>Under Census → Online updates, or in a notification.</a:t>
+            </a:r>
+            <a:endParaRPr lang="en-US" sz="1050" dirty="0"/>
+          </a:p>
+        </p:txBody>
+      </p:sp>
+      <p:pic>
+        <p:nvPicPr>
+          <p:cNvPr id="29" name="You arrow 1" descr="preencoded.png">    </p:cNvPr>
+          <p:cNvPicPr>
+            <a:picLocks noChangeAspect="1"/>
+          </p:cNvPicPr>
+          <p:nvPr/>
+        </p:nvPicPr>
+        <p:blipFill>
+          <a:blip r:embed="rId6"/>
+          <a:stretch>
+            <a:fillRect/>
+          </a:stretch>
+        </p:blipFill>
+        <p:spPr>
+          <a:xfrm>
+            <a:off x="3355848" y="2862072"/>
+            <a:ext cx="146304" cy="146304"/>
+          </a:xfrm>
+          <a:prstGeom prst="rect">
+            <a:avLst/>
+          </a:prstGeom>
+        </p:spPr>
+      </p:pic>
+      <p:sp>
+        <p:nvSpPr>
+          <p:cNvPr id="30" name="You step 2 card"/>
+          <p:cNvSpPr/>
+          <p:nvPr/>
+        </p:nvSpPr>
+        <p:spPr>
+          <a:xfrm>
+            <a:off x="3520440" y="2350008"/>
+            <a:ext cx="1600200" cy="1161288"/>
+          </a:xfrm>
+          <a:prstGeom prst="roundRect">
+            <a:avLst>
+              <a:gd name="adj" fmla="val 6299"/>
+            </a:avLst>
+          </a:prstGeom>
+          <a:solidFill>
+            <a:schemeClr val="bg2"/>
+          </a:solidFill>
+          <a:ln/>
+        </p:spPr>
+      </p:sp>
+      <p:sp>
+        <p:nvSpPr>
+          <p:cNvPr id="31" name="You step 2 heading"/>
+          <p:cNvSpPr txBox="1"/>
+          <p:nvPr/>
+        </p:nvSpPr>
+        <p:spPr>
+          <a:xfrm>
+            <a:off x="3639312" y="2459736"/>
+            <a:ext cx="1371600" cy="256032"/>
+          </a:xfrm>
+          <a:prstGeom prst="rect">
+            <a:avLst/>
+          </a:prstGeom>
+          <a:noFill/>
+          <a:ln/>
+        </p:spPr>
+        <p:txBody>
+          <a:bodyPr wrap="square" lIns="0" tIns="0" rIns="0" bIns="0" rtlCol="0" anchor="t"/>
+          <a:lstStyle/>
+          <a:p>
+            <a:pPr indent="0" marL="0">
+              <a:buNone/>
+            </a:pPr>
+            <a:r>
+              <a:rPr lang="en-US" sz="1200" b="1" dirty="0">
+                <a:solidFill>
+                  <a:schemeClr val="tx1"/>
+                </a:solidFill>
+              </a:rPr>
+              <a:t>Review</a:t>
+            </a:r>
+            <a:endParaRPr lang="en-US" sz="1200" dirty="0"/>
+          </a:p>
+        </p:txBody>
+      </p:sp>
+      <p:sp>
+        <p:nvSpPr>
+          <p:cNvPr id="32" name="You step 2 text"/>
+          <p:cNvSpPr txBox="1"/>
+          <p:nvPr/>
+        </p:nvSpPr>
+        <p:spPr>
+          <a:xfrm>
+            <a:off x="3639312" y="2743200"/>
+            <a:ext cx="1371600" cy="713232"/>
+          </a:xfrm>
+          <a:prstGeom prst="rect">
+            <a:avLst/>
+          </a:prstGeom>
+          <a:noFill/>
+          <a:ln/>
+        </p:spPr>
+        <p:txBody>
+          <a:bodyPr wrap="square" lIns="0" tIns="0" rIns="0" bIns="0" rtlCol="0" anchor="t"/>
+          <a:lstStyle/>
+          <a:p>
+            <a:pPr indent="0" marL="0">
+              <a:buNone/>
+            </a:pPr>
+            <a:r>
+              <a:rPr lang="en-US" sz="1050" dirty="0">
+                <a:solidFill>
+                  <a:schemeClr val="tx2"/>
+                </a:solidFill>
+              </a:rPr>
+              <a:t>Changes show the old value crossed out and the new one in bold.</a:t>
+            </a:r>
+            <a:endParaRPr lang="en-US" sz="1050" dirty="0"/>
+          </a:p>
+        </p:txBody>
+      </p:sp>
+      <p:pic>
+        <p:nvPicPr>
+          <p:cNvPr id="33" name="You arrow 2" descr="preencoded.png">    </p:cNvPr>
+          <p:cNvPicPr>
+            <a:picLocks noChangeAspect="1"/>
+          </p:cNvPicPr>
+          <p:nvPr/>
+        </p:nvPicPr>
+        <p:blipFill>
+          <a:blip r:embed="rId7"/>
+          <a:stretch>
+            <a:fillRect/>
+          </a:stretch>
+        </p:blipFill>
+        <p:spPr>
+          <a:xfrm>
+            <a:off x="5138928" y="2862072"/>
+            <a:ext cx="146304" cy="146304"/>
+          </a:xfrm>
+          <a:prstGeom prst="rect">
+            <a:avLst/>
+          </a:prstGeom>
+        </p:spPr>
+      </p:pic>
+      <p:sp>
+        <p:nvSpPr>
+          <p:cNvPr id="34" name="You step 3 card"/>
+          <p:cNvSpPr/>
+          <p:nvPr/>
+        </p:nvSpPr>
+        <p:spPr>
+          <a:xfrm>
+            <a:off x="5303520" y="2350008"/>
+            <a:ext cx="1600200" cy="1161288"/>
+          </a:xfrm>
+          <a:prstGeom prst="roundRect">
+            <a:avLst>
+              <a:gd name="adj" fmla="val 6299"/>
+            </a:avLst>
+          </a:prstGeom>
+          <a:solidFill>
+            <a:schemeClr val="bg2"/>
+          </a:solidFill>
+          <a:ln/>
+        </p:spPr>
+      </p:sp>
+      <p:sp>
+        <p:nvSpPr>
+          <p:cNvPr id="35" name="You step 3 heading"/>
+          <p:cNvSpPr txBox="1"/>
+          <p:nvPr/>
+        </p:nvSpPr>
+        <p:spPr>
+          <a:xfrm>
+            <a:off x="5422392" y="2459736"/>
+            <a:ext cx="1371600" cy="256032"/>
+          </a:xfrm>
+          <a:prstGeom prst="rect">
+            <a:avLst/>
+          </a:prstGeom>
+          <a:noFill/>
+          <a:ln/>
+        </p:spPr>
+        <p:txBody>
+          <a:bodyPr wrap="square" lIns="0" tIns="0" rIns="0" bIns="0" rtlCol="0" anchor="t"/>
+          <a:lstStyle/>
+          <a:p>
+            <a:pPr indent="0" marL="0">
+              <a:buNone/>
+            </a:pPr>
+            <a:r>
+              <a:rPr lang="en-US" sz="1200" b="1" dirty="0">
+                <a:solidFill>
+                  <a:schemeClr val="tx1"/>
+                </a:solidFill>
+              </a:rPr>
+              <a:t>Approve</a:t>
+            </a:r>
+            <a:endParaRPr lang="en-US" sz="1200" dirty="0"/>
+          </a:p>
+        </p:txBody>
+      </p:sp>
+      <p:sp>
+        <p:nvSpPr>
+          <p:cNvPr id="36" name="You step 3 text"/>
+          <p:cNvSpPr txBox="1"/>
+          <p:nvPr/>
+        </p:nvSpPr>
+        <p:spPr>
+          <a:xfrm>
+            <a:off x="5422392" y="2743200"/>
+            <a:ext cx="1371600" cy="713232"/>
+          </a:xfrm>
+          <a:prstGeom prst="rect">
+            <a:avLst/>
+          </a:prstGeom>
+          <a:noFill/>
+          <a:ln/>
+        </p:spPr>
+        <p:txBody>
+          <a:bodyPr wrap="square" lIns="0" tIns="0" rIns="0" bIns="0" rtlCol="0" anchor="t"/>
+          <a:lstStyle/>
+          <a:p>
+            <a:pPr indent="0" marL="0">
+              <a:buNone/>
+            </a:pPr>
+            <a:r>
+              <a:rPr lang="en-US" sz="1050" dirty="0">
+                <a:solidFill>
+                  <a:schemeClr val="tx2"/>
+                </a:solidFill>
+              </a:rPr>
+              <a:t>Only what the family changed is applied. Members become Confirmed.</a:t>
+            </a:r>
+            <a:endParaRPr lang="en-US" sz="1050" dirty="0"/>
+          </a:p>
+        </p:txBody>
+      </p:sp>
+      <p:pic>
+        <p:nvPicPr>
+          <p:cNvPr id="37" name="You arrow 3" descr="preencoded.png">    </p:cNvPr>
+          <p:cNvPicPr>
+            <a:picLocks noChangeAspect="1"/>
+          </p:cNvPicPr>
+          <p:nvPr/>
+        </p:nvPicPr>
+        <p:blipFill>
+          <a:blip r:embed="rId8"/>
+          <a:stretch>
+            <a:fillRect/>
+          </a:stretch>
+        </p:blipFill>
+        <p:spPr>
+          <a:xfrm>
+            <a:off x="6922008" y="2862072"/>
+            <a:ext cx="146304" cy="146304"/>
+          </a:xfrm>
+          <a:prstGeom prst="rect">
+            <a:avLst/>
+          </a:prstGeom>
+        </p:spPr>
+      </p:pic>
+      <p:sp>
+        <p:nvSpPr>
+          <p:cNvPr id="38" name="You step 4 card"/>
+          <p:cNvSpPr/>
+          <p:nvPr/>
+        </p:nvSpPr>
+        <p:spPr>
+          <a:xfrm>
+            <a:off x="7086600" y="2350008"/>
+            <a:ext cx="1600200" cy="1161288"/>
+          </a:xfrm>
+          <a:prstGeom prst="roundRect">
+            <a:avLst>
+              <a:gd name="adj" fmla="val 6299"/>
+            </a:avLst>
+          </a:prstGeom>
+          <a:solidFill>
+            <a:schemeClr val="bg2"/>
+          </a:solidFill>
+          <a:ln/>
+        </p:spPr>
+      </p:sp>
+      <p:sp>
+        <p:nvSpPr>
+          <p:cNvPr id="39" name="You step 4 heading"/>
+          <p:cNvSpPr txBox="1"/>
+          <p:nvPr/>
+        </p:nvSpPr>
+        <p:spPr>
+          <a:xfrm>
+            <a:off x="7205472" y="2459736"/>
+            <a:ext cx="1371600" cy="256032"/>
+          </a:xfrm>
+          <a:prstGeom prst="rect">
+            <a:avLst/>
+          </a:prstGeom>
+          <a:noFill/>
+          <a:ln/>
+        </p:spPr>
+        <p:txBody>
+          <a:bodyPr wrap="square" lIns="0" tIns="0" rIns="0" bIns="0" rtlCol="0" anchor="t"/>
+          <a:lstStyle/>
+          <a:p>
+            <a:pPr indent="0" marL="0">
+              <a:buNone/>
+            </a:pPr>
+            <a:r>
+              <a:rPr lang="en-US" sz="1200" b="1" dirty="0">
+                <a:solidFill>
+                  <a:schemeClr val="tx1"/>
+                </a:solidFill>
+              </a:rPr>
+              <a:t>Or Reject…</a:t>
+            </a:r>
+            <a:endParaRPr lang="en-US" sz="1200" dirty="0"/>
+          </a:p>
+        </p:txBody>
+      </p:sp>
+      <p:sp>
+        <p:nvSpPr>
+          <p:cNvPr id="40" name="You step 4 text"/>
+          <p:cNvSpPr txBox="1"/>
+          <p:nvPr/>
+        </p:nvSpPr>
+        <p:spPr>
+          <a:xfrm>
+            <a:off x="7205472" y="2743200"/>
+            <a:ext cx="1371600" cy="713232"/>
+          </a:xfrm>
+          <a:prstGeom prst="rect">
+            <a:avLst/>
+          </a:prstGeom>
+          <a:noFill/>
+          <a:ln/>
+        </p:spPr>
+        <p:txBody>
+          <a:bodyPr wrap="square" lIns="0" tIns="0" rIns="0" bIns="0" rtlCol="0" anchor="t"/>
+          <a:lstStyle/>
+          <a:p>
+            <a:pPr indent="0" marL="0">
+              <a:buNone/>
+            </a:pPr>
+            <a:r>
+              <a:rPr lang="en-US" sz="1050" dirty="0">
+                <a:solidFill>
+                  <a:schemeClr val="tx2"/>
+                </a:solidFill>
+              </a:rPr>
+              <a:t>Give a reason. Nothing in the record changes.</a:t>
+            </a:r>
+            <a:endParaRPr lang="en-US" sz="1050" dirty="0"/>
+          </a:p>
+        </p:txBody>
+      </p:sp>
+      <p:sp>
+        <p:nvSpPr>
+          <p:cNvPr id="41" name="Tip 1 circle"/>
+          <p:cNvSpPr/>
+          <p:nvPr/>
+        </p:nvSpPr>
+        <p:spPr>
+          <a:xfrm>
+            <a:off x="457200" y="3931920"/>
             <a:ext cx="347472" cy="347472"/>
           </a:xfrm>
           <a:prstGeom prst="ellipse">
@@ -12007,98 +13205,86 @@
           <a:ln/>
         </p:spPr>
       </p:sp>
-      <p:sp>
-        <p:nvSpPr>
-          <p:cNvPr id="4" name="Record step 1 number"/>
-          <p:cNvSpPr txBox="1"/>
-          <p:nvPr/>
-        </p:nvSpPr>
-        <p:spPr>
-          <a:xfrm>
-            <a:off x="457200" y="1115568"/>
-            <a:ext cx="347472" cy="347472"/>
-          </a:xfrm>
-          <a:prstGeom prst="rect">
-            <a:avLst/>
-          </a:prstGeom>
-          <a:noFill/>
-          <a:ln/>
-        </p:spPr>
-        <p:txBody>
-          <a:bodyPr wrap="square" lIns="0" tIns="0" rIns="0" bIns="0" rtlCol="0" anchor="ctr"/>
-          <a:lstStyle/>
-          <a:p>
-            <a:pPr algn="ctr" indent="0" marL="0">
-              <a:buNone/>
-            </a:pPr>
-            <a:r>
-              <a:rPr lang="en-US" sz="1200" b="1" dirty="0">
-                <a:solidFill>
-                  <a:schemeClr val="bg1"/>
-                </a:solidFill>
-              </a:rPr>
-              <a:t>1</a:t>
-            </a:r>
-            <a:endParaRPr lang="en-US" sz="1200" dirty="0"/>
-          </a:p>
-        </p:txBody>
-      </p:sp>
-      <p:sp>
-        <p:nvSpPr>
-          <p:cNvPr id="5" name="Record step 1 text"/>
-          <p:cNvSpPr txBox="1"/>
-          <p:nvPr/>
-        </p:nvSpPr>
-        <p:spPr>
-          <a:xfrm>
-            <a:off x="960120" y="1051560"/>
-            <a:ext cx="3886200" cy="502920"/>
-          </a:xfrm>
-          <a:prstGeom prst="rect">
-            <a:avLst/>
-          </a:prstGeom>
-          <a:noFill/>
-          <a:ln/>
-        </p:spPr>
-        <p:txBody>
-          <a:bodyPr wrap="square" lIns="0" tIns="0" rIns="0" bIns="0" rtlCol="0" anchor="ctr"/>
-          <a:lstStyle/>
-          <a:p>
-            <a:pPr indent="0" marL="0">
-              <a:buNone/>
-            </a:pPr>
-            <a:r>
-              <a:rPr lang="en-US" sz="1200" b="1" dirty="0">
+      <p:pic>
+        <p:nvPicPr>
+          <p:cNvPr id="42" name="Tip 1 icon" descr="Tip 1">    </p:cNvPr>
+          <p:cNvPicPr>
+            <a:picLocks noChangeAspect="1"/>
+          </p:cNvPicPr>
+          <p:nvPr/>
+        </p:nvPicPr>
+        <p:blipFill>
+          <a:blip r:embed="rId9"/>
+          <a:stretch>
+            <a:fillRect/>
+          </a:stretch>
+        </p:blipFill>
+        <p:spPr>
+          <a:xfrm>
+            <a:off x="540593" y="4015313"/>
+            <a:ext cx="180685" cy="180685"/>
+          </a:xfrm>
+          <a:prstGeom prst="rect">
+            <a:avLst/>
+          </a:prstGeom>
+        </p:spPr>
+      </p:pic>
+      <p:sp>
+        <p:nvSpPr>
+          <p:cNvPr id="43" name="Tip 1 text"/>
+          <p:cNvSpPr txBox="1"/>
+          <p:nvPr/>
+        </p:nvSpPr>
+        <p:spPr>
+          <a:xfrm>
+            <a:off x="896112" y="3895344"/>
+            <a:ext cx="2240280" cy="777240"/>
+          </a:xfrm>
+          <a:prstGeom prst="rect">
+            <a:avLst/>
+          </a:prstGeom>
+          <a:noFill/>
+          <a:ln/>
+        </p:spPr>
+        <p:txBody>
+          <a:bodyPr wrap="square" lIns="0" tIns="0" rIns="0" bIns="0" rtlCol="0" anchor="t"/>
+          <a:lstStyle/>
+          <a:p>
+            <a:pPr indent="0" marL="0">
+              <a:buNone/>
+            </a:pPr>
+            <a:r>
+              <a:rPr lang="en-US" sz="1050" b="1" dirty="0">
                 <a:solidFill>
                   <a:schemeClr val="tx1"/>
                 </a:solidFill>
               </a:rPr>
-              <a:t>Click Record census</a:t>
-            </a:r>
-            <a:pPr indent="0" marL="0">
-              <a:buNone/>
-            </a:pPr>
-            <a:r>
-              <a:rPr lang="en-US" sz="1200" dirty="0">
+              <a:t>Lost code? </a:t>
+            </a:r>
+            <a:pPr indent="0" marL="0">
+              <a:buNone/>
+            </a:pPr>
+            <a:r>
+              <a:rPr lang="en-US" sz="1050" dirty="0">
                 <a:solidFill>
                   <a:schemeClr val="tx2"/>
                 </a:solidFill>
               </a:rPr>
-              <a:t> on the household’s row.</a:t>
-            </a:r>
-            <a:endParaRPr lang="en-US" sz="1200" dirty="0"/>
-          </a:p>
-        </p:txBody>
-      </p:sp>
-      <p:sp>
-        <p:nvSpPr>
-          <p:cNvPr id="6" name="Record step 2 number circle"/>
+              <a:t>Get codes again and resend it. New code gives a fresh one; the old code stops working.</a:t>
+            </a:r>
+            <a:endParaRPr lang="en-US" sz="1050" dirty="0"/>
+          </a:p>
+        </p:txBody>
+      </p:sp>
+      <p:sp>
+        <p:nvSpPr>
+          <p:cNvPr id="44" name="Tip 2 circle"/>
           <p:cNvSpPr/>
           <p:nvPr/>
         </p:nvSpPr>
         <p:spPr>
           <a:xfrm>
-            <a:off x="457200" y="1709928"/>
+            <a:off x="3246120" y="3931920"/>
             <a:ext cx="347472" cy="347472"/>
           </a:xfrm>
           <a:prstGeom prst="ellipse">
@@ -12110,98 +13296,86 @@
           <a:ln/>
         </p:spPr>
       </p:sp>
-      <p:sp>
-        <p:nvSpPr>
-          <p:cNvPr id="7" name="Record step 2 number"/>
-          <p:cNvSpPr txBox="1"/>
-          <p:nvPr/>
-        </p:nvSpPr>
-        <p:spPr>
-          <a:xfrm>
-            <a:off x="457200" y="1709928"/>
-            <a:ext cx="347472" cy="347472"/>
-          </a:xfrm>
-          <a:prstGeom prst="rect">
-            <a:avLst/>
-          </a:prstGeom>
-          <a:noFill/>
-          <a:ln/>
-        </p:spPr>
-        <p:txBody>
-          <a:bodyPr wrap="square" lIns="0" tIns="0" rIns="0" bIns="0" rtlCol="0" anchor="ctr"/>
-          <a:lstStyle/>
-          <a:p>
-            <a:pPr algn="ctr" indent="0" marL="0">
-              <a:buNone/>
-            </a:pPr>
-            <a:r>
-              <a:rPr lang="en-US" sz="1200" b="1" dirty="0">
-                <a:solidFill>
-                  <a:schemeClr val="bg1"/>
-                </a:solidFill>
-              </a:rPr>
-              <a:t>2</a:t>
-            </a:r>
-            <a:endParaRPr lang="en-US" sz="1200" dirty="0"/>
-          </a:p>
-        </p:txBody>
-      </p:sp>
-      <p:sp>
-        <p:nvSpPr>
-          <p:cNvPr id="8" name="Record step 2 text"/>
-          <p:cNvSpPr txBox="1"/>
-          <p:nvPr/>
-        </p:nvSpPr>
-        <p:spPr>
-          <a:xfrm>
-            <a:off x="960120" y="1645920"/>
-            <a:ext cx="3886200" cy="502920"/>
-          </a:xfrm>
-          <a:prstGeom prst="rect">
-            <a:avLst/>
-          </a:prstGeom>
-          <a:noFill/>
-          <a:ln/>
-        </p:spPr>
-        <p:txBody>
-          <a:bodyPr wrap="square" lIns="0" tIns="0" rIns="0" bIns="0" rtlCol="0" anchor="ctr"/>
-          <a:lstStyle/>
-          <a:p>
-            <a:pPr indent="0" marL="0">
-              <a:buNone/>
-            </a:pPr>
-            <a:r>
-              <a:rPr lang="en-US" sz="1200" b="1" dirty="0">
+      <p:pic>
+        <p:nvPicPr>
+          <p:cNvPr id="45" name="Tip 2 icon" descr="Tip 2">    </p:cNvPr>
+          <p:cNvPicPr>
+            <a:picLocks noChangeAspect="1"/>
+          </p:cNvPicPr>
+          <p:nvPr/>
+        </p:nvPicPr>
+        <p:blipFill>
+          <a:blip r:embed="rId10"/>
+          <a:stretch>
+            <a:fillRect/>
+          </a:stretch>
+        </p:blipFill>
+        <p:spPr>
+          <a:xfrm>
+            <a:off x="3329513" y="4015313"/>
+            <a:ext cx="180685" cy="180685"/>
+          </a:xfrm>
+          <a:prstGeom prst="rect">
+            <a:avLst/>
+          </a:prstGeom>
+        </p:spPr>
+      </p:pic>
+      <p:sp>
+        <p:nvSpPr>
+          <p:cNvPr id="46" name="Tip 2 text"/>
+          <p:cNvSpPr txBox="1"/>
+          <p:nvPr/>
+        </p:nvSpPr>
+        <p:spPr>
+          <a:xfrm>
+            <a:off x="3685032" y="3895344"/>
+            <a:ext cx="2240280" cy="777240"/>
+          </a:xfrm>
+          <a:prstGeom prst="rect">
+            <a:avLst/>
+          </a:prstGeom>
+          <a:noFill/>
+          <a:ln/>
+        </p:spPr>
+        <p:txBody>
+          <a:bodyPr wrap="square" lIns="0" tIns="0" rIns="0" bIns="0" rtlCol="0" anchor="t"/>
+          <a:lstStyle/>
+          <a:p>
+            <a:pPr indent="0" marL="0">
+              <a:buNone/>
+            </a:pPr>
+            <a:r>
+              <a:rPr lang="en-US" sz="1050" b="1" dirty="0">
                 <a:solidFill>
                   <a:schemeClr val="tx1"/>
                 </a:solidFill>
               </a:rPr>
-              <a:t>Answers came from: </a:t>
-            </a:r>
-            <a:pPr indent="0" marL="0">
-              <a:buNone/>
-            </a:pPr>
-            <a:r>
-              <a:rPr lang="en-US" sz="1200" dirty="0">
+              <a:t>Locked out? </a:t>
+            </a:r>
+            <a:pPr indent="0" marL="0">
+              <a:buNone/>
+            </a:pPr>
+            <a:r>
+              <a:rPr lang="en-US" sz="1050" dirty="0">
                 <a:solidFill>
                   <a:schemeClr val="tx2"/>
                 </a:solidFill>
               </a:rPr>
-              <a:t>choose Paper census form or Staff / GKK home visit.</a:t>
-            </a:r>
-            <a:endParaRPr lang="en-US" sz="1200" dirty="0"/>
-          </a:p>
-        </p:txBody>
-      </p:sp>
-      <p:sp>
-        <p:nvSpPr>
-          <p:cNvPr id="9" name="Record step 3 number circle"/>
+              <a:t>Five wrong codes lock that household’s sign-in for 15 minutes.</a:t>
+            </a:r>
+            <a:endParaRPr lang="en-US" sz="1050" dirty="0"/>
+          </a:p>
+        </p:txBody>
+      </p:sp>
+      <p:sp>
+        <p:nvSpPr>
+          <p:cNvPr id="47" name="Tip 3 circle"/>
           <p:cNvSpPr/>
           <p:nvPr/>
         </p:nvSpPr>
         <p:spPr>
           <a:xfrm>
-            <a:off x="457200" y="2304288"/>
+            <a:off x="6035040" y="3931920"/>
             <a:ext cx="347472" cy="347472"/>
           </a:xfrm>
           <a:prstGeom prst="ellipse">
@@ -12213,1079 +13387,74 @@
           <a:ln/>
         </p:spPr>
       </p:sp>
-      <p:sp>
-        <p:nvSpPr>
-          <p:cNvPr id="10" name="Record step 3 number"/>
-          <p:cNvSpPr txBox="1"/>
-          <p:nvPr/>
-        </p:nvSpPr>
-        <p:spPr>
-          <a:xfrm>
-            <a:off x="457200" y="2304288"/>
-            <a:ext cx="347472" cy="347472"/>
-          </a:xfrm>
-          <a:prstGeom prst="rect">
-            <a:avLst/>
-          </a:prstGeom>
-          <a:noFill/>
-          <a:ln/>
-        </p:spPr>
-        <p:txBody>
-          <a:bodyPr wrap="square" lIns="0" tIns="0" rIns="0" bIns="0" rtlCol="0" anchor="ctr"/>
-          <a:lstStyle/>
-          <a:p>
-            <a:pPr algn="ctr" indent="0" marL="0">
-              <a:buNone/>
-            </a:pPr>
-            <a:r>
-              <a:rPr lang="en-US" sz="1200" b="1" dirty="0">
-                <a:solidFill>
-                  <a:schemeClr val="bg1"/>
-                </a:solidFill>
-              </a:rPr>
-              <a:t>3</a:t>
-            </a:r>
-            <a:endParaRPr lang="en-US" sz="1200" dirty="0"/>
-          </a:p>
-        </p:txBody>
-      </p:sp>
-      <p:sp>
-        <p:nvSpPr>
-          <p:cNvPr id="11" name="Record step 3 text"/>
-          <p:cNvSpPr txBox="1"/>
-          <p:nvPr/>
-        </p:nvSpPr>
-        <p:spPr>
-          <a:xfrm>
-            <a:off x="960120" y="2240280"/>
-            <a:ext cx="3886200" cy="502920"/>
-          </a:xfrm>
-          <a:prstGeom prst="rect">
-            <a:avLst/>
-          </a:prstGeom>
-          <a:noFill/>
-          <a:ln/>
-        </p:spPr>
-        <p:txBody>
-          <a:bodyPr wrap="square" lIns="0" tIns="0" rIns="0" bIns="0" rtlCol="0" anchor="ctr"/>
-          <a:lstStyle/>
-          <a:p>
-            <a:pPr indent="0" marL="0">
-              <a:buNone/>
-            </a:pPr>
-            <a:r>
-              <a:rPr lang="en-US" sz="1200" b="1" dirty="0">
+      <p:pic>
+        <p:nvPicPr>
+          <p:cNvPr id="48" name="Tip 3 icon" descr="Tip 3">    </p:cNvPr>
+          <p:cNvPicPr>
+            <a:picLocks noChangeAspect="1"/>
+          </p:cNvPicPr>
+          <p:nvPr/>
+        </p:nvPicPr>
+        <p:blipFill>
+          <a:blip r:embed="rId11"/>
+          <a:stretch>
+            <a:fillRect/>
+          </a:stretch>
+        </p:blipFill>
+        <p:spPr>
+          <a:xfrm>
+            <a:off x="6118433" y="4015313"/>
+            <a:ext cx="180685" cy="180685"/>
+          </a:xfrm>
+          <a:prstGeom prst="rect">
+            <a:avLst/>
+          </a:prstGeom>
+        </p:spPr>
+      </p:pic>
+      <p:sp>
+        <p:nvSpPr>
+          <p:cNvPr id="49" name="Tip 3 text"/>
+          <p:cNvSpPr txBox="1"/>
+          <p:nvPr/>
+        </p:nvSpPr>
+        <p:spPr>
+          <a:xfrm>
+            <a:off x="6473952" y="3895344"/>
+            <a:ext cx="2240280" cy="777240"/>
+          </a:xfrm>
+          <a:prstGeom prst="rect">
+            <a:avLst/>
+          </a:prstGeom>
+          <a:noFill/>
+          <a:ln/>
+        </p:spPr>
+        <p:txBody>
+          <a:bodyPr wrap="square" lIns="0" tIns="0" rIns="0" bIns="0" rtlCol="0" anchor="t"/>
+          <a:lstStyle/>
+          <a:p>
+            <a:pPr indent="0" marL="0">
+              <a:buNone/>
+            </a:pPr>
+            <a:r>
+              <a:rPr lang="en-US" sz="1050" b="1" dirty="0">
                 <a:solidFill>
                   <a:schemeClr val="tx1"/>
                 </a:solidFill>
               </a:rPr>
-              <a:t>Mark A, P or W</a:t>
-            </a:r>
-            <a:pPr indent="0" marL="0">
-              <a:buNone/>
-            </a:pPr>
-            <a:r>
-              <a:rPr lang="en-US" sz="1200" dirty="0">
+              <a:t>Sent twice? </a:t>
+            </a:r>
+            <a:pPr indent="0" marL="0">
+              <a:buNone/>
+            </a:pPr>
+            <a:r>
+              <a:rPr lang="en-US" sz="1050" dirty="0">
                 <a:solidFill>
                   <a:schemeClr val="tx2"/>
                 </a:solidFill>
               </a:rPr>
-              <a:t> for each member on the six items.</a:t>
-            </a:r>
-            <a:endParaRPr lang="en-US" sz="1200" dirty="0"/>
-          </a:p>
-        </p:txBody>
-      </p:sp>
-      <p:sp>
-        <p:nvSpPr>
-          <p:cNvPr id="12" name="Record step 4 number circle"/>
-          <p:cNvSpPr/>
-          <p:nvPr/>
-        </p:nvSpPr>
-        <p:spPr>
-          <a:xfrm>
-            <a:off x="457200" y="2898648"/>
-            <a:ext cx="347472" cy="347472"/>
-          </a:xfrm>
-          <a:prstGeom prst="ellipse">
-            <a:avLst/>
-          </a:prstGeom>
-          <a:solidFill>
-            <a:schemeClr val="tx1"/>
-          </a:solidFill>
-          <a:ln/>
-        </p:spPr>
-      </p:sp>
-      <p:sp>
-        <p:nvSpPr>
-          <p:cNvPr id="13" name="Record step 4 number"/>
-          <p:cNvSpPr txBox="1"/>
-          <p:nvPr/>
-        </p:nvSpPr>
-        <p:spPr>
-          <a:xfrm>
-            <a:off x="457200" y="2898648"/>
-            <a:ext cx="347472" cy="347472"/>
-          </a:xfrm>
-          <a:prstGeom prst="rect">
-            <a:avLst/>
-          </a:prstGeom>
-          <a:noFill/>
-          <a:ln/>
-        </p:spPr>
-        <p:txBody>
-          <a:bodyPr wrap="square" lIns="0" tIns="0" rIns="0" bIns="0" rtlCol="0" anchor="ctr"/>
-          <a:lstStyle/>
-          <a:p>
-            <a:pPr algn="ctr" indent="0" marL="0">
-              <a:buNone/>
-            </a:pPr>
-            <a:r>
-              <a:rPr lang="en-US" sz="1200" b="1" dirty="0">
-                <a:solidFill>
-                  <a:schemeClr val="bg1"/>
-                </a:solidFill>
-              </a:rPr>
-              <a:t>4</a:t>
-            </a:r>
-            <a:endParaRPr lang="en-US" sz="1200" dirty="0"/>
-          </a:p>
-        </p:txBody>
-      </p:sp>
-      <p:sp>
-        <p:nvSpPr>
-          <p:cNvPr id="14" name="Record step 4 text"/>
-          <p:cNvSpPr txBox="1"/>
-          <p:nvPr/>
-        </p:nvSpPr>
-        <p:spPr>
-          <a:xfrm>
-            <a:off x="960120" y="2834640"/>
-            <a:ext cx="3886200" cy="502920"/>
-          </a:xfrm>
-          <a:prstGeom prst="rect">
-            <a:avLst/>
-          </a:prstGeom>
-          <a:noFill/>
-          <a:ln/>
-        </p:spPr>
-        <p:txBody>
-          <a:bodyPr wrap="square" lIns="0" tIns="0" rIns="0" bIns="0" rtlCol="0" anchor="ctr"/>
-          <a:lstStyle/>
-          <a:p>
-            <a:pPr indent="0" marL="0">
-              <a:buNone/>
-            </a:pPr>
-            <a:r>
-              <a:rPr lang="en-US" sz="1200" b="1" dirty="0">
-                <a:solidFill>
-                  <a:schemeClr val="tx1"/>
-                </a:solidFill>
-              </a:rPr>
-              <a:t>Check the Membership status</a:t>
-            </a:r>
-            <a:pPr indent="0" marL="0">
-              <a:buNone/>
-            </a:pPr>
-            <a:r>
-              <a:rPr lang="en-US" sz="1200" dirty="0">
-                <a:solidFill>
-                  <a:schemeClr val="tx2"/>
-                </a:solidFill>
-              </a:rPr>
-              <a:t> and add Notes, e.g. “working abroad”.</a:t>
-            </a:r>
-            <a:endParaRPr lang="en-US" sz="1200" dirty="0"/>
-          </a:p>
-        </p:txBody>
-      </p:sp>
-      <p:sp>
-        <p:nvSpPr>
-          <p:cNvPr id="15" name="Record step 5 number circle"/>
-          <p:cNvSpPr/>
-          <p:nvPr/>
-        </p:nvSpPr>
-        <p:spPr>
-          <a:xfrm>
-            <a:off x="457200" y="3493008"/>
-            <a:ext cx="347472" cy="347472"/>
-          </a:xfrm>
-          <a:prstGeom prst="ellipse">
-            <a:avLst/>
-          </a:prstGeom>
-          <a:solidFill>
-            <a:schemeClr val="tx1"/>
-          </a:solidFill>
-          <a:ln/>
-        </p:spPr>
-      </p:sp>
-      <p:sp>
-        <p:nvSpPr>
-          <p:cNvPr id="16" name="Record step 5 number"/>
-          <p:cNvSpPr txBox="1"/>
-          <p:nvPr/>
-        </p:nvSpPr>
-        <p:spPr>
-          <a:xfrm>
-            <a:off x="457200" y="3493008"/>
-            <a:ext cx="347472" cy="347472"/>
-          </a:xfrm>
-          <a:prstGeom prst="rect">
-            <a:avLst/>
-          </a:prstGeom>
-          <a:noFill/>
-          <a:ln/>
-        </p:spPr>
-        <p:txBody>
-          <a:bodyPr wrap="square" lIns="0" tIns="0" rIns="0" bIns="0" rtlCol="0" anchor="ctr"/>
-          <a:lstStyle/>
-          <a:p>
-            <a:pPr algn="ctr" indent="0" marL="0">
-              <a:buNone/>
-            </a:pPr>
-            <a:r>
-              <a:rPr lang="en-US" sz="1200" b="1" dirty="0">
-                <a:solidFill>
-                  <a:schemeClr val="bg1"/>
-                </a:solidFill>
-              </a:rPr>
-              <a:t>5</a:t>
-            </a:r>
-            <a:endParaRPr lang="en-US" sz="1200" dirty="0"/>
-          </a:p>
-        </p:txBody>
-      </p:sp>
-      <p:sp>
-        <p:nvSpPr>
-          <p:cNvPr id="17" name="Record step 5 text"/>
-          <p:cNvSpPr txBox="1"/>
-          <p:nvPr/>
-        </p:nvSpPr>
-        <p:spPr>
-          <a:xfrm>
-            <a:off x="960120" y="3429000"/>
-            <a:ext cx="3886200" cy="502920"/>
-          </a:xfrm>
-          <a:prstGeom prst="rect">
-            <a:avLst/>
-          </a:prstGeom>
-          <a:noFill/>
-          <a:ln/>
-        </p:spPr>
-        <p:txBody>
-          <a:bodyPr wrap="square" lIns="0" tIns="0" rIns="0" bIns="0" rtlCol="0" anchor="ctr"/>
-          <a:lstStyle/>
-          <a:p>
-            <a:pPr indent="0" marL="0">
-              <a:buNone/>
-            </a:pPr>
-            <a:r>
-              <a:rPr lang="en-US" sz="1200" b="1" dirty="0">
-                <a:solidFill>
-                  <a:schemeClr val="tx1"/>
-                </a:solidFill>
-              </a:rPr>
-              <a:t>Edit details</a:t>
-            </a:r>
-            <a:pPr indent="0" marL="0">
-              <a:buNone/>
-            </a:pPr>
-            <a:r>
-              <a:rPr lang="en-US" sz="1200" dirty="0">
-                <a:solidFill>
-                  <a:schemeClr val="tx2"/>
-                </a:solidFill>
-              </a:rPr>
-              <a:t> to fix a name or birthday. </a:t>
-            </a:r>
-            <a:pPr indent="0" marL="0">
-              <a:buNone/>
-            </a:pPr>
-            <a:r>
-              <a:rPr lang="en-US" sz="1200" b="1" dirty="0">
-                <a:solidFill>
-                  <a:schemeClr val="tx1"/>
-                </a:solidFill>
-              </a:rPr>
-              <a:t>+ Add a new member</a:t>
-            </a:r>
-            <a:pPr indent="0" marL="0">
-              <a:buNone/>
-            </a:pPr>
-            <a:r>
-              <a:rPr lang="en-US" sz="1200" dirty="0">
-                <a:solidFill>
-                  <a:schemeClr val="tx2"/>
-                </a:solidFill>
-              </a:rPr>
-              <a:t> for a newborn or new spouse.</a:t>
-            </a:r>
-            <a:endParaRPr lang="en-US" sz="1200" dirty="0"/>
-          </a:p>
-        </p:txBody>
-      </p:sp>
-      <p:sp>
-        <p:nvSpPr>
-          <p:cNvPr id="18" name="Record step 6 number circle"/>
-          <p:cNvSpPr/>
-          <p:nvPr/>
-        </p:nvSpPr>
-        <p:spPr>
-          <a:xfrm>
-            <a:off x="457200" y="4087368"/>
-            <a:ext cx="347472" cy="347472"/>
-          </a:xfrm>
-          <a:prstGeom prst="ellipse">
-            <a:avLst/>
-          </a:prstGeom>
-          <a:solidFill>
-            <a:schemeClr val="tx1"/>
-          </a:solidFill>
-          <a:ln/>
-        </p:spPr>
-      </p:sp>
-      <p:sp>
-        <p:nvSpPr>
-          <p:cNvPr id="19" name="Record step 6 number"/>
-          <p:cNvSpPr txBox="1"/>
-          <p:nvPr/>
-        </p:nvSpPr>
-        <p:spPr>
-          <a:xfrm>
-            <a:off x="457200" y="4087368"/>
-            <a:ext cx="347472" cy="347472"/>
-          </a:xfrm>
-          <a:prstGeom prst="rect">
-            <a:avLst/>
-          </a:prstGeom>
-          <a:noFill/>
-          <a:ln/>
-        </p:spPr>
-        <p:txBody>
-          <a:bodyPr wrap="square" lIns="0" tIns="0" rIns="0" bIns="0" rtlCol="0" anchor="ctr"/>
-          <a:lstStyle/>
-          <a:p>
-            <a:pPr algn="ctr" indent="0" marL="0">
-              <a:buNone/>
-            </a:pPr>
-            <a:r>
-              <a:rPr lang="en-US" sz="1200" b="1" dirty="0">
-                <a:solidFill>
-                  <a:schemeClr val="bg1"/>
-                </a:solidFill>
-              </a:rPr>
-              <a:t>6</a:t>
-            </a:r>
-            <a:endParaRPr lang="en-US" sz="1200" dirty="0"/>
-          </a:p>
-        </p:txBody>
-      </p:sp>
-      <p:sp>
-        <p:nvSpPr>
-          <p:cNvPr id="20" name="Record step 6 text"/>
-          <p:cNvSpPr txBox="1"/>
-          <p:nvPr/>
-        </p:nvSpPr>
-        <p:spPr>
-          <a:xfrm>
-            <a:off x="960120" y="4023360"/>
-            <a:ext cx="3886200" cy="502920"/>
-          </a:xfrm>
-          <a:prstGeom prst="rect">
-            <a:avLst/>
-          </a:prstGeom>
-          <a:noFill/>
-          <a:ln/>
-        </p:spPr>
-        <p:txBody>
-          <a:bodyPr wrap="square" lIns="0" tIns="0" rIns="0" bIns="0" rtlCol="0" anchor="ctr"/>
-          <a:lstStyle/>
-          <a:p>
-            <a:pPr indent="0" marL="0">
-              <a:buNone/>
-            </a:pPr>
-            <a:r>
-              <a:rPr lang="en-US" sz="1200" b="1" dirty="0">
-                <a:solidFill>
-                  <a:schemeClr val="tx1"/>
-                </a:solidFill>
-              </a:rPr>
-              <a:t>Click Save census.</a:t>
-            </a:r>
-            <a:pPr indent="0" marL="0">
-              <a:buNone/>
-            </a:pPr>
-            <a:r>
-              <a:rPr lang="en-US" sz="1200" dirty="0">
-                <a:solidFill>
-                  <a:schemeClr val="tx2"/>
-                </a:solidFill>
-              </a:rPr>
-              <a:t> Closing the panel without saving discards the answers.</a:t>
-            </a:r>
-            <a:endParaRPr lang="en-US" sz="1200" dirty="0"/>
-          </a:p>
-        </p:txBody>
-      </p:sp>
-      <p:sp>
-        <p:nvSpPr>
-          <p:cNvPr id="21" name="APW panel"/>
-          <p:cNvSpPr/>
-          <p:nvPr/>
-        </p:nvSpPr>
-        <p:spPr>
-          <a:xfrm>
-            <a:off x="5120640" y="1051560"/>
-            <a:ext cx="3566160" cy="3611880"/>
-          </a:xfrm>
-          <a:prstGeom prst="roundRect">
-            <a:avLst>
-              <a:gd name="adj" fmla="val 2051"/>
-            </a:avLst>
-          </a:prstGeom>
-          <a:solidFill>
-            <a:schemeClr val="bg2"/>
-          </a:solidFill>
-          <a:ln/>
-        </p:spPr>
-      </p:sp>
-      <p:sp>
-        <p:nvSpPr>
-          <p:cNvPr id="22" name="APW heading"/>
-          <p:cNvSpPr txBox="1"/>
-          <p:nvPr/>
-        </p:nvSpPr>
-        <p:spPr>
-          <a:xfrm>
-            <a:off x="5303520" y="1188720"/>
-            <a:ext cx="3200400" cy="274320"/>
-          </a:xfrm>
-          <a:prstGeom prst="rect">
-            <a:avLst/>
-          </a:prstGeom>
-          <a:noFill/>
-          <a:ln/>
-        </p:spPr>
-        <p:txBody>
-          <a:bodyPr wrap="square" lIns="0" tIns="0" rIns="0" bIns="0" rtlCol="0" anchor="t"/>
-          <a:lstStyle/>
-          <a:p>
-            <a:pPr indent="0" marL="0">
-              <a:buNone/>
-            </a:pPr>
-            <a:r>
-              <a:rPr lang="en-US" sz="1400" b="1" dirty="0">
-                <a:solidFill>
-                  <a:schemeClr val="tx1"/>
-                </a:solidFill>
-              </a:rPr>
-              <a:t>The A / P / W grid</a:t>
-            </a:r>
-            <a:endParaRPr lang="en-US" sz="1400" dirty="0"/>
-          </a:p>
-        </p:txBody>
-      </p:sp>
-      <p:sp>
-        <p:nvSpPr>
-          <p:cNvPr id="23" name="APW A number circle"/>
-          <p:cNvSpPr/>
-          <p:nvPr/>
-        </p:nvSpPr>
-        <p:spPr>
-          <a:xfrm>
-            <a:off x="5303520" y="1572768"/>
-            <a:ext cx="347472" cy="347472"/>
-          </a:xfrm>
-          <a:prstGeom prst="ellipse">
-            <a:avLst/>
-          </a:prstGeom>
-          <a:solidFill>
-            <a:schemeClr val="accent3"/>
-          </a:solidFill>
-          <a:ln/>
-        </p:spPr>
-      </p:sp>
-      <p:sp>
-        <p:nvSpPr>
-          <p:cNvPr id="24" name="APW A number"/>
-          <p:cNvSpPr txBox="1"/>
-          <p:nvPr/>
-        </p:nvSpPr>
-        <p:spPr>
-          <a:xfrm>
-            <a:off x="5303520" y="1572768"/>
-            <a:ext cx="347472" cy="347472"/>
-          </a:xfrm>
-          <a:prstGeom prst="rect">
-            <a:avLst/>
-          </a:prstGeom>
-          <a:noFill/>
-          <a:ln/>
-        </p:spPr>
-        <p:txBody>
-          <a:bodyPr wrap="square" lIns="0" tIns="0" rIns="0" bIns="0" rtlCol="0" anchor="ctr"/>
-          <a:lstStyle/>
-          <a:p>
-            <a:pPr algn="ctr" indent="0" marL="0">
-              <a:buNone/>
-            </a:pPr>
-            <a:r>
-              <a:rPr lang="en-US" sz="1200" b="1" dirty="0">
-                <a:solidFill>
-                  <a:schemeClr val="bg1"/>
-                </a:solidFill>
-              </a:rPr>
-              <a:t>A</a:t>
-            </a:r>
-            <a:endParaRPr lang="en-US" sz="1200" dirty="0"/>
-          </a:p>
-        </p:txBody>
-      </p:sp>
-      <p:sp>
-        <p:nvSpPr>
-          <p:cNvPr id="25" name="APW A label"/>
-          <p:cNvSpPr txBox="1"/>
-          <p:nvPr/>
-        </p:nvSpPr>
-        <p:spPr>
-          <a:xfrm>
-            <a:off x="5715000" y="1572768"/>
-            <a:ext cx="640080" cy="347472"/>
-          </a:xfrm>
-          <a:prstGeom prst="rect">
-            <a:avLst/>
-          </a:prstGeom>
-          <a:noFill/>
-          <a:ln/>
-        </p:spPr>
-        <p:txBody>
-          <a:bodyPr wrap="square" lIns="0" tIns="0" rIns="0" bIns="0" rtlCol="0" anchor="ctr"/>
-          <a:lstStyle/>
-          <a:p>
-            <a:pPr indent="0" marL="0">
-              <a:buNone/>
-            </a:pPr>
-            <a:r>
-              <a:rPr lang="en-US" sz="1150" b="1" dirty="0">
-                <a:solidFill>
-                  <a:schemeClr val="tx1"/>
-                </a:solidFill>
-              </a:rPr>
-              <a:t>Aktibo</a:t>
-            </a:r>
-            <a:endParaRPr lang="en-US" sz="1150" dirty="0"/>
-          </a:p>
-        </p:txBody>
-      </p:sp>
-      <p:sp>
-        <p:nvSpPr>
-          <p:cNvPr id="26" name="APW P number circle"/>
-          <p:cNvSpPr/>
-          <p:nvPr/>
-        </p:nvSpPr>
-        <p:spPr>
-          <a:xfrm>
-            <a:off x="6373368" y="1572768"/>
-            <a:ext cx="347472" cy="347472"/>
-          </a:xfrm>
-          <a:prstGeom prst="ellipse">
-            <a:avLst/>
-          </a:prstGeom>
-          <a:solidFill>
-            <a:schemeClr val="accent2"/>
-          </a:solidFill>
-          <a:ln/>
-        </p:spPr>
-      </p:sp>
-      <p:sp>
-        <p:nvSpPr>
-          <p:cNvPr id="27" name="APW P number"/>
-          <p:cNvSpPr txBox="1"/>
-          <p:nvPr/>
-        </p:nvSpPr>
-        <p:spPr>
-          <a:xfrm>
-            <a:off x="6373368" y="1572768"/>
-            <a:ext cx="347472" cy="347472"/>
-          </a:xfrm>
-          <a:prstGeom prst="rect">
-            <a:avLst/>
-          </a:prstGeom>
-          <a:noFill/>
-          <a:ln/>
-        </p:spPr>
-        <p:txBody>
-          <a:bodyPr wrap="square" lIns="0" tIns="0" rIns="0" bIns="0" rtlCol="0" anchor="ctr"/>
-          <a:lstStyle/>
-          <a:p>
-            <a:pPr algn="ctr" indent="0" marL="0">
-              <a:buNone/>
-            </a:pPr>
-            <a:r>
-              <a:rPr lang="en-US" sz="1200" b="1" dirty="0">
-                <a:solidFill>
-                  <a:schemeClr val="bg1"/>
-                </a:solidFill>
-              </a:rPr>
-              <a:t>P</a:t>
-            </a:r>
-            <a:endParaRPr lang="en-US" sz="1200" dirty="0"/>
-          </a:p>
-        </p:txBody>
-      </p:sp>
-      <p:sp>
-        <p:nvSpPr>
-          <p:cNvPr id="28" name="APW P label"/>
-          <p:cNvSpPr txBox="1"/>
-          <p:nvPr/>
-        </p:nvSpPr>
-        <p:spPr>
-          <a:xfrm>
-            <a:off x="6784848" y="1572768"/>
-            <a:ext cx="640080" cy="347472"/>
-          </a:xfrm>
-          <a:prstGeom prst="rect">
-            <a:avLst/>
-          </a:prstGeom>
-          <a:noFill/>
-          <a:ln/>
-        </p:spPr>
-        <p:txBody>
-          <a:bodyPr wrap="square" lIns="0" tIns="0" rIns="0" bIns="0" rtlCol="0" anchor="ctr"/>
-          <a:lstStyle/>
-          <a:p>
-            <a:pPr indent="0" marL="0">
-              <a:buNone/>
-            </a:pPr>
-            <a:r>
-              <a:rPr lang="en-US" sz="1150" b="1" dirty="0">
-                <a:solidFill>
-                  <a:schemeClr val="tx1"/>
-                </a:solidFill>
-              </a:rPr>
-              <a:t>Panagsa</a:t>
-            </a:r>
-            <a:endParaRPr lang="en-US" sz="1150" dirty="0"/>
-          </a:p>
-        </p:txBody>
-      </p:sp>
-      <p:sp>
-        <p:nvSpPr>
-          <p:cNvPr id="29" name="APW W number circle"/>
-          <p:cNvSpPr/>
-          <p:nvPr/>
-        </p:nvSpPr>
-        <p:spPr>
-          <a:xfrm>
-            <a:off x="7443216" y="1572768"/>
-            <a:ext cx="347472" cy="347472"/>
-          </a:xfrm>
-          <a:prstGeom prst="ellipse">
-            <a:avLst/>
-          </a:prstGeom>
-          <a:solidFill>
-            <a:schemeClr val="accent5"/>
-          </a:solidFill>
-          <a:ln/>
-        </p:spPr>
-      </p:sp>
-      <p:sp>
-        <p:nvSpPr>
-          <p:cNvPr id="30" name="APW W number"/>
-          <p:cNvSpPr txBox="1"/>
-          <p:nvPr/>
-        </p:nvSpPr>
-        <p:spPr>
-          <a:xfrm>
-            <a:off x="7443216" y="1572768"/>
-            <a:ext cx="347472" cy="347472"/>
-          </a:xfrm>
-          <a:prstGeom prst="rect">
-            <a:avLst/>
-          </a:prstGeom>
-          <a:noFill/>
-          <a:ln/>
-        </p:spPr>
-        <p:txBody>
-          <a:bodyPr wrap="square" lIns="0" tIns="0" rIns="0" bIns="0" rtlCol="0" anchor="ctr"/>
-          <a:lstStyle/>
-          <a:p>
-            <a:pPr algn="ctr" indent="0" marL="0">
-              <a:buNone/>
-            </a:pPr>
-            <a:r>
-              <a:rPr lang="en-US" sz="1200" b="1" dirty="0">
-                <a:solidFill>
-                  <a:schemeClr val="bg1"/>
-                </a:solidFill>
-              </a:rPr>
-              <a:t>W</a:t>
-            </a:r>
-            <a:endParaRPr lang="en-US" sz="1200" dirty="0"/>
-          </a:p>
-        </p:txBody>
-      </p:sp>
-      <p:sp>
-        <p:nvSpPr>
-          <p:cNvPr id="31" name="APW W label"/>
-          <p:cNvSpPr txBox="1"/>
-          <p:nvPr/>
-        </p:nvSpPr>
-        <p:spPr>
-          <a:xfrm>
-            <a:off x="7854696" y="1572768"/>
-            <a:ext cx="640080" cy="347472"/>
-          </a:xfrm>
-          <a:prstGeom prst="rect">
-            <a:avLst/>
-          </a:prstGeom>
-          <a:noFill/>
-          <a:ln/>
-        </p:spPr>
-        <p:txBody>
-          <a:bodyPr wrap="square" lIns="0" tIns="0" rIns="0" bIns="0" rtlCol="0" anchor="ctr"/>
-          <a:lstStyle/>
-          <a:p>
-            <a:pPr indent="0" marL="0">
-              <a:buNone/>
-            </a:pPr>
-            <a:r>
-              <a:rPr lang="en-US" sz="1150" b="1" dirty="0">
-                <a:solidFill>
-                  <a:schemeClr val="tx1"/>
-                </a:solidFill>
-              </a:rPr>
-              <a:t>Wala</a:t>
-            </a:r>
-            <a:endParaRPr lang="en-US" sz="1150" dirty="0"/>
-          </a:p>
-        </p:txBody>
-      </p:sp>
-      <p:sp>
-        <p:nvSpPr>
-          <p:cNvPr id="32" name="Items heading"/>
-          <p:cNvSpPr txBox="1"/>
-          <p:nvPr/>
-        </p:nvSpPr>
-        <p:spPr>
-          <a:xfrm>
-            <a:off x="5303520" y="2057400"/>
-            <a:ext cx="3200400" cy="228600"/>
-          </a:xfrm>
-          <a:prstGeom prst="rect">
-            <a:avLst/>
-          </a:prstGeom>
-          <a:noFill/>
-          <a:ln/>
-        </p:spPr>
-        <p:txBody>
-          <a:bodyPr wrap="square" lIns="0" tIns="0" rIns="0" bIns="0" rtlCol="0" anchor="t"/>
-          <a:lstStyle/>
-          <a:p>
-            <a:pPr indent="0" marL="0">
-              <a:buNone/>
-            </a:pPr>
-            <a:r>
-              <a:rPr lang="en-US" sz="1100" b="1" dirty="0">
-                <a:solidFill>
-                  <a:schemeClr val="tx2"/>
-                </a:solidFill>
-              </a:rPr>
-              <a:t>Six items for each member</a:t>
-            </a:r>
-            <a:endParaRPr lang="en-US" sz="1100" dirty="0"/>
-          </a:p>
-        </p:txBody>
-      </p:sp>
-      <p:sp>
-        <p:nvSpPr>
-          <p:cNvPr id="33" name="Items column 1"/>
-          <p:cNvSpPr txBox="1"/>
-          <p:nvPr/>
-        </p:nvSpPr>
-        <p:spPr>
-          <a:xfrm>
-            <a:off x="5303520" y="2304288"/>
-            <a:ext cx="1783080" cy="685800"/>
-          </a:xfrm>
-          <a:prstGeom prst="rect">
-            <a:avLst/>
-          </a:prstGeom>
-          <a:noFill/>
-          <a:ln/>
-        </p:spPr>
-        <p:txBody>
-          <a:bodyPr wrap="square" lIns="0" tIns="0" rIns="0" bIns="0" rtlCol="0" anchor="t"/>
-          <a:lstStyle/>
-          <a:p>
-            <a:pPr marL="127000" indent="-127000">
-              <a:spcAft>
-                <a:spcPts val="200"/>
-              </a:spcAft>
-              <a:buSzPct val="100000"/>
-              <a:buChar char="•"/>
-            </a:pPr>
-            <a:r>
-              <a:rPr lang="en-US" sz="1050" dirty="0">
-                <a:solidFill>
-                  <a:schemeClr val="tx1"/>
-                </a:solidFill>
-              </a:rPr>
-              <a:t>Mass (Misa)</a:t>
+              <a:t>A family can resend with “Usba pag-usab”. You only see the latest.</a:t>
             </a:r>
             <a:endParaRPr lang="en-US" sz="1050" dirty="0"/>
-          </a:p>
-          <a:p>
-            <a:pPr marL="127000" indent="-127000">
-              <a:spcAft>
-                <a:spcPts val="200"/>
-              </a:spcAft>
-              <a:buSzPct val="100000"/>
-              <a:buChar char="•"/>
-            </a:pPr>
-            <a:r>
-              <a:rPr lang="en-US" sz="1050" dirty="0">
-                <a:solidFill>
-                  <a:schemeClr val="tx1"/>
-                </a:solidFill>
-              </a:rPr>
-              <a:t>Bible Service (Kasaulogan)</a:t>
-            </a:r>
-            <a:endParaRPr lang="en-US" sz="1050" dirty="0"/>
-          </a:p>
-          <a:p>
-            <a:pPr marL="127000" indent="-127000">
-              <a:spcAft>
-                <a:spcPts val="200"/>
-              </a:spcAft>
-              <a:buSzPct val="100000"/>
-              <a:buChar char="•"/>
-            </a:pPr>
-            <a:r>
-              <a:rPr lang="en-US" sz="1050" dirty="0">
-                <a:solidFill>
-                  <a:schemeClr val="tx1"/>
-                </a:solidFill>
-              </a:rPr>
-              <a:t>Devotions / Rosary</a:t>
-            </a:r>
-            <a:endParaRPr lang="en-US" sz="1050" dirty="0"/>
-          </a:p>
-        </p:txBody>
-      </p:sp>
-      <p:sp>
-        <p:nvSpPr>
-          <p:cNvPr id="34" name="Items column 2"/>
-          <p:cNvSpPr txBox="1"/>
-          <p:nvPr/>
-        </p:nvSpPr>
-        <p:spPr>
-          <a:xfrm>
-            <a:off x="7086600" y="2304288"/>
-            <a:ext cx="1508760" cy="685800"/>
-          </a:xfrm>
-          <a:prstGeom prst="rect">
-            <a:avLst/>
-          </a:prstGeom>
-          <a:noFill/>
-          <a:ln/>
-        </p:spPr>
-        <p:txBody>
-          <a:bodyPr wrap="square" lIns="0" tIns="0" rIns="0" bIns="0" rtlCol="0" anchor="t"/>
-          <a:lstStyle/>
-          <a:p>
-            <a:pPr marL="127000" indent="-127000">
-              <a:spcAft>
-                <a:spcPts val="200"/>
-              </a:spcAft>
-              <a:buSzPct val="100000"/>
-              <a:buChar char="•"/>
-            </a:pPr>
-            <a:r>
-              <a:rPr lang="en-US" sz="1050" dirty="0">
-                <a:solidFill>
-                  <a:schemeClr val="tx1"/>
-                </a:solidFill>
-              </a:rPr>
-              <a:t>Meetings / Seminars</a:t>
-            </a:r>
-            <a:endParaRPr lang="en-US" sz="1050" dirty="0"/>
-          </a:p>
-          <a:p>
-            <a:pPr marL="127000" indent="-127000">
-              <a:spcAft>
-                <a:spcPts val="200"/>
-              </a:spcAft>
-              <a:buSzPct val="100000"/>
-              <a:buChar char="•"/>
-            </a:pPr>
-            <a:r>
-              <a:rPr lang="en-US" sz="1050" dirty="0">
-                <a:solidFill>
-                  <a:schemeClr val="tx1"/>
-                </a:solidFill>
-              </a:rPr>
-              <a:t>Pintakasi</a:t>
-            </a:r>
-            <a:endParaRPr lang="en-US" sz="1050" dirty="0"/>
-          </a:p>
-          <a:p>
-            <a:pPr marL="127000" indent="-127000">
-              <a:spcAft>
-                <a:spcPts val="200"/>
-              </a:spcAft>
-              <a:buSzPct val="100000"/>
-              <a:buChar char="•"/>
-            </a:pPr>
-            <a:r>
-              <a:rPr lang="en-US" sz="1050" dirty="0">
-                <a:solidFill>
-                  <a:schemeClr val="tx1"/>
-                </a:solidFill>
-              </a:rPr>
-              <a:t>Suporta Pinansyal</a:t>
-            </a:r>
-            <a:endParaRPr lang="en-US" sz="1050" dirty="0"/>
-          </a:p>
-        </p:txBody>
-      </p:sp>
-      <p:sp>
-        <p:nvSpPr>
-          <p:cNvPr id="35" name="Suggestion box"/>
-          <p:cNvSpPr/>
-          <p:nvPr/>
-        </p:nvSpPr>
-        <p:spPr>
-          <a:xfrm>
-            <a:off x="5303520" y="3200400"/>
-            <a:ext cx="3200400" cy="1280160"/>
-          </a:xfrm>
-          <a:prstGeom prst="roundRect">
-            <a:avLst>
-              <a:gd name="adj" fmla="val 5714"/>
-            </a:avLst>
-          </a:prstGeom>
-          <a:solidFill>
-            <a:schemeClr val="bg1"/>
-          </a:solidFill>
-          <a:ln/>
-        </p:spPr>
-      </p:sp>
-      <p:sp>
-        <p:nvSpPr>
-          <p:cNvPr id="36" name="Suggestion text"/>
-          <p:cNvSpPr txBox="1"/>
-          <p:nvPr/>
-        </p:nvSpPr>
-        <p:spPr>
-          <a:xfrm>
-            <a:off x="5468112" y="3337560"/>
-            <a:ext cx="2926080" cy="1051560"/>
-          </a:xfrm>
-          <a:prstGeom prst="rect">
-            <a:avLst/>
-          </a:prstGeom>
-          <a:noFill/>
-          <a:ln/>
-        </p:spPr>
-        <p:txBody>
-          <a:bodyPr wrap="square" lIns="0" tIns="0" rIns="0" bIns="0" rtlCol="0" anchor="t"/>
-          <a:lstStyle/>
-          <a:p>
-            <a:pPr indent="0" marL="0">
-              <a:spcAft>
-                <a:spcPts val="400"/>
-              </a:spcAft>
-              <a:buNone/>
-            </a:pPr>
-            <a:r>
-              <a:rPr lang="en-US" sz="1100" b="1" dirty="0">
-                <a:solidFill>
-                  <a:schemeClr val="tx1"/>
-                </a:solidFill>
-              </a:rPr>
-              <a:t>The app suggests a status</a:t>
-            </a:r>
-            <a:endParaRPr lang="en-US" sz="1100" dirty="0"/>
-          </a:p>
-          <a:p>
-            <a:pPr indent="0" marL="0">
-              <a:spcAft>
-                <a:spcPts val="400"/>
-              </a:spcAft>
-              <a:buNone/>
-            </a:pPr>
-            <a:r>
-              <a:rPr lang="en-US" sz="1100" dirty="0">
-                <a:solidFill>
-                  <a:schemeClr val="tx2"/>
-                </a:solidFill>
-              </a:rPr>
-              <a:t>Mass A, or any two items A or P → </a:t>
-            </a:r>
-            <a:pPr indent="0" marL="0">
-              <a:spcAft>
-                <a:spcPts val="400"/>
-              </a:spcAft>
-              <a:buNone/>
-            </a:pPr>
-            <a:r>
-              <a:rPr lang="en-US" sz="1100" b="1" dirty="0">
-                <a:solidFill>
-                  <a:schemeClr val="accent3"/>
-                </a:solidFill>
-              </a:rPr>
-              <a:t>Active</a:t>
-            </a:r>
-            <a:endParaRPr lang="en-US" sz="1100" dirty="0"/>
-          </a:p>
-          <a:p>
-            <a:pPr indent="0" marL="0">
-              <a:spcAft>
-                <a:spcPts val="400"/>
-              </a:spcAft>
-              <a:buNone/>
-            </a:pPr>
-            <a:r>
-              <a:rPr lang="en-US" sz="1100" dirty="0">
-                <a:solidFill>
-                  <a:schemeClr val="tx2"/>
-                </a:solidFill>
-              </a:rPr>
-              <a:t>All items W → </a:t>
-            </a:r>
-            <a:pPr indent="0" marL="0">
-              <a:spcAft>
-                <a:spcPts val="400"/>
-              </a:spcAft>
-              <a:buNone/>
-            </a:pPr>
-            <a:r>
-              <a:rPr lang="en-US" sz="1100" b="1" dirty="0">
-                <a:solidFill>
-                  <a:schemeClr val="accent5"/>
-                </a:solidFill>
-              </a:rPr>
-              <a:t>Inactive</a:t>
-            </a:r>
-            <a:endParaRPr lang="en-US" sz="1100" dirty="0"/>
-          </a:p>
-          <a:p>
-            <a:pPr indent="0" marL="0">
-              <a:spcAft>
-                <a:spcPts val="400"/>
-              </a:spcAft>
-              <a:buNone/>
-            </a:pPr>
-            <a:r>
-              <a:rPr lang="en-US" sz="1100" i="1" dirty="0">
-                <a:solidFill>
-                  <a:schemeClr val="tx2"/>
-                </a:solidFill>
-              </a:rPr>
-              <a:t>You can always choose the status yourself.</a:t>
-            </a:r>
-            <a:endParaRPr lang="en-US" sz="1100" dirty="0"/>
           </a:p>
         </p:txBody>
       </p:sp>
@@ -13394,7 +13563,7 @@
                 <a:ea typeface="Cambria" pitchFamily="34" charset="-122"/>
                 <a:cs typeface="Cambria" pitchFamily="34" charset="-120"/>
               </a:rPr>
-              <a:t>Choosing each member’s status</a:t>
+              <a:t>Entering answers for a family yourself</a:t>
             </a:r>
             <a:endParaRPr lang="en-US" sz="2600" dirty="0"/>
           </a:p>
@@ -13430,7 +13599,7 @@
                   <a:schemeClr val="tx2"/>
                 </a:solidFill>
               </a:rPr>
-              <a:t>One household can have both active and inactive members, so choose the status for each person.</a:t>
+              <a:t>For families without a phone or internet: visit or call them, then enter their answers in the app.</a:t>
             </a:r>
             <a:endParaRPr lang="en-US" sz="1300" dirty="0"/>
           </a:p>
@@ -13438,18 +13607,658 @@
       </p:sp>
       <p:sp>
         <p:nvSpPr>
-          <p:cNvPr id="4" name="Active card"/>
+          <p:cNvPr id="4" name="Record step 1 number circle"/>
           <p:cNvSpPr/>
           <p:nvPr/>
         </p:nvSpPr>
         <p:spPr>
           <a:xfrm>
-            <a:off x="457200" y="1188720"/>
-            <a:ext cx="2624328" cy="1627632"/>
+            <a:off x="457200" y="1252728"/>
+            <a:ext cx="347472" cy="347472"/>
+          </a:xfrm>
+          <a:prstGeom prst="ellipse">
+            <a:avLst/>
+          </a:prstGeom>
+          <a:solidFill>
+            <a:schemeClr val="tx1"/>
+          </a:solidFill>
+          <a:ln/>
+        </p:spPr>
+      </p:sp>
+      <p:sp>
+        <p:nvSpPr>
+          <p:cNvPr id="5" name="Record step 1 number"/>
+          <p:cNvSpPr txBox="1"/>
+          <p:nvPr/>
+        </p:nvSpPr>
+        <p:spPr>
+          <a:xfrm>
+            <a:off x="457200" y="1252728"/>
+            <a:ext cx="347472" cy="347472"/>
+          </a:xfrm>
+          <a:prstGeom prst="rect">
+            <a:avLst/>
+          </a:prstGeom>
+          <a:noFill/>
+          <a:ln/>
+        </p:spPr>
+        <p:txBody>
+          <a:bodyPr wrap="square" lIns="0" tIns="0" rIns="0" bIns="0" rtlCol="0" anchor="ctr"/>
+          <a:lstStyle/>
+          <a:p>
+            <a:pPr algn="ctr" indent="0" marL="0">
+              <a:buNone/>
+            </a:pPr>
+            <a:r>
+              <a:rPr lang="en-US" sz="1200" b="1" dirty="0">
+                <a:solidFill>
+                  <a:schemeClr val="bg1"/>
+                </a:solidFill>
+              </a:rPr>
+              <a:t>1</a:t>
+            </a:r>
+            <a:endParaRPr lang="en-US" sz="1200" dirty="0"/>
+          </a:p>
+        </p:txBody>
+      </p:sp>
+      <p:sp>
+        <p:nvSpPr>
+          <p:cNvPr id="6" name="Record step 1 text"/>
+          <p:cNvSpPr txBox="1"/>
+          <p:nvPr/>
+        </p:nvSpPr>
+        <p:spPr>
+          <a:xfrm>
+            <a:off x="960120" y="1188720"/>
+            <a:ext cx="3886200" cy="502920"/>
+          </a:xfrm>
+          <a:prstGeom prst="rect">
+            <a:avLst/>
+          </a:prstGeom>
+          <a:noFill/>
+          <a:ln/>
+        </p:spPr>
+        <p:txBody>
+          <a:bodyPr wrap="square" lIns="0" tIns="0" rIns="0" bIns="0" rtlCol="0" anchor="ctr"/>
+          <a:lstStyle/>
+          <a:p>
+            <a:pPr indent="0" marL="0">
+              <a:buNone/>
+            </a:pPr>
+            <a:r>
+              <a:rPr lang="en-US" sz="1200" b="1" dirty="0">
+                <a:solidFill>
+                  <a:schemeClr val="tx1"/>
+                </a:solidFill>
+              </a:rPr>
+              <a:t>Click Record census</a:t>
+            </a:r>
+            <a:pPr indent="0" marL="0">
+              <a:buNone/>
+            </a:pPr>
+            <a:r>
+              <a:rPr lang="en-US" sz="1200" dirty="0">
+                <a:solidFill>
+                  <a:schemeClr val="tx2"/>
+                </a:solidFill>
+              </a:rPr>
+              <a:t> on the household’s row.</a:t>
+            </a:r>
+            <a:endParaRPr lang="en-US" sz="1200" dirty="0"/>
+          </a:p>
+        </p:txBody>
+      </p:sp>
+      <p:sp>
+        <p:nvSpPr>
+          <p:cNvPr id="7" name="Record step 2 number circle"/>
+          <p:cNvSpPr/>
+          <p:nvPr/>
+        </p:nvSpPr>
+        <p:spPr>
+          <a:xfrm>
+            <a:off x="457200" y="1828800"/>
+            <a:ext cx="347472" cy="347472"/>
+          </a:xfrm>
+          <a:prstGeom prst="ellipse">
+            <a:avLst/>
+          </a:prstGeom>
+          <a:solidFill>
+            <a:schemeClr val="tx1"/>
+          </a:solidFill>
+          <a:ln/>
+        </p:spPr>
+      </p:sp>
+      <p:sp>
+        <p:nvSpPr>
+          <p:cNvPr id="8" name="Record step 2 number"/>
+          <p:cNvSpPr txBox="1"/>
+          <p:nvPr/>
+        </p:nvSpPr>
+        <p:spPr>
+          <a:xfrm>
+            <a:off x="457200" y="1828800"/>
+            <a:ext cx="347472" cy="347472"/>
+          </a:xfrm>
+          <a:prstGeom prst="rect">
+            <a:avLst/>
+          </a:prstGeom>
+          <a:noFill/>
+          <a:ln/>
+        </p:spPr>
+        <p:txBody>
+          <a:bodyPr wrap="square" lIns="0" tIns="0" rIns="0" bIns="0" rtlCol="0" anchor="ctr"/>
+          <a:lstStyle/>
+          <a:p>
+            <a:pPr algn="ctr" indent="0" marL="0">
+              <a:buNone/>
+            </a:pPr>
+            <a:r>
+              <a:rPr lang="en-US" sz="1200" b="1" dirty="0">
+                <a:solidFill>
+                  <a:schemeClr val="bg1"/>
+                </a:solidFill>
+              </a:rPr>
+              <a:t>2</a:t>
+            </a:r>
+            <a:endParaRPr lang="en-US" sz="1200" dirty="0"/>
+          </a:p>
+        </p:txBody>
+      </p:sp>
+      <p:sp>
+        <p:nvSpPr>
+          <p:cNvPr id="9" name="Record step 2 text"/>
+          <p:cNvSpPr txBox="1"/>
+          <p:nvPr/>
+        </p:nvSpPr>
+        <p:spPr>
+          <a:xfrm>
+            <a:off x="960120" y="1764792"/>
+            <a:ext cx="3886200" cy="502920"/>
+          </a:xfrm>
+          <a:prstGeom prst="rect">
+            <a:avLst/>
+          </a:prstGeom>
+          <a:noFill/>
+          <a:ln/>
+        </p:spPr>
+        <p:txBody>
+          <a:bodyPr wrap="square" lIns="0" tIns="0" rIns="0" bIns="0" rtlCol="0" anchor="ctr"/>
+          <a:lstStyle/>
+          <a:p>
+            <a:pPr indent="0" marL="0">
+              <a:buNone/>
+            </a:pPr>
+            <a:r>
+              <a:rPr lang="en-US" sz="1200" b="1" dirty="0">
+                <a:solidFill>
+                  <a:schemeClr val="tx1"/>
+                </a:solidFill>
+              </a:rPr>
+              <a:t>Answers came from: </a:t>
+            </a:r>
+            <a:pPr indent="0" marL="0">
+              <a:buNone/>
+            </a:pPr>
+            <a:r>
+              <a:rPr lang="en-US" sz="1200" dirty="0">
+                <a:solidFill>
+                  <a:schemeClr val="tx2"/>
+                </a:solidFill>
+              </a:rPr>
+              <a:t>choose Staff / GKK home visit (Paper census form only if they used a printed one).</a:t>
+            </a:r>
+            <a:endParaRPr lang="en-US" sz="1200" dirty="0"/>
+          </a:p>
+        </p:txBody>
+      </p:sp>
+      <p:sp>
+        <p:nvSpPr>
+          <p:cNvPr id="10" name="Record step 3 number circle"/>
+          <p:cNvSpPr/>
+          <p:nvPr/>
+        </p:nvSpPr>
+        <p:spPr>
+          <a:xfrm>
+            <a:off x="457200" y="2404872"/>
+            <a:ext cx="347472" cy="347472"/>
+          </a:xfrm>
+          <a:prstGeom prst="ellipse">
+            <a:avLst/>
+          </a:prstGeom>
+          <a:solidFill>
+            <a:schemeClr val="tx1"/>
+          </a:solidFill>
+          <a:ln/>
+        </p:spPr>
+      </p:sp>
+      <p:sp>
+        <p:nvSpPr>
+          <p:cNvPr id="11" name="Record step 3 number"/>
+          <p:cNvSpPr txBox="1"/>
+          <p:nvPr/>
+        </p:nvSpPr>
+        <p:spPr>
+          <a:xfrm>
+            <a:off x="457200" y="2404872"/>
+            <a:ext cx="347472" cy="347472"/>
+          </a:xfrm>
+          <a:prstGeom prst="rect">
+            <a:avLst/>
+          </a:prstGeom>
+          <a:noFill/>
+          <a:ln/>
+        </p:spPr>
+        <p:txBody>
+          <a:bodyPr wrap="square" lIns="0" tIns="0" rIns="0" bIns="0" rtlCol="0" anchor="ctr"/>
+          <a:lstStyle/>
+          <a:p>
+            <a:pPr algn="ctr" indent="0" marL="0">
+              <a:buNone/>
+            </a:pPr>
+            <a:r>
+              <a:rPr lang="en-US" sz="1200" b="1" dirty="0">
+                <a:solidFill>
+                  <a:schemeClr val="bg1"/>
+                </a:solidFill>
+              </a:rPr>
+              <a:t>3</a:t>
+            </a:r>
+            <a:endParaRPr lang="en-US" sz="1200" dirty="0"/>
+          </a:p>
+        </p:txBody>
+      </p:sp>
+      <p:sp>
+        <p:nvSpPr>
+          <p:cNvPr id="12" name="Record step 3 text"/>
+          <p:cNvSpPr txBox="1"/>
+          <p:nvPr/>
+        </p:nvSpPr>
+        <p:spPr>
+          <a:xfrm>
+            <a:off x="960120" y="2340864"/>
+            <a:ext cx="3886200" cy="502920"/>
+          </a:xfrm>
+          <a:prstGeom prst="rect">
+            <a:avLst/>
+          </a:prstGeom>
+          <a:noFill/>
+          <a:ln/>
+        </p:spPr>
+        <p:txBody>
+          <a:bodyPr wrap="square" lIns="0" tIns="0" rIns="0" bIns="0" rtlCol="0" anchor="ctr"/>
+          <a:lstStyle/>
+          <a:p>
+            <a:pPr indent="0" marL="0">
+              <a:buNone/>
+            </a:pPr>
+            <a:r>
+              <a:rPr lang="en-US" sz="1200" b="1" dirty="0">
+                <a:solidFill>
+                  <a:schemeClr val="tx1"/>
+                </a:solidFill>
+              </a:rPr>
+              <a:t>Mark A, P or W</a:t>
+            </a:r>
+            <a:pPr indent="0" marL="0">
+              <a:buNone/>
+            </a:pPr>
+            <a:r>
+              <a:rPr lang="en-US" sz="1200" dirty="0">
+                <a:solidFill>
+                  <a:schemeClr val="tx2"/>
+                </a:solidFill>
+              </a:rPr>
+              <a:t> for each member on the six items.</a:t>
+            </a:r>
+            <a:endParaRPr lang="en-US" sz="1200" dirty="0"/>
+          </a:p>
+        </p:txBody>
+      </p:sp>
+      <p:sp>
+        <p:nvSpPr>
+          <p:cNvPr id="13" name="Record step 4 number circle"/>
+          <p:cNvSpPr/>
+          <p:nvPr/>
+        </p:nvSpPr>
+        <p:spPr>
+          <a:xfrm>
+            <a:off x="457200" y="2980944"/>
+            <a:ext cx="347472" cy="347472"/>
+          </a:xfrm>
+          <a:prstGeom prst="ellipse">
+            <a:avLst/>
+          </a:prstGeom>
+          <a:solidFill>
+            <a:schemeClr val="tx1"/>
+          </a:solidFill>
+          <a:ln/>
+        </p:spPr>
+      </p:sp>
+      <p:sp>
+        <p:nvSpPr>
+          <p:cNvPr id="14" name="Record step 4 number"/>
+          <p:cNvSpPr txBox="1"/>
+          <p:nvPr/>
+        </p:nvSpPr>
+        <p:spPr>
+          <a:xfrm>
+            <a:off x="457200" y="2980944"/>
+            <a:ext cx="347472" cy="347472"/>
+          </a:xfrm>
+          <a:prstGeom prst="rect">
+            <a:avLst/>
+          </a:prstGeom>
+          <a:noFill/>
+          <a:ln/>
+        </p:spPr>
+        <p:txBody>
+          <a:bodyPr wrap="square" lIns="0" tIns="0" rIns="0" bIns="0" rtlCol="0" anchor="ctr"/>
+          <a:lstStyle/>
+          <a:p>
+            <a:pPr algn="ctr" indent="0" marL="0">
+              <a:buNone/>
+            </a:pPr>
+            <a:r>
+              <a:rPr lang="en-US" sz="1200" b="1" dirty="0">
+                <a:solidFill>
+                  <a:schemeClr val="bg1"/>
+                </a:solidFill>
+              </a:rPr>
+              <a:t>4</a:t>
+            </a:r>
+            <a:endParaRPr lang="en-US" sz="1200" dirty="0"/>
+          </a:p>
+        </p:txBody>
+      </p:sp>
+      <p:sp>
+        <p:nvSpPr>
+          <p:cNvPr id="15" name="Record step 4 text"/>
+          <p:cNvSpPr txBox="1"/>
+          <p:nvPr/>
+        </p:nvSpPr>
+        <p:spPr>
+          <a:xfrm>
+            <a:off x="960120" y="2916936"/>
+            <a:ext cx="3886200" cy="502920"/>
+          </a:xfrm>
+          <a:prstGeom prst="rect">
+            <a:avLst/>
+          </a:prstGeom>
+          <a:noFill/>
+          <a:ln/>
+        </p:spPr>
+        <p:txBody>
+          <a:bodyPr wrap="square" lIns="0" tIns="0" rIns="0" bIns="0" rtlCol="0" anchor="ctr"/>
+          <a:lstStyle/>
+          <a:p>
+            <a:pPr indent="0" marL="0">
+              <a:buNone/>
+            </a:pPr>
+            <a:r>
+              <a:rPr lang="en-US" sz="1200" b="1" dirty="0">
+                <a:solidFill>
+                  <a:schemeClr val="tx1"/>
+                </a:solidFill>
+              </a:rPr>
+              <a:t>Check the Membership status</a:t>
+            </a:r>
+            <a:pPr indent="0" marL="0">
+              <a:buNone/>
+            </a:pPr>
+            <a:r>
+              <a:rPr lang="en-US" sz="1200" dirty="0">
+                <a:solidFill>
+                  <a:schemeClr val="tx2"/>
+                </a:solidFill>
+              </a:rPr>
+              <a:t> and add Notes, e.g. “working abroad”.</a:t>
+            </a:r>
+            <a:endParaRPr lang="en-US" sz="1200" dirty="0"/>
+          </a:p>
+        </p:txBody>
+      </p:sp>
+      <p:sp>
+        <p:nvSpPr>
+          <p:cNvPr id="16" name="Record step 5 number circle"/>
+          <p:cNvSpPr/>
+          <p:nvPr/>
+        </p:nvSpPr>
+        <p:spPr>
+          <a:xfrm>
+            <a:off x="457200" y="3557016"/>
+            <a:ext cx="347472" cy="347472"/>
+          </a:xfrm>
+          <a:prstGeom prst="ellipse">
+            <a:avLst/>
+          </a:prstGeom>
+          <a:solidFill>
+            <a:schemeClr val="tx1"/>
+          </a:solidFill>
+          <a:ln/>
+        </p:spPr>
+      </p:sp>
+      <p:sp>
+        <p:nvSpPr>
+          <p:cNvPr id="17" name="Record step 5 number"/>
+          <p:cNvSpPr txBox="1"/>
+          <p:nvPr/>
+        </p:nvSpPr>
+        <p:spPr>
+          <a:xfrm>
+            <a:off x="457200" y="3557016"/>
+            <a:ext cx="347472" cy="347472"/>
+          </a:xfrm>
+          <a:prstGeom prst="rect">
+            <a:avLst/>
+          </a:prstGeom>
+          <a:noFill/>
+          <a:ln/>
+        </p:spPr>
+        <p:txBody>
+          <a:bodyPr wrap="square" lIns="0" tIns="0" rIns="0" bIns="0" rtlCol="0" anchor="ctr"/>
+          <a:lstStyle/>
+          <a:p>
+            <a:pPr algn="ctr" indent="0" marL="0">
+              <a:buNone/>
+            </a:pPr>
+            <a:r>
+              <a:rPr lang="en-US" sz="1200" b="1" dirty="0">
+                <a:solidFill>
+                  <a:schemeClr val="bg1"/>
+                </a:solidFill>
+              </a:rPr>
+              <a:t>5</a:t>
+            </a:r>
+            <a:endParaRPr lang="en-US" sz="1200" dirty="0"/>
+          </a:p>
+        </p:txBody>
+      </p:sp>
+      <p:sp>
+        <p:nvSpPr>
+          <p:cNvPr id="18" name="Record step 5 text"/>
+          <p:cNvSpPr txBox="1"/>
+          <p:nvPr/>
+        </p:nvSpPr>
+        <p:spPr>
+          <a:xfrm>
+            <a:off x="960120" y="3493008"/>
+            <a:ext cx="3886200" cy="502920"/>
+          </a:xfrm>
+          <a:prstGeom prst="rect">
+            <a:avLst/>
+          </a:prstGeom>
+          <a:noFill/>
+          <a:ln/>
+        </p:spPr>
+        <p:txBody>
+          <a:bodyPr wrap="square" lIns="0" tIns="0" rIns="0" bIns="0" rtlCol="0" anchor="ctr"/>
+          <a:lstStyle/>
+          <a:p>
+            <a:pPr indent="0" marL="0">
+              <a:buNone/>
+            </a:pPr>
+            <a:r>
+              <a:rPr lang="en-US" sz="1200" b="1" dirty="0">
+                <a:solidFill>
+                  <a:schemeClr val="tx1"/>
+                </a:solidFill>
+              </a:rPr>
+              <a:t>Edit details</a:t>
+            </a:r>
+            <a:pPr indent="0" marL="0">
+              <a:buNone/>
+            </a:pPr>
+            <a:r>
+              <a:rPr lang="en-US" sz="1200" dirty="0">
+                <a:solidFill>
+                  <a:schemeClr val="tx2"/>
+                </a:solidFill>
+              </a:rPr>
+              <a:t> to fix a name or birthday. </a:t>
+            </a:r>
+            <a:pPr indent="0" marL="0">
+              <a:buNone/>
+            </a:pPr>
+            <a:r>
+              <a:rPr lang="en-US" sz="1200" b="1" dirty="0">
+                <a:solidFill>
+                  <a:schemeClr val="tx1"/>
+                </a:solidFill>
+              </a:rPr>
+              <a:t>+ Add a new member</a:t>
+            </a:r>
+            <a:pPr indent="0" marL="0">
+              <a:buNone/>
+            </a:pPr>
+            <a:r>
+              <a:rPr lang="en-US" sz="1200" dirty="0">
+                <a:solidFill>
+                  <a:schemeClr val="tx2"/>
+                </a:solidFill>
+              </a:rPr>
+              <a:t> for a newborn or new spouse.</a:t>
+            </a:r>
+            <a:endParaRPr lang="en-US" sz="1200" dirty="0"/>
+          </a:p>
+        </p:txBody>
+      </p:sp>
+      <p:sp>
+        <p:nvSpPr>
+          <p:cNvPr id="19" name="Record step 6 number circle"/>
+          <p:cNvSpPr/>
+          <p:nvPr/>
+        </p:nvSpPr>
+        <p:spPr>
+          <a:xfrm>
+            <a:off x="457200" y="4133088"/>
+            <a:ext cx="347472" cy="347472"/>
+          </a:xfrm>
+          <a:prstGeom prst="ellipse">
+            <a:avLst/>
+          </a:prstGeom>
+          <a:solidFill>
+            <a:schemeClr val="tx1"/>
+          </a:solidFill>
+          <a:ln/>
+        </p:spPr>
+      </p:sp>
+      <p:sp>
+        <p:nvSpPr>
+          <p:cNvPr id="20" name="Record step 6 number"/>
+          <p:cNvSpPr txBox="1"/>
+          <p:nvPr/>
+        </p:nvSpPr>
+        <p:spPr>
+          <a:xfrm>
+            <a:off x="457200" y="4133088"/>
+            <a:ext cx="347472" cy="347472"/>
+          </a:xfrm>
+          <a:prstGeom prst="rect">
+            <a:avLst/>
+          </a:prstGeom>
+          <a:noFill/>
+          <a:ln/>
+        </p:spPr>
+        <p:txBody>
+          <a:bodyPr wrap="square" lIns="0" tIns="0" rIns="0" bIns="0" rtlCol="0" anchor="ctr"/>
+          <a:lstStyle/>
+          <a:p>
+            <a:pPr algn="ctr" indent="0" marL="0">
+              <a:buNone/>
+            </a:pPr>
+            <a:r>
+              <a:rPr lang="en-US" sz="1200" b="1" dirty="0">
+                <a:solidFill>
+                  <a:schemeClr val="bg1"/>
+                </a:solidFill>
+              </a:rPr>
+              <a:t>6</a:t>
+            </a:r>
+            <a:endParaRPr lang="en-US" sz="1200" dirty="0"/>
+          </a:p>
+        </p:txBody>
+      </p:sp>
+      <p:sp>
+        <p:nvSpPr>
+          <p:cNvPr id="21" name="Record step 6 text"/>
+          <p:cNvSpPr txBox="1"/>
+          <p:nvPr/>
+        </p:nvSpPr>
+        <p:spPr>
+          <a:xfrm>
+            <a:off x="960120" y="4069080"/>
+            <a:ext cx="3886200" cy="502920"/>
+          </a:xfrm>
+          <a:prstGeom prst="rect">
+            <a:avLst/>
+          </a:prstGeom>
+          <a:noFill/>
+          <a:ln/>
+        </p:spPr>
+        <p:txBody>
+          <a:bodyPr wrap="square" lIns="0" tIns="0" rIns="0" bIns="0" rtlCol="0" anchor="ctr"/>
+          <a:lstStyle/>
+          <a:p>
+            <a:pPr indent="0" marL="0">
+              <a:buNone/>
+            </a:pPr>
+            <a:r>
+              <a:rPr lang="en-US" sz="1200" b="1" dirty="0">
+                <a:solidFill>
+                  <a:schemeClr val="tx1"/>
+                </a:solidFill>
+              </a:rPr>
+              <a:t>Click Save census.</a:t>
+            </a:r>
+            <a:pPr indent="0" marL="0">
+              <a:buNone/>
+            </a:pPr>
+            <a:r>
+              <a:rPr lang="en-US" sz="1200" dirty="0">
+                <a:solidFill>
+                  <a:schemeClr val="tx2"/>
+                </a:solidFill>
+              </a:rPr>
+              <a:t> Closing the panel without saving discards the answers.</a:t>
+            </a:r>
+            <a:endParaRPr lang="en-US" sz="1200" dirty="0"/>
+          </a:p>
+        </p:txBody>
+      </p:sp>
+      <p:sp>
+        <p:nvSpPr>
+          <p:cNvPr id="22" name="APW panel"/>
+          <p:cNvSpPr/>
+          <p:nvPr/>
+        </p:nvSpPr>
+        <p:spPr>
+          <a:xfrm>
+            <a:off x="5120640" y="1188720"/>
+            <a:ext cx="3566160" cy="3474720"/>
           </a:xfrm>
           <a:prstGeom prst="roundRect">
             <a:avLst>
-              <a:gd name="adj" fmla="val 4494"/>
+              <a:gd name="adj" fmla="val 2105"/>
             </a:avLst>
           </a:prstGeom>
           <a:solidFill>
@@ -13460,14 +14269,50 @@
       </p:sp>
       <p:sp>
         <p:nvSpPr>
-          <p:cNvPr id="5" name="Active circle"/>
+          <p:cNvPr id="23" name="APW heading"/>
+          <p:cNvSpPr txBox="1"/>
+          <p:nvPr/>
+        </p:nvSpPr>
+        <p:spPr>
+          <a:xfrm>
+            <a:off x="5303520" y="1298448"/>
+            <a:ext cx="3200400" cy="274320"/>
+          </a:xfrm>
+          <a:prstGeom prst="rect">
+            <a:avLst/>
+          </a:prstGeom>
+          <a:noFill/>
+          <a:ln/>
+        </p:spPr>
+        <p:txBody>
+          <a:bodyPr wrap="square" lIns="0" tIns="0" rIns="0" bIns="0" rtlCol="0" anchor="t"/>
+          <a:lstStyle/>
+          <a:p>
+            <a:pPr indent="0" marL="0">
+              <a:buNone/>
+            </a:pPr>
+            <a:r>
+              <a:rPr lang="en-US" sz="1400" b="1" dirty="0">
+                <a:solidFill>
+                  <a:schemeClr val="tx1"/>
+                </a:solidFill>
+              </a:rPr>
+              <a:t>The A / P / W grid</a:t>
+            </a:r>
+            <a:endParaRPr lang="en-US" sz="1400" dirty="0"/>
+          </a:p>
+        </p:txBody>
+      </p:sp>
+      <p:sp>
+        <p:nvSpPr>
+          <p:cNvPr id="24" name="APW A number circle"/>
           <p:cNvSpPr/>
           <p:nvPr/>
         </p:nvSpPr>
         <p:spPr>
           <a:xfrm>
-            <a:off x="621792" y="1371600"/>
-            <a:ext cx="457200" cy="457200"/>
+            <a:off x="5303520" y="1664208"/>
+            <a:ext cx="347472" cy="347472"/>
           </a:xfrm>
           <a:prstGeom prst="ellipse">
             <a:avLst/>
@@ -13478,40 +14323,16 @@
           <a:ln/>
         </p:spPr>
       </p:sp>
-      <p:pic>
-        <p:nvPicPr>
-          <p:cNvPr id="6" name="Active icon" descr="Active">    </p:cNvPr>
-          <p:cNvPicPr>
-            <a:picLocks noChangeAspect="1"/>
-          </p:cNvPicPr>
-          <p:nvPr/>
-        </p:nvPicPr>
-        <p:blipFill>
-          <a:blip r:embed="rId1"/>
-          <a:stretch>
-            <a:fillRect/>
-          </a:stretch>
-        </p:blipFill>
-        <p:spPr>
-          <a:xfrm>
-            <a:off x="731520" y="1481328"/>
-            <a:ext cx="237744" cy="237744"/>
-          </a:xfrm>
-          <a:prstGeom prst="rect">
-            <a:avLst/>
-          </a:prstGeom>
-        </p:spPr>
-      </p:pic>
-      <p:sp>
-        <p:nvSpPr>
-          <p:cNvPr id="7" name="Active heading"/>
-          <p:cNvSpPr txBox="1"/>
-          <p:nvPr/>
-        </p:nvSpPr>
-        <p:spPr>
-          <a:xfrm>
-            <a:off x="1188720" y="1371600"/>
-            <a:ext cx="1755648" cy="457200"/>
+      <p:sp>
+        <p:nvSpPr>
+          <p:cNvPr id="25" name="APW A number"/>
+          <p:cNvSpPr txBox="1"/>
+          <p:nvPr/>
+        </p:nvSpPr>
+        <p:spPr>
+          <a:xfrm>
+            <a:off x="5303520" y="1664208"/>
+            <a:ext cx="347472" cy="347472"/>
           </a:xfrm>
           <a:prstGeom prst="rect">
             <a:avLst/>
@@ -13523,55 +14344,52 @@
           <a:bodyPr wrap="square" lIns="0" tIns="0" rIns="0" bIns="0" rtlCol="0" anchor="ctr"/>
           <a:lstStyle/>
           <a:p>
-            <a:pPr indent="0" marL="0">
-              <a:buNone/>
-            </a:pPr>
-            <a:r>
-              <a:rPr lang="en-US" sz="1500" b="1" dirty="0">
+            <a:pPr algn="ctr" indent="0" marL="0">
+              <a:buNone/>
+            </a:pPr>
+            <a:r>
+              <a:rPr lang="en-US" sz="1200" b="1" dirty="0">
+                <a:solidFill>
+                  <a:schemeClr val="bg1"/>
+                </a:solidFill>
+              </a:rPr>
+              <a:t>A</a:t>
+            </a:r>
+            <a:endParaRPr lang="en-US" sz="1200" dirty="0"/>
+          </a:p>
+        </p:txBody>
+      </p:sp>
+      <p:sp>
+        <p:nvSpPr>
+          <p:cNvPr id="26" name="APW A label"/>
+          <p:cNvSpPr txBox="1"/>
+          <p:nvPr/>
+        </p:nvSpPr>
+        <p:spPr>
+          <a:xfrm>
+            <a:off x="5715000" y="1664208"/>
+            <a:ext cx="640080" cy="347472"/>
+          </a:xfrm>
+          <a:prstGeom prst="rect">
+            <a:avLst/>
+          </a:prstGeom>
+          <a:noFill/>
+          <a:ln/>
+        </p:spPr>
+        <p:txBody>
+          <a:bodyPr wrap="square" lIns="0" tIns="0" rIns="0" bIns="0" rtlCol="0" anchor="ctr"/>
+          <a:lstStyle/>
+          <a:p>
+            <a:pPr indent="0" marL="0">
+              <a:buNone/>
+            </a:pPr>
+            <a:r>
+              <a:rPr lang="en-US" sz="1150" b="1" dirty="0">
                 <a:solidFill>
                   <a:schemeClr val="tx1"/>
                 </a:solidFill>
-                <a:latin typeface="Cambria" pitchFamily="34" charset="0"/>
-                <a:ea typeface="Cambria" pitchFamily="34" charset="-122"/>
-                <a:cs typeface="Cambria" pitchFamily="34" charset="-120"/>
-              </a:rPr>
-              <a:t>Active</a:t>
-            </a:r>
-            <a:endParaRPr lang="en-US" sz="1500" dirty="0"/>
-          </a:p>
-        </p:txBody>
-      </p:sp>
-      <p:sp>
-        <p:nvSpPr>
-          <p:cNvPr id="8" name="Active text"/>
-          <p:cNvSpPr txBox="1"/>
-          <p:nvPr/>
-        </p:nvSpPr>
-        <p:spPr>
-          <a:xfrm>
-            <a:off x="621792" y="1965960"/>
-            <a:ext cx="2295144" cy="758952"/>
-          </a:xfrm>
-          <a:prstGeom prst="rect">
-            <a:avLst/>
-          </a:prstGeom>
-          <a:noFill/>
-          <a:ln/>
-        </p:spPr>
-        <p:txBody>
-          <a:bodyPr wrap="square" lIns="0" tIns="0" rIns="0" bIns="0" rtlCol="0" anchor="t"/>
-          <a:lstStyle/>
-          <a:p>
-            <a:pPr indent="0" marL="0">
-              <a:buNone/>
-            </a:pPr>
-            <a:r>
-              <a:rPr lang="en-US" sz="1150" dirty="0">
-                <a:solidFill>
-                  <a:schemeClr val="tx2"/>
-                </a:solidFill>
-              </a:rPr>
-              <a:t>Takes part in parish life: Mass, Bible service, GKK activities.</a:t>
+              </a:rPr>
+              <a:t>Aktibo</a:t>
             </a:r>
             <a:endParaRPr lang="en-US" sz="1150" dirty="0"/>
           </a:p>
@@ -13579,459 +14397,106 @@
       </p:sp>
       <p:sp>
         <p:nvSpPr>
-          <p:cNvPr id="9" name="Inactive card"/>
+          <p:cNvPr id="27" name="APW P number circle"/>
           <p:cNvSpPr/>
           <p:nvPr/>
         </p:nvSpPr>
         <p:spPr>
           <a:xfrm>
-            <a:off x="3264408" y="1188720"/>
-            <a:ext cx="2624328" cy="1627632"/>
-          </a:xfrm>
-          <a:prstGeom prst="roundRect">
-            <a:avLst>
-              <a:gd name="adj" fmla="val 4494"/>
-            </a:avLst>
+            <a:off x="6373368" y="1664208"/>
+            <a:ext cx="347472" cy="347472"/>
+          </a:xfrm>
+          <a:prstGeom prst="ellipse">
+            <a:avLst/>
           </a:prstGeom>
           <a:solidFill>
-            <a:schemeClr val="bg2"/>
+            <a:schemeClr val="accent2"/>
           </a:solidFill>
           <a:ln/>
         </p:spPr>
       </p:sp>
       <p:sp>
         <p:nvSpPr>
-          <p:cNvPr id="10" name="Inactive circle"/>
+          <p:cNvPr id="28" name="APW P number"/>
+          <p:cNvSpPr txBox="1"/>
+          <p:nvPr/>
+        </p:nvSpPr>
+        <p:spPr>
+          <a:xfrm>
+            <a:off x="6373368" y="1664208"/>
+            <a:ext cx="347472" cy="347472"/>
+          </a:xfrm>
+          <a:prstGeom prst="rect">
+            <a:avLst/>
+          </a:prstGeom>
+          <a:noFill/>
+          <a:ln/>
+        </p:spPr>
+        <p:txBody>
+          <a:bodyPr wrap="square" lIns="0" tIns="0" rIns="0" bIns="0" rtlCol="0" anchor="ctr"/>
+          <a:lstStyle/>
+          <a:p>
+            <a:pPr algn="ctr" indent="0" marL="0">
+              <a:buNone/>
+            </a:pPr>
+            <a:r>
+              <a:rPr lang="en-US" sz="1200" b="1" dirty="0">
+                <a:solidFill>
+                  <a:schemeClr val="bg1"/>
+                </a:solidFill>
+              </a:rPr>
+              <a:t>P</a:t>
+            </a:r>
+            <a:endParaRPr lang="en-US" sz="1200" dirty="0"/>
+          </a:p>
+        </p:txBody>
+      </p:sp>
+      <p:sp>
+        <p:nvSpPr>
+          <p:cNvPr id="29" name="APW P label"/>
+          <p:cNvSpPr txBox="1"/>
+          <p:nvPr/>
+        </p:nvSpPr>
+        <p:spPr>
+          <a:xfrm>
+            <a:off x="6784848" y="1664208"/>
+            <a:ext cx="640080" cy="347472"/>
+          </a:xfrm>
+          <a:prstGeom prst="rect">
+            <a:avLst/>
+          </a:prstGeom>
+          <a:noFill/>
+          <a:ln/>
+        </p:spPr>
+        <p:txBody>
+          <a:bodyPr wrap="square" lIns="0" tIns="0" rIns="0" bIns="0" rtlCol="0" anchor="ctr"/>
+          <a:lstStyle/>
+          <a:p>
+            <a:pPr indent="0" marL="0">
+              <a:buNone/>
+            </a:pPr>
+            <a:r>
+              <a:rPr lang="en-US" sz="1150" b="1" dirty="0">
+                <a:solidFill>
+                  <a:schemeClr val="tx1"/>
+                </a:solidFill>
+              </a:rPr>
+              <a:t>Panagsa</a:t>
+            </a:r>
+            <a:endParaRPr lang="en-US" sz="1150" dirty="0"/>
+          </a:p>
+        </p:txBody>
+      </p:sp>
+      <p:sp>
+        <p:nvSpPr>
+          <p:cNvPr id="30" name="APW W number circle"/>
           <p:cNvSpPr/>
           <p:nvPr/>
         </p:nvSpPr>
         <p:spPr>
           <a:xfrm>
-            <a:off x="3429000" y="1371600"/>
-            <a:ext cx="457200" cy="457200"/>
-          </a:xfrm>
-          <a:prstGeom prst="ellipse">
-            <a:avLst/>
-          </a:prstGeom>
-          <a:solidFill>
-            <a:schemeClr val="tx2"/>
-          </a:solidFill>
-          <a:ln/>
-        </p:spPr>
-      </p:sp>
-      <p:pic>
-        <p:nvPicPr>
-          <p:cNvPr id="11" name="Inactive icon" descr="Inactive">    </p:cNvPr>
-          <p:cNvPicPr>
-            <a:picLocks noChangeAspect="1"/>
-          </p:cNvPicPr>
-          <p:nvPr/>
-        </p:nvPicPr>
-        <p:blipFill>
-          <a:blip r:embed="rId2"/>
-          <a:stretch>
-            <a:fillRect/>
-          </a:stretch>
-        </p:blipFill>
-        <p:spPr>
-          <a:xfrm>
-            <a:off x="3538728" y="1481328"/>
-            <a:ext cx="237744" cy="237744"/>
-          </a:xfrm>
-          <a:prstGeom prst="rect">
-            <a:avLst/>
-          </a:prstGeom>
-        </p:spPr>
-      </p:pic>
-      <p:sp>
-        <p:nvSpPr>
-          <p:cNvPr id="12" name="Inactive heading"/>
-          <p:cNvSpPr txBox="1"/>
-          <p:nvPr/>
-        </p:nvSpPr>
-        <p:spPr>
-          <a:xfrm>
-            <a:off x="3995928" y="1371600"/>
-            <a:ext cx="1755648" cy="457200"/>
-          </a:xfrm>
-          <a:prstGeom prst="rect">
-            <a:avLst/>
-          </a:prstGeom>
-          <a:noFill/>
-          <a:ln/>
-        </p:spPr>
-        <p:txBody>
-          <a:bodyPr wrap="square" lIns="0" tIns="0" rIns="0" bIns="0" rtlCol="0" anchor="ctr"/>
-          <a:lstStyle/>
-          <a:p>
-            <a:pPr indent="0" marL="0">
-              <a:buNone/>
-            </a:pPr>
-            <a:r>
-              <a:rPr lang="en-US" sz="1500" b="1" dirty="0">
-                <a:solidFill>
-                  <a:schemeClr val="tx1"/>
-                </a:solidFill>
-                <a:latin typeface="Cambria" pitchFamily="34" charset="0"/>
-                <a:ea typeface="Cambria" pitchFamily="34" charset="-122"/>
-                <a:cs typeface="Cambria" pitchFamily="34" charset="-120"/>
-              </a:rPr>
-              <a:t>Inactive</a:t>
-            </a:r>
-            <a:endParaRPr lang="en-US" sz="1500" dirty="0"/>
-          </a:p>
-        </p:txBody>
-      </p:sp>
-      <p:sp>
-        <p:nvSpPr>
-          <p:cNvPr id="13" name="Inactive text"/>
-          <p:cNvSpPr txBox="1"/>
-          <p:nvPr/>
-        </p:nvSpPr>
-        <p:spPr>
-          <a:xfrm>
-            <a:off x="3429000" y="1965960"/>
-            <a:ext cx="2295144" cy="758952"/>
-          </a:xfrm>
-          <a:prstGeom prst="rect">
-            <a:avLst/>
-          </a:prstGeom>
-          <a:noFill/>
-          <a:ln/>
-        </p:spPr>
-        <p:txBody>
-          <a:bodyPr wrap="square" lIns="0" tIns="0" rIns="0" bIns="0" rtlCol="0" anchor="t"/>
-          <a:lstStyle/>
-          <a:p>
-            <a:pPr indent="0" marL="0">
-              <a:buNone/>
-            </a:pPr>
-            <a:r>
-              <a:rPr lang="en-US" sz="1150" dirty="0">
-                <a:solidFill>
-                  <a:schemeClr val="tx2"/>
-                </a:solidFill>
-              </a:rPr>
-              <a:t>Rarely or never takes part. Still a member of the parish.</a:t>
-            </a:r>
-            <a:endParaRPr lang="en-US" sz="1150" dirty="0"/>
-          </a:p>
-        </p:txBody>
-      </p:sp>
-      <p:sp>
-        <p:nvSpPr>
-          <p:cNvPr id="14" name="Moved away card"/>
-          <p:cNvSpPr/>
-          <p:nvPr/>
-        </p:nvSpPr>
-        <p:spPr>
-          <a:xfrm>
-            <a:off x="6071616" y="1188720"/>
-            <a:ext cx="2624328" cy="1627632"/>
-          </a:xfrm>
-          <a:prstGeom prst="roundRect">
-            <a:avLst>
-              <a:gd name="adj" fmla="val 4494"/>
-            </a:avLst>
-          </a:prstGeom>
-          <a:solidFill>
-            <a:schemeClr val="bg2"/>
-          </a:solidFill>
-          <a:ln/>
-        </p:spPr>
-      </p:sp>
-      <p:sp>
-        <p:nvSpPr>
-          <p:cNvPr id="15" name="Moved away circle"/>
-          <p:cNvSpPr/>
-          <p:nvPr/>
-        </p:nvSpPr>
-        <p:spPr>
-          <a:xfrm>
-            <a:off x="6236208" y="1371600"/>
-            <a:ext cx="457200" cy="457200"/>
-          </a:xfrm>
-          <a:prstGeom prst="ellipse">
-            <a:avLst/>
-          </a:prstGeom>
-          <a:solidFill>
-            <a:schemeClr val="accent1"/>
-          </a:solidFill>
-          <a:ln/>
-        </p:spPr>
-      </p:sp>
-      <p:pic>
-        <p:nvPicPr>
-          <p:cNvPr id="16" name="Moved away icon" descr="Moved away">    </p:cNvPr>
-          <p:cNvPicPr>
-            <a:picLocks noChangeAspect="1"/>
-          </p:cNvPicPr>
-          <p:nvPr/>
-        </p:nvPicPr>
-        <p:blipFill>
-          <a:blip r:embed="rId3"/>
-          <a:stretch>
-            <a:fillRect/>
-          </a:stretch>
-        </p:blipFill>
-        <p:spPr>
-          <a:xfrm>
-            <a:off x="6345936" y="1481328"/>
-            <a:ext cx="237744" cy="237744"/>
-          </a:xfrm>
-          <a:prstGeom prst="rect">
-            <a:avLst/>
-          </a:prstGeom>
-        </p:spPr>
-      </p:pic>
-      <p:sp>
-        <p:nvSpPr>
-          <p:cNvPr id="17" name="Moved away heading"/>
-          <p:cNvSpPr txBox="1"/>
-          <p:nvPr/>
-        </p:nvSpPr>
-        <p:spPr>
-          <a:xfrm>
-            <a:off x="6803136" y="1371600"/>
-            <a:ext cx="1755648" cy="457200"/>
-          </a:xfrm>
-          <a:prstGeom prst="rect">
-            <a:avLst/>
-          </a:prstGeom>
-          <a:noFill/>
-          <a:ln/>
-        </p:spPr>
-        <p:txBody>
-          <a:bodyPr wrap="square" lIns="0" tIns="0" rIns="0" bIns="0" rtlCol="0" anchor="ctr"/>
-          <a:lstStyle/>
-          <a:p>
-            <a:pPr indent="0" marL="0">
-              <a:buNone/>
-            </a:pPr>
-            <a:r>
-              <a:rPr lang="en-US" sz="1500" b="1" dirty="0">
-                <a:solidFill>
-                  <a:schemeClr val="tx1"/>
-                </a:solidFill>
-                <a:latin typeface="Cambria" pitchFamily="34" charset="0"/>
-                <a:ea typeface="Cambria" pitchFamily="34" charset="-122"/>
-                <a:cs typeface="Cambria" pitchFamily="34" charset="-120"/>
-              </a:rPr>
-              <a:t>Moved away</a:t>
-            </a:r>
-            <a:endParaRPr lang="en-US" sz="1500" dirty="0"/>
-          </a:p>
-        </p:txBody>
-      </p:sp>
-      <p:sp>
-        <p:nvSpPr>
-          <p:cNvPr id="18" name="Moved away text"/>
-          <p:cNvSpPr txBox="1"/>
-          <p:nvPr/>
-        </p:nvSpPr>
-        <p:spPr>
-          <a:xfrm>
-            <a:off x="6236208" y="1965960"/>
-            <a:ext cx="2295144" cy="758952"/>
-          </a:xfrm>
-          <a:prstGeom prst="rect">
-            <a:avLst/>
-          </a:prstGeom>
-          <a:noFill/>
-          <a:ln/>
-        </p:spPr>
-        <p:txBody>
-          <a:bodyPr wrap="square" lIns="0" tIns="0" rIns="0" bIns="0" rtlCol="0" anchor="t"/>
-          <a:lstStyle/>
-          <a:p>
-            <a:pPr indent="0" marL="0">
-              <a:buNone/>
-            </a:pPr>
-            <a:r>
-              <a:rPr lang="en-US" sz="1150" dirty="0">
-                <a:solidFill>
-                  <a:schemeClr val="tx2"/>
-                </a:solidFill>
-              </a:rPr>
-              <a:t>Now lives outside the parish. Write where in Notes. They leave the lists and next census’s forms.</a:t>
-            </a:r>
-            <a:endParaRPr lang="en-US" sz="1150" dirty="0"/>
-          </a:p>
-        </p:txBody>
-      </p:sp>
-      <p:sp>
-        <p:nvSpPr>
-          <p:cNvPr id="19" name="Deceased card"/>
-          <p:cNvSpPr/>
-          <p:nvPr/>
-        </p:nvSpPr>
-        <p:spPr>
-          <a:xfrm>
-            <a:off x="457200" y="2971800"/>
-            <a:ext cx="2624328" cy="1627632"/>
-          </a:xfrm>
-          <a:prstGeom prst="roundRect">
-            <a:avLst>
-              <a:gd name="adj" fmla="val 4494"/>
-            </a:avLst>
-          </a:prstGeom>
-          <a:solidFill>
-            <a:schemeClr val="bg2"/>
-          </a:solidFill>
-          <a:ln/>
-        </p:spPr>
-      </p:sp>
-      <p:sp>
-        <p:nvSpPr>
-          <p:cNvPr id="20" name="Deceased circle"/>
-          <p:cNvSpPr/>
-          <p:nvPr/>
-        </p:nvSpPr>
-        <p:spPr>
-          <a:xfrm>
-            <a:off x="621792" y="3154680"/>
-            <a:ext cx="457200" cy="457200"/>
-          </a:xfrm>
-          <a:prstGeom prst="ellipse">
-            <a:avLst/>
-          </a:prstGeom>
-          <a:solidFill>
-            <a:schemeClr val="tx1"/>
-          </a:solidFill>
-          <a:ln/>
-        </p:spPr>
-      </p:sp>
-      <p:pic>
-        <p:nvPicPr>
-          <p:cNvPr id="21" name="Deceased icon" descr="Deceased">    </p:cNvPr>
-          <p:cNvPicPr>
-            <a:picLocks noChangeAspect="1"/>
-          </p:cNvPicPr>
-          <p:nvPr/>
-        </p:nvPicPr>
-        <p:blipFill>
-          <a:blip r:embed="rId4"/>
-          <a:stretch>
-            <a:fillRect/>
-          </a:stretch>
-        </p:blipFill>
-        <p:spPr>
-          <a:xfrm>
-            <a:off x="731520" y="3264408"/>
-            <a:ext cx="237744" cy="237744"/>
-          </a:xfrm>
-          <a:prstGeom prst="rect">
-            <a:avLst/>
-          </a:prstGeom>
-        </p:spPr>
-      </p:pic>
-      <p:sp>
-        <p:nvSpPr>
-          <p:cNvPr id="22" name="Deceased heading"/>
-          <p:cNvSpPr txBox="1"/>
-          <p:nvPr/>
-        </p:nvSpPr>
-        <p:spPr>
-          <a:xfrm>
-            <a:off x="1188720" y="3154680"/>
-            <a:ext cx="1755648" cy="457200"/>
-          </a:xfrm>
-          <a:prstGeom prst="rect">
-            <a:avLst/>
-          </a:prstGeom>
-          <a:noFill/>
-          <a:ln/>
-        </p:spPr>
-        <p:txBody>
-          <a:bodyPr wrap="square" lIns="0" tIns="0" rIns="0" bIns="0" rtlCol="0" anchor="ctr"/>
-          <a:lstStyle/>
-          <a:p>
-            <a:pPr indent="0" marL="0">
-              <a:buNone/>
-            </a:pPr>
-            <a:r>
-              <a:rPr lang="en-US" sz="1500" b="1" dirty="0">
-                <a:solidFill>
-                  <a:schemeClr val="tx1"/>
-                </a:solidFill>
-                <a:latin typeface="Cambria" pitchFamily="34" charset="0"/>
-                <a:ea typeface="Cambria" pitchFamily="34" charset="-122"/>
-                <a:cs typeface="Cambria" pitchFamily="34" charset="-120"/>
-              </a:rPr>
-              <a:t>Deceased</a:t>
-            </a:r>
-            <a:endParaRPr lang="en-US" sz="1500" dirty="0"/>
-          </a:p>
-        </p:txBody>
-      </p:sp>
-      <p:sp>
-        <p:nvSpPr>
-          <p:cNvPr id="23" name="Deceased text"/>
-          <p:cNvSpPr txBox="1"/>
-          <p:nvPr/>
-        </p:nvSpPr>
-        <p:spPr>
-          <a:xfrm>
-            <a:off x="621792" y="3749040"/>
-            <a:ext cx="2295144" cy="758952"/>
-          </a:xfrm>
-          <a:prstGeom prst="rect">
-            <a:avLst/>
-          </a:prstGeom>
-          <a:noFill/>
-          <a:ln/>
-        </p:spPr>
-        <p:txBody>
-          <a:bodyPr wrap="square" lIns="0" tIns="0" rIns="0" bIns="0" rtlCol="0" anchor="t"/>
-          <a:lstStyle/>
-          <a:p>
-            <a:pPr indent="0" marL="0">
-              <a:buNone/>
-            </a:pPr>
-            <a:r>
-              <a:rPr lang="en-US" sz="1150" dirty="0">
-                <a:solidFill>
-                  <a:schemeClr val="tx2"/>
-                </a:solidFill>
-              </a:rPr>
-              <a:t>Write the date in Notes. The record is kept, but they leave the counts and forms.</a:t>
-            </a:r>
-            <a:endParaRPr lang="en-US" sz="1150" dirty="0"/>
-          </a:p>
-        </p:txBody>
-      </p:sp>
-      <p:sp>
-        <p:nvSpPr>
-          <p:cNvPr id="24" name="Left the Church card"/>
-          <p:cNvSpPr/>
-          <p:nvPr/>
-        </p:nvSpPr>
-        <p:spPr>
-          <a:xfrm>
-            <a:off x="3264408" y="2971800"/>
-            <a:ext cx="2624328" cy="1627632"/>
-          </a:xfrm>
-          <a:prstGeom prst="roundRect">
-            <a:avLst>
-              <a:gd name="adj" fmla="val 4494"/>
-            </a:avLst>
-          </a:prstGeom>
-          <a:solidFill>
-            <a:schemeClr val="bg2"/>
-          </a:solidFill>
-          <a:ln/>
-        </p:spPr>
-      </p:sp>
-      <p:sp>
-        <p:nvSpPr>
-          <p:cNvPr id="25" name="Left the Church circle"/>
-          <p:cNvSpPr/>
-          <p:nvPr/>
-        </p:nvSpPr>
-        <p:spPr>
-          <a:xfrm>
-            <a:off x="3429000" y="3154680"/>
-            <a:ext cx="457200" cy="457200"/>
+            <a:off x="7443216" y="1664208"/>
+            <a:ext cx="347472" cy="347472"/>
           </a:xfrm>
           <a:prstGeom prst="ellipse">
             <a:avLst/>
@@ -14042,40 +14507,16 @@
           <a:ln/>
         </p:spPr>
       </p:sp>
-      <p:pic>
-        <p:nvPicPr>
-          <p:cNvPr id="26" name="Left the Church icon" descr="Left the Church">    </p:cNvPr>
-          <p:cNvPicPr>
-            <a:picLocks noChangeAspect="1"/>
-          </p:cNvPicPr>
-          <p:nvPr/>
-        </p:nvPicPr>
-        <p:blipFill>
-          <a:blip r:embed="rId5"/>
-          <a:stretch>
-            <a:fillRect/>
-          </a:stretch>
-        </p:blipFill>
-        <p:spPr>
-          <a:xfrm>
-            <a:off x="3538728" y="3264408"/>
-            <a:ext cx="237744" cy="237744"/>
-          </a:xfrm>
-          <a:prstGeom prst="rect">
-            <a:avLst/>
-          </a:prstGeom>
-        </p:spPr>
-      </p:pic>
-      <p:sp>
-        <p:nvSpPr>
-          <p:cNvPr id="27" name="Left the Church heading"/>
-          <p:cNvSpPr txBox="1"/>
-          <p:nvPr/>
-        </p:nvSpPr>
-        <p:spPr>
-          <a:xfrm>
-            <a:off x="3995928" y="3154680"/>
-            <a:ext cx="1755648" cy="457200"/>
+      <p:sp>
+        <p:nvSpPr>
+          <p:cNvPr id="31" name="APW W number"/>
+          <p:cNvSpPr txBox="1"/>
+          <p:nvPr/>
+        </p:nvSpPr>
+        <p:spPr>
+          <a:xfrm>
+            <a:off x="7443216" y="1664208"/>
+            <a:ext cx="347472" cy="347472"/>
           </a:xfrm>
           <a:prstGeom prst="rect">
             <a:avLst/>
@@ -14087,34 +14528,67 @@
           <a:bodyPr wrap="square" lIns="0" tIns="0" rIns="0" bIns="0" rtlCol="0" anchor="ctr"/>
           <a:lstStyle/>
           <a:p>
-            <a:pPr indent="0" marL="0">
-              <a:buNone/>
-            </a:pPr>
-            <a:r>
-              <a:rPr lang="en-US" sz="1500" b="1" dirty="0">
+            <a:pPr algn="ctr" indent="0" marL="0">
+              <a:buNone/>
+            </a:pPr>
+            <a:r>
+              <a:rPr lang="en-US" sz="1200" b="1" dirty="0">
+                <a:solidFill>
+                  <a:schemeClr val="bg1"/>
+                </a:solidFill>
+              </a:rPr>
+              <a:t>W</a:t>
+            </a:r>
+            <a:endParaRPr lang="en-US" sz="1200" dirty="0"/>
+          </a:p>
+        </p:txBody>
+      </p:sp>
+      <p:sp>
+        <p:nvSpPr>
+          <p:cNvPr id="32" name="APW W label"/>
+          <p:cNvSpPr txBox="1"/>
+          <p:nvPr/>
+        </p:nvSpPr>
+        <p:spPr>
+          <a:xfrm>
+            <a:off x="7854696" y="1664208"/>
+            <a:ext cx="640080" cy="347472"/>
+          </a:xfrm>
+          <a:prstGeom prst="rect">
+            <a:avLst/>
+          </a:prstGeom>
+          <a:noFill/>
+          <a:ln/>
+        </p:spPr>
+        <p:txBody>
+          <a:bodyPr wrap="square" lIns="0" tIns="0" rIns="0" bIns="0" rtlCol="0" anchor="ctr"/>
+          <a:lstStyle/>
+          <a:p>
+            <a:pPr indent="0" marL="0">
+              <a:buNone/>
+            </a:pPr>
+            <a:r>
+              <a:rPr lang="en-US" sz="1150" b="1" dirty="0">
                 <a:solidFill>
                   <a:schemeClr val="tx1"/>
                 </a:solidFill>
-                <a:latin typeface="Cambria" pitchFamily="34" charset="0"/>
-                <a:ea typeface="Cambria" pitchFamily="34" charset="-122"/>
-                <a:cs typeface="Cambria" pitchFamily="34" charset="-120"/>
-              </a:rPr>
-              <a:t>Left the Church</a:t>
-            </a:r>
-            <a:endParaRPr lang="en-US" sz="1500" dirty="0"/>
-          </a:p>
-        </p:txBody>
-      </p:sp>
-      <p:sp>
-        <p:nvSpPr>
-          <p:cNvPr id="28" name="Left the Church text"/>
-          <p:cNvSpPr txBox="1"/>
-          <p:nvPr/>
-        </p:nvSpPr>
-        <p:spPr>
-          <a:xfrm>
-            <a:off x="3429000" y="3749040"/>
-            <a:ext cx="2295144" cy="758952"/>
+              </a:rPr>
+              <a:t>Wala</a:t>
+            </a:r>
+            <a:endParaRPr lang="en-US" sz="1150" dirty="0"/>
+          </a:p>
+        </p:txBody>
+      </p:sp>
+      <p:sp>
+        <p:nvSpPr>
+          <p:cNvPr id="33" name="Items heading"/>
+          <p:cNvSpPr txBox="1"/>
+          <p:nvPr/>
+        </p:nvSpPr>
+        <p:spPr>
+          <a:xfrm>
+            <a:off x="5303520" y="2121408"/>
+            <a:ext cx="3200400" cy="228600"/>
           </a:xfrm>
           <a:prstGeom prst="rect">
             <a:avLst/>
@@ -14130,155 +14604,306 @@
               <a:buNone/>
             </a:pPr>
             <a:r>
-              <a:rPr lang="en-US" sz="1150" dirty="0">
+              <a:rPr lang="en-US" sz="1100" b="1" dirty="0">
                 <a:solidFill>
                   <a:schemeClr val="tx2"/>
                 </a:solidFill>
               </a:rPr>
-              <a:t>Has joined another faith. Choose this only when the family says so.</a:t>
-            </a:r>
-            <a:endParaRPr lang="en-US" sz="1150" dirty="0"/>
-          </a:p>
-        </p:txBody>
-      </p:sp>
-      <p:sp>
-        <p:nvSpPr>
-          <p:cNvPr id="29" name="Not confirmed yet card"/>
+              <a:t>Six items for each member</a:t>
+            </a:r>
+            <a:endParaRPr lang="en-US" sz="1100" dirty="0"/>
+          </a:p>
+        </p:txBody>
+      </p:sp>
+      <p:sp>
+        <p:nvSpPr>
+          <p:cNvPr id="34" name="Items column 1"/>
+          <p:cNvSpPr txBox="1"/>
+          <p:nvPr/>
+        </p:nvSpPr>
+        <p:spPr>
+          <a:xfrm>
+            <a:off x="5303520" y="2359152"/>
+            <a:ext cx="1783080" cy="685800"/>
+          </a:xfrm>
+          <a:prstGeom prst="rect">
+            <a:avLst/>
+          </a:prstGeom>
+          <a:noFill/>
+          <a:ln/>
+        </p:spPr>
+        <p:txBody>
+          <a:bodyPr wrap="square" lIns="0" tIns="0" rIns="0" bIns="0" rtlCol="0" anchor="t"/>
+          <a:lstStyle/>
+          <a:p>
+            <a:pPr marL="127000" indent="-127000">
+              <a:spcAft>
+                <a:spcPts val="200"/>
+              </a:spcAft>
+              <a:buSzPct val="100000"/>
+              <a:buChar char="•"/>
+            </a:pPr>
+            <a:r>
+              <a:rPr lang="en-US" sz="1050" dirty="0">
+                <a:solidFill>
+                  <a:schemeClr val="tx1"/>
+                </a:solidFill>
+              </a:rPr>
+              <a:t>Mass (Misa)</a:t>
+            </a:r>
+            <a:endParaRPr lang="en-US" sz="1050" dirty="0"/>
+          </a:p>
+          <a:p>
+            <a:pPr marL="127000" indent="-127000">
+              <a:spcAft>
+                <a:spcPts val="200"/>
+              </a:spcAft>
+              <a:buSzPct val="100000"/>
+              <a:buChar char="•"/>
+            </a:pPr>
+            <a:r>
+              <a:rPr lang="en-US" sz="1050" dirty="0">
+                <a:solidFill>
+                  <a:schemeClr val="tx1"/>
+                </a:solidFill>
+              </a:rPr>
+              <a:t>Bible Service (Kasaulogan)</a:t>
+            </a:r>
+            <a:endParaRPr lang="en-US" sz="1050" dirty="0"/>
+          </a:p>
+          <a:p>
+            <a:pPr marL="127000" indent="-127000">
+              <a:spcAft>
+                <a:spcPts val="200"/>
+              </a:spcAft>
+              <a:buSzPct val="100000"/>
+              <a:buChar char="•"/>
+            </a:pPr>
+            <a:r>
+              <a:rPr lang="en-US" sz="1050" dirty="0">
+                <a:solidFill>
+                  <a:schemeClr val="tx1"/>
+                </a:solidFill>
+              </a:rPr>
+              <a:t>Devotions / Rosary</a:t>
+            </a:r>
+            <a:endParaRPr lang="en-US" sz="1050" dirty="0"/>
+          </a:p>
+        </p:txBody>
+      </p:sp>
+      <p:sp>
+        <p:nvSpPr>
+          <p:cNvPr id="35" name="Items column 2"/>
+          <p:cNvSpPr txBox="1"/>
+          <p:nvPr/>
+        </p:nvSpPr>
+        <p:spPr>
+          <a:xfrm>
+            <a:off x="7086600" y="2359152"/>
+            <a:ext cx="1508760" cy="685800"/>
+          </a:xfrm>
+          <a:prstGeom prst="rect">
+            <a:avLst/>
+          </a:prstGeom>
+          <a:noFill/>
+          <a:ln/>
+        </p:spPr>
+        <p:txBody>
+          <a:bodyPr wrap="square" lIns="0" tIns="0" rIns="0" bIns="0" rtlCol="0" anchor="t"/>
+          <a:lstStyle/>
+          <a:p>
+            <a:pPr marL="127000" indent="-127000">
+              <a:spcAft>
+                <a:spcPts val="200"/>
+              </a:spcAft>
+              <a:buSzPct val="100000"/>
+              <a:buChar char="•"/>
+            </a:pPr>
+            <a:r>
+              <a:rPr lang="en-US" sz="1050" dirty="0">
+                <a:solidFill>
+                  <a:schemeClr val="tx1"/>
+                </a:solidFill>
+              </a:rPr>
+              <a:t>Meetings / Seminars</a:t>
+            </a:r>
+            <a:endParaRPr lang="en-US" sz="1050" dirty="0"/>
+          </a:p>
+          <a:p>
+            <a:pPr marL="127000" indent="-127000">
+              <a:spcAft>
+                <a:spcPts val="200"/>
+              </a:spcAft>
+              <a:buSzPct val="100000"/>
+              <a:buChar char="•"/>
+            </a:pPr>
+            <a:r>
+              <a:rPr lang="en-US" sz="1050" dirty="0">
+                <a:solidFill>
+                  <a:schemeClr val="tx1"/>
+                </a:solidFill>
+              </a:rPr>
+              <a:t>Pintakasi</a:t>
+            </a:r>
+            <a:endParaRPr lang="en-US" sz="1050" dirty="0"/>
+          </a:p>
+          <a:p>
+            <a:pPr marL="127000" indent="-127000">
+              <a:spcAft>
+                <a:spcPts val="200"/>
+              </a:spcAft>
+              <a:buSzPct val="100000"/>
+              <a:buChar char="•"/>
+            </a:pPr>
+            <a:r>
+              <a:rPr lang="en-US" sz="1050" dirty="0">
+                <a:solidFill>
+                  <a:schemeClr val="tx1"/>
+                </a:solidFill>
+              </a:rPr>
+              <a:t>Suporta Pinansyal</a:t>
+            </a:r>
+            <a:endParaRPr lang="en-US" sz="1050" dirty="0"/>
+          </a:p>
+        </p:txBody>
+      </p:sp>
+      <p:sp>
+        <p:nvSpPr>
+          <p:cNvPr id="36" name="Suggestion box"/>
           <p:cNvSpPr/>
           <p:nvPr/>
         </p:nvSpPr>
         <p:spPr>
           <a:xfrm>
-            <a:off x="6071616" y="2971800"/>
-            <a:ext cx="2624328" cy="1627632"/>
+            <a:off x="5303520" y="3200400"/>
+            <a:ext cx="3200400" cy="1298448"/>
           </a:xfrm>
           <a:prstGeom prst="roundRect">
             <a:avLst>
-              <a:gd name="adj" fmla="val 4494"/>
+              <a:gd name="adj" fmla="val 5634"/>
             </a:avLst>
           </a:prstGeom>
           <a:solidFill>
-            <a:schemeClr val="bg2"/>
+            <a:schemeClr val="bg1"/>
           </a:solidFill>
           <a:ln/>
         </p:spPr>
       </p:sp>
       <p:sp>
         <p:nvSpPr>
-          <p:cNvPr id="30" name="Not confirmed yet circle"/>
-          <p:cNvSpPr/>
-          <p:nvPr/>
-        </p:nvSpPr>
-        <p:spPr>
-          <a:xfrm>
-            <a:off x="6236208" y="3154680"/>
-            <a:ext cx="457200" cy="457200"/>
-          </a:xfrm>
-          <a:prstGeom prst="ellipse">
-            <a:avLst/>
-          </a:prstGeom>
-          <a:solidFill>
-            <a:schemeClr val="accent4"/>
-          </a:solidFill>
-          <a:ln/>
-        </p:spPr>
-      </p:sp>
-      <p:pic>
-        <p:nvPicPr>
-          <p:cNvPr id="31" name="Not confirmed yet icon" descr="Not confirmed yet">    </p:cNvPr>
-          <p:cNvPicPr>
-            <a:picLocks noChangeAspect="1"/>
-          </p:cNvPicPr>
-          <p:nvPr/>
-        </p:nvPicPr>
-        <p:blipFill>
-          <a:blip r:embed="rId6"/>
-          <a:stretch>
-            <a:fillRect/>
-          </a:stretch>
-        </p:blipFill>
-        <p:spPr>
-          <a:xfrm>
-            <a:off x="6345936" y="3264408"/>
-            <a:ext cx="237744" cy="237744"/>
-          </a:xfrm>
-          <a:prstGeom prst="rect">
-            <a:avLst/>
-          </a:prstGeom>
-        </p:spPr>
-      </p:pic>
-      <p:sp>
-        <p:nvSpPr>
-          <p:cNvPr id="32" name="Not confirmed yet heading"/>
-          <p:cNvSpPr txBox="1"/>
-          <p:nvPr/>
-        </p:nvSpPr>
-        <p:spPr>
-          <a:xfrm>
-            <a:off x="6803136" y="3154680"/>
-            <a:ext cx="1755648" cy="457200"/>
-          </a:xfrm>
-          <a:prstGeom prst="rect">
-            <a:avLst/>
-          </a:prstGeom>
-          <a:noFill/>
-          <a:ln/>
-        </p:spPr>
-        <p:txBody>
-          <a:bodyPr wrap="square" lIns="0" tIns="0" rIns="0" bIns="0" rtlCol="0" anchor="ctr"/>
-          <a:lstStyle/>
-          <a:p>
-            <a:pPr indent="0" marL="0">
-              <a:buNone/>
-            </a:pPr>
-            <a:r>
-              <a:rPr lang="en-US" sz="1500" b="1" dirty="0">
+          <p:cNvPr id="37" name="Suggestion text"/>
+          <p:cNvSpPr txBox="1"/>
+          <p:nvPr/>
+        </p:nvSpPr>
+        <p:spPr>
+          <a:xfrm>
+            <a:off x="5468112" y="3337560"/>
+            <a:ext cx="2926080" cy="1051560"/>
+          </a:xfrm>
+          <a:prstGeom prst="rect">
+            <a:avLst/>
+          </a:prstGeom>
+          <a:noFill/>
+          <a:ln/>
+        </p:spPr>
+        <p:txBody>
+          <a:bodyPr wrap="square" lIns="0" tIns="0" rIns="0" bIns="0" rtlCol="0" anchor="t"/>
+          <a:lstStyle/>
+          <a:p>
+            <a:pPr indent="0" marL="0">
+              <a:spcAft>
+                <a:spcPts val="400"/>
+              </a:spcAft>
+              <a:buNone/>
+            </a:pPr>
+            <a:r>
+              <a:rPr lang="en-US" sz="1100" b="1" dirty="0">
                 <a:solidFill>
                   <a:schemeClr val="tx1"/>
                 </a:solidFill>
-                <a:latin typeface="Cambria" pitchFamily="34" charset="0"/>
-                <a:ea typeface="Cambria" pitchFamily="34" charset="-122"/>
-                <a:cs typeface="Cambria" pitchFamily="34" charset="-120"/>
-              </a:rPr>
-              <a:t>Not confirmed yet</a:t>
-            </a:r>
-            <a:endParaRPr lang="en-US" sz="1500" dirty="0"/>
-          </a:p>
-        </p:txBody>
-      </p:sp>
-      <p:sp>
-        <p:nvSpPr>
-          <p:cNvPr id="33" name="Not confirmed yet text"/>
-          <p:cNvSpPr txBox="1"/>
-          <p:nvPr/>
-        </p:nvSpPr>
-        <p:spPr>
-          <a:xfrm>
-            <a:off x="6236208" y="3749040"/>
-            <a:ext cx="2295144" cy="758952"/>
-          </a:xfrm>
-          <a:prstGeom prst="rect">
-            <a:avLst/>
-          </a:prstGeom>
-          <a:noFill/>
-          <a:ln/>
-        </p:spPr>
-        <p:txBody>
-          <a:bodyPr wrap="square" lIns="0" tIns="0" rIns="0" bIns="0" rtlCol="0" anchor="t"/>
-          <a:lstStyle/>
-          <a:p>
-            <a:pPr indent="0" marL="0">
-              <a:buNone/>
-            </a:pPr>
-            <a:r>
-              <a:rPr lang="en-US" sz="1150" dirty="0">
+              </a:rPr>
+              <a:t>The app suggests a status</a:t>
+            </a:r>
+            <a:endParaRPr lang="en-US" sz="1100" dirty="0"/>
+          </a:p>
+          <a:p>
+            <a:pPr indent="0" marL="0">
+              <a:spcAft>
+                <a:spcPts val="400"/>
+              </a:spcAft>
+              <a:buNone/>
+            </a:pPr>
+            <a:r>
+              <a:rPr lang="en-US" sz="1100" dirty="0">
                 <a:solidFill>
                   <a:schemeClr val="tx2"/>
                 </a:solidFill>
               </a:rPr>
-              <a:t>No answer yet. These members are listed for follow-up when the census closes.</a:t>
-            </a:r>
-            <a:endParaRPr lang="en-US" sz="1150" dirty="0"/>
+              <a:t>Mass A, or any two items A or P → </a:t>
+            </a:r>
+            <a:pPr indent="0" marL="0">
+              <a:spcAft>
+                <a:spcPts val="400"/>
+              </a:spcAft>
+              <a:buNone/>
+            </a:pPr>
+            <a:r>
+              <a:rPr lang="en-US" sz="1100" b="1" dirty="0">
+                <a:solidFill>
+                  <a:schemeClr val="accent3"/>
+                </a:solidFill>
+              </a:rPr>
+              <a:t>Active</a:t>
+            </a:r>
+            <a:endParaRPr lang="en-US" sz="1100" dirty="0"/>
+          </a:p>
+          <a:p>
+            <a:pPr indent="0" marL="0">
+              <a:spcAft>
+                <a:spcPts val="400"/>
+              </a:spcAft>
+              <a:buNone/>
+            </a:pPr>
+            <a:r>
+              <a:rPr lang="en-US" sz="1100" dirty="0">
+                <a:solidFill>
+                  <a:schemeClr val="tx2"/>
+                </a:solidFill>
+              </a:rPr>
+              <a:t>All items W → </a:t>
+            </a:r>
+            <a:pPr indent="0" marL="0">
+              <a:spcAft>
+                <a:spcPts val="400"/>
+              </a:spcAft>
+              <a:buNone/>
+            </a:pPr>
+            <a:r>
+              <a:rPr lang="en-US" sz="1100" b="1" dirty="0">
+                <a:solidFill>
+                  <a:schemeClr val="accent5"/>
+                </a:solidFill>
+              </a:rPr>
+              <a:t>Inactive</a:t>
+            </a:r>
+            <a:endParaRPr lang="en-US" sz="1100" dirty="0"/>
+          </a:p>
+          <a:p>
+            <a:pPr indent="0" marL="0">
+              <a:spcAft>
+                <a:spcPts val="400"/>
+              </a:spcAft>
+              <a:buNone/>
+            </a:pPr>
+            <a:r>
+              <a:rPr lang="en-US" sz="1100" i="1" dirty="0">
+                <a:solidFill>
+                  <a:schemeClr val="tx2"/>
+                </a:solidFill>
+              </a:rPr>
+              <a:t>You can always choose the status yourself.</a:t>
+            </a:r>
+            <a:endParaRPr lang="en-US" sz="1100" dirty="0"/>
           </a:p>
         </p:txBody>
       </p:sp>
@@ -14387,7 +15012,7 @@
                 <a:ea typeface="Cambria" pitchFamily="34" charset="-122"/>
                 <a:cs typeface="Cambria" pitchFamily="34" charset="-120"/>
               </a:rPr>
-              <a:t>Reviewing families’ online updates</a:t>
+              <a:t>Choosing each member’s status</a:t>
             </a:r>
             <a:endParaRPr lang="en-US" sz="2600" dirty="0"/>
           </a:p>
@@ -14395,19 +15020,75 @@
       </p:sp>
       <p:sp>
         <p:nvSpPr>
-          <p:cNvPr id="3" name="The family lane label"/>
+          <p:cNvPr id="3" name="Subtitle"/>
+          <p:cNvSpPr txBox="1"/>
+          <p:nvPr/>
+        </p:nvSpPr>
+        <p:spPr>
+          <a:xfrm>
+            <a:off x="457200" y="795528"/>
+            <a:ext cx="8229600" cy="274320"/>
+          </a:xfrm>
+          <a:prstGeom prst="rect">
+            <a:avLst/>
+          </a:prstGeom>
+          <a:noFill/>
+          <a:ln/>
+        </p:spPr>
+        <p:txBody>
+          <a:bodyPr wrap="square" lIns="0" tIns="0" rIns="0" bIns="0" rtlCol="0" anchor="t"/>
+          <a:lstStyle/>
+          <a:p>
+            <a:pPr indent="0" marL="0">
+              <a:buNone/>
+            </a:pPr>
+            <a:r>
+              <a:rPr lang="en-US" sz="1300" dirty="0">
+                <a:solidFill>
+                  <a:schemeClr val="tx2"/>
+                </a:solidFill>
+              </a:rPr>
+              <a:t>One household can have both active and inactive members, so choose the status for each person.</a:t>
+            </a:r>
+            <a:endParaRPr lang="en-US" sz="1300" dirty="0"/>
+          </a:p>
+        </p:txBody>
+      </p:sp>
+      <p:sp>
+        <p:nvSpPr>
+          <p:cNvPr id="4" name="Active card"/>
           <p:cNvSpPr/>
           <p:nvPr/>
         </p:nvSpPr>
         <p:spPr>
           <a:xfrm>
-            <a:off x="457200" y="1051560"/>
-            <a:ext cx="1143000" cy="1161288"/>
+            <a:off x="457200" y="1188720"/>
+            <a:ext cx="2624328" cy="1627632"/>
           </a:xfrm>
           <a:prstGeom prst="roundRect">
             <a:avLst>
-              <a:gd name="adj" fmla="val 6400"/>
+              <a:gd name="adj" fmla="val 4494"/>
             </a:avLst>
+          </a:prstGeom>
+          <a:solidFill>
+            <a:schemeClr val="bg2"/>
+          </a:solidFill>
+          <a:ln/>
+        </p:spPr>
+      </p:sp>
+      <p:sp>
+        <p:nvSpPr>
+          <p:cNvPr id="5" name="Active circle"/>
+          <p:cNvSpPr/>
+          <p:nvPr/>
+        </p:nvSpPr>
+        <p:spPr>
+          <a:xfrm>
+            <a:off x="621792" y="1371600"/>
+            <a:ext cx="457200" cy="457200"/>
+          </a:xfrm>
+          <a:prstGeom prst="ellipse">
+            <a:avLst/>
           </a:prstGeom>
           <a:solidFill>
             <a:schemeClr val="accent3"/>
@@ -14415,29 +15096,9 @@
           <a:ln/>
         </p:spPr>
       </p:sp>
-      <p:sp>
-        <p:nvSpPr>
-          <p:cNvPr id="4" name="The family lane circle"/>
-          <p:cNvSpPr/>
-          <p:nvPr/>
-        </p:nvSpPr>
-        <p:spPr>
-          <a:xfrm>
-            <a:off x="786384" y="1207008"/>
-            <a:ext cx="475488" cy="475488"/>
-          </a:xfrm>
-          <a:prstGeom prst="ellipse">
-            <a:avLst/>
-          </a:prstGeom>
-          <a:solidFill>
-            <a:schemeClr val="bg1"/>
-          </a:solidFill>
-          <a:ln/>
-        </p:spPr>
-      </p:sp>
       <p:pic>
         <p:nvPicPr>
-          <p:cNvPr id="5" name="The family lane icon" descr="The family lane">    </p:cNvPr>
+          <p:cNvPr id="6" name="Active icon" descr="Active">    </p:cNvPr>
           <p:cNvPicPr>
             <a:picLocks noChangeAspect="1"/>
           </p:cNvPicPr>
@@ -14451,8 +15112,8 @@
         </p:blipFill>
         <p:spPr>
           <a:xfrm>
-            <a:off x="900501" y="1321125"/>
-            <a:ext cx="247254" cy="247254"/>
+            <a:off x="731520" y="1481328"/>
+            <a:ext cx="237744" cy="237744"/>
           </a:xfrm>
           <a:prstGeom prst="rect">
             <a:avLst/>
@@ -14461,14 +15122,53 @@
       </p:pic>
       <p:sp>
         <p:nvSpPr>
-          <p:cNvPr id="6" name="The family lane name"/>
-          <p:cNvSpPr txBox="1"/>
-          <p:nvPr/>
-        </p:nvSpPr>
-        <p:spPr>
-          <a:xfrm>
-            <a:off x="457200" y="1764792"/>
-            <a:ext cx="1143000" cy="320040"/>
+          <p:cNvPr id="7" name="Active heading"/>
+          <p:cNvSpPr txBox="1"/>
+          <p:nvPr/>
+        </p:nvSpPr>
+        <p:spPr>
+          <a:xfrm>
+            <a:off x="1188720" y="1371600"/>
+            <a:ext cx="1755648" cy="457200"/>
+          </a:xfrm>
+          <a:prstGeom prst="rect">
+            <a:avLst/>
+          </a:prstGeom>
+          <a:noFill/>
+          <a:ln/>
+        </p:spPr>
+        <p:txBody>
+          <a:bodyPr wrap="square" lIns="0" tIns="0" rIns="0" bIns="0" rtlCol="0" anchor="ctr"/>
+          <a:lstStyle/>
+          <a:p>
+            <a:pPr indent="0" marL="0">
+              <a:buNone/>
+            </a:pPr>
+            <a:r>
+              <a:rPr lang="en-US" sz="1500" b="1" dirty="0">
+                <a:solidFill>
+                  <a:schemeClr val="tx1"/>
+                </a:solidFill>
+                <a:latin typeface="Cambria" pitchFamily="34" charset="0"/>
+                <a:ea typeface="Cambria" pitchFamily="34" charset="-122"/>
+                <a:cs typeface="Cambria" pitchFamily="34" charset="-120"/>
+              </a:rPr>
+              <a:t>Active</a:t>
+            </a:r>
+            <a:endParaRPr lang="en-US" sz="1500" dirty="0"/>
+          </a:p>
+        </p:txBody>
+      </p:sp>
+      <p:sp>
+        <p:nvSpPr>
+          <p:cNvPr id="8" name="Active text"/>
+          <p:cNvSpPr txBox="1"/>
+          <p:nvPr/>
+        </p:nvSpPr>
+        <p:spPr>
+          <a:xfrm>
+            <a:off x="621792" y="1965960"/>
+            <a:ext cx="2295144" cy="758952"/>
           </a:xfrm>
           <a:prstGeom prst="rect">
             <a:avLst/>
@@ -14480,35 +15180,35 @@
           <a:bodyPr wrap="square" lIns="0" tIns="0" rIns="0" bIns="0" rtlCol="0" anchor="t"/>
           <a:lstStyle/>
           <a:p>
-            <a:pPr algn="ctr" indent="0" marL="0">
-              <a:buNone/>
-            </a:pPr>
-            <a:r>
-              <a:rPr lang="en-US" sz="1300" b="1" dirty="0">
-                <a:solidFill>
-                  <a:schemeClr val="bg1"/>
-                </a:solidFill>
-              </a:rPr>
-              <a:t>The family</a:t>
-            </a:r>
-            <a:endParaRPr lang="en-US" sz="1300" dirty="0"/>
-          </a:p>
-        </p:txBody>
-      </p:sp>
-      <p:sp>
-        <p:nvSpPr>
-          <p:cNvPr id="7" name="The family step 1 card"/>
+            <a:pPr indent="0" marL="0">
+              <a:buNone/>
+            </a:pPr>
+            <a:r>
+              <a:rPr lang="en-US" sz="1150" dirty="0">
+                <a:solidFill>
+                  <a:schemeClr val="tx2"/>
+                </a:solidFill>
+              </a:rPr>
+              <a:t>Takes part in parish life: Mass, Bible service, GKK activities.</a:t>
+            </a:r>
+            <a:endParaRPr lang="en-US" sz="1150" dirty="0"/>
+          </a:p>
+        </p:txBody>
+      </p:sp>
+      <p:sp>
+        <p:nvSpPr>
+          <p:cNvPr id="9" name="Inactive card"/>
           <p:cNvSpPr/>
           <p:nvPr/>
         </p:nvSpPr>
         <p:spPr>
           <a:xfrm>
-            <a:off x="1737360" y="1051560"/>
-            <a:ext cx="1600200" cy="1161288"/>
+            <a:off x="3264408" y="1188720"/>
+            <a:ext cx="2624328" cy="1627632"/>
           </a:xfrm>
           <a:prstGeom prst="roundRect">
             <a:avLst>
-              <a:gd name="adj" fmla="val 6299"/>
+              <a:gd name="adj" fmla="val 4494"/>
             </a:avLst>
           </a:prstGeom>
           <a:solidFill>
@@ -14519,79 +15219,27 @@
       </p:sp>
       <p:sp>
         <p:nvSpPr>
-          <p:cNvPr id="8" name="The family step 1 heading"/>
-          <p:cNvSpPr txBox="1"/>
-          <p:nvPr/>
-        </p:nvSpPr>
-        <p:spPr>
-          <a:xfrm>
-            <a:off x="1856232" y="1161288"/>
-            <a:ext cx="1371600" cy="256032"/>
-          </a:xfrm>
-          <a:prstGeom prst="rect">
-            <a:avLst/>
-          </a:prstGeom>
-          <a:noFill/>
-          <a:ln/>
-        </p:spPr>
-        <p:txBody>
-          <a:bodyPr wrap="square" lIns="0" tIns="0" rIns="0" bIns="0" rtlCol="0" anchor="t"/>
-          <a:lstStyle/>
-          <a:p>
-            <a:pPr indent="0" marL="0">
-              <a:buNone/>
-            </a:pPr>
-            <a:r>
-              <a:rPr lang="en-US" sz="1200" b="1" dirty="0">
-                <a:solidFill>
-                  <a:schemeClr val="tx1"/>
-                </a:solidFill>
-              </a:rPr>
-              <a:t>Scan the QR code</a:t>
-            </a:r>
-            <a:endParaRPr lang="en-US" sz="1200" dirty="0"/>
-          </a:p>
-        </p:txBody>
-      </p:sp>
-      <p:sp>
-        <p:nvSpPr>
-          <p:cNvPr id="9" name="The family step 1 text"/>
-          <p:cNvSpPr txBox="1"/>
-          <p:nvPr/>
-        </p:nvSpPr>
-        <p:spPr>
-          <a:xfrm>
-            <a:off x="1856232" y="1444752"/>
-            <a:ext cx="1371600" cy="713232"/>
-          </a:xfrm>
-          <a:prstGeom prst="rect">
-            <a:avLst/>
-          </a:prstGeom>
-          <a:noFill/>
-          <a:ln/>
-        </p:spPr>
-        <p:txBody>
-          <a:bodyPr wrap="square" lIns="0" tIns="0" rIns="0" bIns="0" rtlCol="0" anchor="t"/>
-          <a:lstStyle/>
-          <a:p>
-            <a:pPr indent="0" marL="0">
-              <a:buNone/>
-            </a:pPr>
-            <a:r>
-              <a:rPr lang="en-US" sz="1050" dirty="0">
-                <a:solidFill>
-                  <a:schemeClr val="tx2"/>
-                </a:solidFill>
-              </a:rPr>
-              <a:t>On their form, or open the census link printed on it.</a:t>
-            </a:r>
-            <a:endParaRPr lang="en-US" sz="1050" dirty="0"/>
-          </a:p>
-        </p:txBody>
+          <p:cNvPr id="10" name="Inactive circle"/>
+          <p:cNvSpPr/>
+          <p:nvPr/>
+        </p:nvSpPr>
+        <p:spPr>
+          <a:xfrm>
+            <a:off x="3429000" y="1371600"/>
+            <a:ext cx="457200" cy="457200"/>
+          </a:xfrm>
+          <a:prstGeom prst="ellipse">
+            <a:avLst/>
+          </a:prstGeom>
+          <a:solidFill>
+            <a:schemeClr val="tx2"/>
+          </a:solidFill>
+          <a:ln/>
+        </p:spPr>
       </p:sp>
       <p:pic>
         <p:nvPicPr>
-          <p:cNvPr id="10" name="The family arrow 1" descr="preencoded.png">    </p:cNvPr>
+          <p:cNvPr id="11" name="Inactive icon" descr="Inactive">    </p:cNvPr>
           <p:cNvPicPr>
             <a:picLocks noChangeAspect="1"/>
           </p:cNvPicPr>
@@ -14605,8 +15253,8 @@
         </p:blipFill>
         <p:spPr>
           <a:xfrm>
-            <a:off x="3355848" y="1563624"/>
-            <a:ext cx="146304" cy="146304"/>
+            <a:off x="3538728" y="1481328"/>
+            <a:ext cx="237744" cy="237744"/>
           </a:xfrm>
           <a:prstGeom prst="rect">
             <a:avLst/>
@@ -14615,18 +15263,93 @@
       </p:pic>
       <p:sp>
         <p:nvSpPr>
-          <p:cNvPr id="11" name="The family step 2 card"/>
+          <p:cNvPr id="12" name="Inactive heading"/>
+          <p:cNvSpPr txBox="1"/>
+          <p:nvPr/>
+        </p:nvSpPr>
+        <p:spPr>
+          <a:xfrm>
+            <a:off x="3995928" y="1371600"/>
+            <a:ext cx="1755648" cy="457200"/>
+          </a:xfrm>
+          <a:prstGeom prst="rect">
+            <a:avLst/>
+          </a:prstGeom>
+          <a:noFill/>
+          <a:ln/>
+        </p:spPr>
+        <p:txBody>
+          <a:bodyPr wrap="square" lIns="0" tIns="0" rIns="0" bIns="0" rtlCol="0" anchor="ctr"/>
+          <a:lstStyle/>
+          <a:p>
+            <a:pPr indent="0" marL="0">
+              <a:buNone/>
+            </a:pPr>
+            <a:r>
+              <a:rPr lang="en-US" sz="1500" b="1" dirty="0">
+                <a:solidFill>
+                  <a:schemeClr val="tx1"/>
+                </a:solidFill>
+                <a:latin typeface="Cambria" pitchFamily="34" charset="0"/>
+                <a:ea typeface="Cambria" pitchFamily="34" charset="-122"/>
+                <a:cs typeface="Cambria" pitchFamily="34" charset="-120"/>
+              </a:rPr>
+              <a:t>Inactive</a:t>
+            </a:r>
+            <a:endParaRPr lang="en-US" sz="1500" dirty="0"/>
+          </a:p>
+        </p:txBody>
+      </p:sp>
+      <p:sp>
+        <p:nvSpPr>
+          <p:cNvPr id="13" name="Inactive text"/>
+          <p:cNvSpPr txBox="1"/>
+          <p:nvPr/>
+        </p:nvSpPr>
+        <p:spPr>
+          <a:xfrm>
+            <a:off x="3429000" y="1965960"/>
+            <a:ext cx="2295144" cy="758952"/>
+          </a:xfrm>
+          <a:prstGeom prst="rect">
+            <a:avLst/>
+          </a:prstGeom>
+          <a:noFill/>
+          <a:ln/>
+        </p:spPr>
+        <p:txBody>
+          <a:bodyPr wrap="square" lIns="0" tIns="0" rIns="0" bIns="0" rtlCol="0" anchor="t"/>
+          <a:lstStyle/>
+          <a:p>
+            <a:pPr indent="0" marL="0">
+              <a:buNone/>
+            </a:pPr>
+            <a:r>
+              <a:rPr lang="en-US" sz="1150" dirty="0">
+                <a:solidFill>
+                  <a:schemeClr val="tx2"/>
+                </a:solidFill>
+              </a:rPr>
+              <a:t>Rarely or never takes part. Still a member of the parish.</a:t>
+            </a:r>
+            <a:endParaRPr lang="en-US" sz="1150" dirty="0"/>
+          </a:p>
+        </p:txBody>
+      </p:sp>
+      <p:sp>
+        <p:nvSpPr>
+          <p:cNvPr id="14" name="Moved away card"/>
           <p:cNvSpPr/>
           <p:nvPr/>
         </p:nvSpPr>
         <p:spPr>
           <a:xfrm>
-            <a:off x="3520440" y="1051560"/>
-            <a:ext cx="1600200" cy="1161288"/>
+            <a:off x="6071616" y="1188720"/>
+            <a:ext cx="2624328" cy="1627632"/>
           </a:xfrm>
           <a:prstGeom prst="roundRect">
             <a:avLst>
-              <a:gd name="adj" fmla="val 6299"/>
+              <a:gd name="adj" fmla="val 4494"/>
             </a:avLst>
           </a:prstGeom>
           <a:solidFill>
@@ -14637,79 +15360,27 @@
       </p:sp>
       <p:sp>
         <p:nvSpPr>
-          <p:cNvPr id="12" name="The family step 2 heading"/>
-          <p:cNvSpPr txBox="1"/>
-          <p:nvPr/>
-        </p:nvSpPr>
-        <p:spPr>
-          <a:xfrm>
-            <a:off x="3639312" y="1161288"/>
-            <a:ext cx="1371600" cy="256032"/>
-          </a:xfrm>
-          <a:prstGeom prst="rect">
-            <a:avLst/>
-          </a:prstGeom>
-          <a:noFill/>
-          <a:ln/>
-        </p:spPr>
-        <p:txBody>
-          <a:bodyPr wrap="square" lIns="0" tIns="0" rIns="0" bIns="0" rtlCol="0" anchor="t"/>
-          <a:lstStyle/>
-          <a:p>
-            <a:pPr indent="0" marL="0">
-              <a:buNone/>
-            </a:pPr>
-            <a:r>
-              <a:rPr lang="en-US" sz="1200" b="1" dirty="0">
-                <a:solidFill>
-                  <a:schemeClr val="tx1"/>
-                </a:solidFill>
-              </a:rPr>
-              <a:t>Sign in</a:t>
-            </a:r>
-            <a:endParaRPr lang="en-US" sz="1200" dirty="0"/>
-          </a:p>
-        </p:txBody>
-      </p:sp>
-      <p:sp>
-        <p:nvSpPr>
-          <p:cNvPr id="13" name="The family step 2 text"/>
-          <p:cNvSpPr txBox="1"/>
-          <p:nvPr/>
-        </p:nvSpPr>
-        <p:spPr>
-          <a:xfrm>
-            <a:off x="3639312" y="1444752"/>
-            <a:ext cx="1371600" cy="713232"/>
-          </a:xfrm>
-          <a:prstGeom prst="rect">
-            <a:avLst/>
-          </a:prstGeom>
-          <a:noFill/>
-          <a:ln/>
-        </p:spPr>
-        <p:txBody>
-          <a:bodyPr wrap="square" lIns="0" tIns="0" rIns="0" bIns="0" rtlCol="0" anchor="t"/>
-          <a:lstStyle/>
-          <a:p>
-            <a:pPr indent="0" marL="0">
-              <a:buNone/>
-            </a:pPr>
-            <a:r>
-              <a:rPr lang="en-US" sz="1050" dirty="0">
-                <a:solidFill>
-                  <a:schemeClr val="tx2"/>
-                </a:solidFill>
-              </a:rPr>
-              <a:t>With the household’s reference number and its code from the form.</a:t>
-            </a:r>
-            <a:endParaRPr lang="en-US" sz="1050" dirty="0"/>
-          </a:p>
-        </p:txBody>
+          <p:cNvPr id="15" name="Moved away circle"/>
+          <p:cNvSpPr/>
+          <p:nvPr/>
+        </p:nvSpPr>
+        <p:spPr>
+          <a:xfrm>
+            <a:off x="6236208" y="1371600"/>
+            <a:ext cx="457200" cy="457200"/>
+          </a:xfrm>
+          <a:prstGeom prst="ellipse">
+            <a:avLst/>
+          </a:prstGeom>
+          <a:solidFill>
+            <a:schemeClr val="accent1"/>
+          </a:solidFill>
+          <a:ln/>
+        </p:spPr>
       </p:sp>
       <p:pic>
         <p:nvPicPr>
-          <p:cNvPr id="14" name="The family arrow 2" descr="preencoded.png">    </p:cNvPr>
+          <p:cNvPr id="16" name="Moved away icon" descr="Moved away">    </p:cNvPr>
           <p:cNvPicPr>
             <a:picLocks noChangeAspect="1"/>
           </p:cNvPicPr>
@@ -14723,8 +15394,8 @@
         </p:blipFill>
         <p:spPr>
           <a:xfrm>
-            <a:off x="5138928" y="1563624"/>
-            <a:ext cx="146304" cy="146304"/>
+            <a:off x="6345936" y="1481328"/>
+            <a:ext cx="237744" cy="237744"/>
           </a:xfrm>
           <a:prstGeom prst="rect">
             <a:avLst/>
@@ -14733,18 +15404,93 @@
       </p:pic>
       <p:sp>
         <p:nvSpPr>
-          <p:cNvPr id="15" name="The family step 3 card"/>
+          <p:cNvPr id="17" name="Moved away heading"/>
+          <p:cNvSpPr txBox="1"/>
+          <p:nvPr/>
+        </p:nvSpPr>
+        <p:spPr>
+          <a:xfrm>
+            <a:off x="6803136" y="1371600"/>
+            <a:ext cx="1755648" cy="457200"/>
+          </a:xfrm>
+          <a:prstGeom prst="rect">
+            <a:avLst/>
+          </a:prstGeom>
+          <a:noFill/>
+          <a:ln/>
+        </p:spPr>
+        <p:txBody>
+          <a:bodyPr wrap="square" lIns="0" tIns="0" rIns="0" bIns="0" rtlCol="0" anchor="ctr"/>
+          <a:lstStyle/>
+          <a:p>
+            <a:pPr indent="0" marL="0">
+              <a:buNone/>
+            </a:pPr>
+            <a:r>
+              <a:rPr lang="en-US" sz="1500" b="1" dirty="0">
+                <a:solidFill>
+                  <a:schemeClr val="tx1"/>
+                </a:solidFill>
+                <a:latin typeface="Cambria" pitchFamily="34" charset="0"/>
+                <a:ea typeface="Cambria" pitchFamily="34" charset="-122"/>
+                <a:cs typeface="Cambria" pitchFamily="34" charset="-120"/>
+              </a:rPr>
+              <a:t>Moved away</a:t>
+            </a:r>
+            <a:endParaRPr lang="en-US" sz="1500" dirty="0"/>
+          </a:p>
+        </p:txBody>
+      </p:sp>
+      <p:sp>
+        <p:nvSpPr>
+          <p:cNvPr id="18" name="Moved away text"/>
+          <p:cNvSpPr txBox="1"/>
+          <p:nvPr/>
+        </p:nvSpPr>
+        <p:spPr>
+          <a:xfrm>
+            <a:off x="6236208" y="1965960"/>
+            <a:ext cx="2295144" cy="758952"/>
+          </a:xfrm>
+          <a:prstGeom prst="rect">
+            <a:avLst/>
+          </a:prstGeom>
+          <a:noFill/>
+          <a:ln/>
+        </p:spPr>
+        <p:txBody>
+          <a:bodyPr wrap="square" lIns="0" tIns="0" rIns="0" bIns="0" rtlCol="0" anchor="t"/>
+          <a:lstStyle/>
+          <a:p>
+            <a:pPr indent="0" marL="0">
+              <a:buNone/>
+            </a:pPr>
+            <a:r>
+              <a:rPr lang="en-US" sz="1150" dirty="0">
+                <a:solidFill>
+                  <a:schemeClr val="tx2"/>
+                </a:solidFill>
+              </a:rPr>
+              <a:t>Now lives outside the parish. Write where in Notes. They leave the lists and next census.</a:t>
+            </a:r>
+            <a:endParaRPr lang="en-US" sz="1150" dirty="0"/>
+          </a:p>
+        </p:txBody>
+      </p:sp>
+      <p:sp>
+        <p:nvSpPr>
+          <p:cNvPr id="19" name="Deceased card"/>
           <p:cNvSpPr/>
           <p:nvPr/>
         </p:nvSpPr>
         <p:spPr>
           <a:xfrm>
-            <a:off x="5303520" y="1051560"/>
-            <a:ext cx="1600200" cy="1161288"/>
+            <a:off x="457200" y="2971800"/>
+            <a:ext cx="2624328" cy="1627632"/>
           </a:xfrm>
           <a:prstGeom prst="roundRect">
             <a:avLst>
-              <a:gd name="adj" fmla="val 6299"/>
+              <a:gd name="adj" fmla="val 4494"/>
             </a:avLst>
           </a:prstGeom>
           <a:solidFill>
@@ -14755,79 +15501,27 @@
       </p:sp>
       <p:sp>
         <p:nvSpPr>
-          <p:cNvPr id="16" name="The family step 3 heading"/>
-          <p:cNvSpPr txBox="1"/>
-          <p:nvPr/>
-        </p:nvSpPr>
-        <p:spPr>
-          <a:xfrm>
-            <a:off x="5422392" y="1161288"/>
-            <a:ext cx="1371600" cy="256032"/>
-          </a:xfrm>
-          <a:prstGeom prst="rect">
-            <a:avLst/>
-          </a:prstGeom>
-          <a:noFill/>
-          <a:ln/>
-        </p:spPr>
-        <p:txBody>
-          <a:bodyPr wrap="square" lIns="0" tIns="0" rIns="0" bIns="0" rtlCol="0" anchor="t"/>
-          <a:lstStyle/>
-          <a:p>
-            <a:pPr indent="0" marL="0">
-              <a:buNone/>
-            </a:pPr>
-            <a:r>
-              <a:rPr lang="en-US" sz="1200" b="1" dirty="0">
-                <a:solidFill>
-                  <a:schemeClr val="tx1"/>
-                </a:solidFill>
-              </a:rPr>
-              <a:t>Update the record</a:t>
-            </a:r>
-            <a:endParaRPr lang="en-US" sz="1200" dirty="0"/>
-          </a:p>
-        </p:txBody>
-      </p:sp>
-      <p:sp>
-        <p:nvSpPr>
-          <p:cNvPr id="17" name="The family step 3 text"/>
-          <p:cNvSpPr txBox="1"/>
-          <p:nvPr/>
-        </p:nvSpPr>
-        <p:spPr>
-          <a:xfrm>
-            <a:off x="5422392" y="1444752"/>
-            <a:ext cx="1371600" cy="713232"/>
-          </a:xfrm>
-          <a:prstGeom prst="rect">
-            <a:avLst/>
-          </a:prstGeom>
-          <a:noFill/>
-          <a:ln/>
-        </p:spPr>
-        <p:txBody>
-          <a:bodyPr wrap="square" lIns="0" tIns="0" rIns="0" bIns="0" rtlCol="0" anchor="t"/>
-          <a:lstStyle/>
-          <a:p>
-            <a:pPr indent="0" marL="0">
-              <a:buNone/>
-            </a:pPr>
-            <a:r>
-              <a:rPr lang="en-US" sz="1050" dirty="0">
-                <a:solidFill>
-                  <a:schemeClr val="tx2"/>
-                </a:solidFill>
-              </a:rPr>
-              <a:t>Answers, contact details and any newborns.</a:t>
-            </a:r>
-            <a:endParaRPr lang="en-US" sz="1050" dirty="0"/>
-          </a:p>
-        </p:txBody>
+          <p:cNvPr id="20" name="Deceased circle"/>
+          <p:cNvSpPr/>
+          <p:nvPr/>
+        </p:nvSpPr>
+        <p:spPr>
+          <a:xfrm>
+            <a:off x="621792" y="3154680"/>
+            <a:ext cx="457200" cy="457200"/>
+          </a:xfrm>
+          <a:prstGeom prst="ellipse">
+            <a:avLst/>
+          </a:prstGeom>
+          <a:solidFill>
+            <a:schemeClr val="tx1"/>
+          </a:solidFill>
+          <a:ln/>
+        </p:spPr>
       </p:sp>
       <p:pic>
         <p:nvPicPr>
-          <p:cNvPr id="18" name="The family arrow 3" descr="preencoded.png">    </p:cNvPr>
+          <p:cNvPr id="21" name="Deceased icon" descr="Deceased">    </p:cNvPr>
           <p:cNvPicPr>
             <a:picLocks noChangeAspect="1"/>
           </p:cNvPicPr>
@@ -14841,8 +15535,8 @@
         </p:blipFill>
         <p:spPr>
           <a:xfrm>
-            <a:off x="6922008" y="1563624"/>
-            <a:ext cx="146304" cy="146304"/>
+            <a:off x="731520" y="3264408"/>
+            <a:ext cx="237744" cy="237744"/>
           </a:xfrm>
           <a:prstGeom prst="rect">
             <a:avLst/>
@@ -14851,18 +15545,93 @@
       </p:pic>
       <p:sp>
         <p:nvSpPr>
-          <p:cNvPr id="19" name="The family step 4 card"/>
+          <p:cNvPr id="22" name="Deceased heading"/>
+          <p:cNvSpPr txBox="1"/>
+          <p:nvPr/>
+        </p:nvSpPr>
+        <p:spPr>
+          <a:xfrm>
+            <a:off x="1188720" y="3154680"/>
+            <a:ext cx="1755648" cy="457200"/>
+          </a:xfrm>
+          <a:prstGeom prst="rect">
+            <a:avLst/>
+          </a:prstGeom>
+          <a:noFill/>
+          <a:ln/>
+        </p:spPr>
+        <p:txBody>
+          <a:bodyPr wrap="square" lIns="0" tIns="0" rIns="0" bIns="0" rtlCol="0" anchor="ctr"/>
+          <a:lstStyle/>
+          <a:p>
+            <a:pPr indent="0" marL="0">
+              <a:buNone/>
+            </a:pPr>
+            <a:r>
+              <a:rPr lang="en-US" sz="1500" b="1" dirty="0">
+                <a:solidFill>
+                  <a:schemeClr val="tx1"/>
+                </a:solidFill>
+                <a:latin typeface="Cambria" pitchFamily="34" charset="0"/>
+                <a:ea typeface="Cambria" pitchFamily="34" charset="-122"/>
+                <a:cs typeface="Cambria" pitchFamily="34" charset="-120"/>
+              </a:rPr>
+              <a:t>Deceased</a:t>
+            </a:r>
+            <a:endParaRPr lang="en-US" sz="1500" dirty="0"/>
+          </a:p>
+        </p:txBody>
+      </p:sp>
+      <p:sp>
+        <p:nvSpPr>
+          <p:cNvPr id="23" name="Deceased text"/>
+          <p:cNvSpPr txBox="1"/>
+          <p:nvPr/>
+        </p:nvSpPr>
+        <p:spPr>
+          <a:xfrm>
+            <a:off x="621792" y="3749040"/>
+            <a:ext cx="2295144" cy="758952"/>
+          </a:xfrm>
+          <a:prstGeom prst="rect">
+            <a:avLst/>
+          </a:prstGeom>
+          <a:noFill/>
+          <a:ln/>
+        </p:spPr>
+        <p:txBody>
+          <a:bodyPr wrap="square" lIns="0" tIns="0" rIns="0" bIns="0" rtlCol="0" anchor="t"/>
+          <a:lstStyle/>
+          <a:p>
+            <a:pPr indent="0" marL="0">
+              <a:buNone/>
+            </a:pPr>
+            <a:r>
+              <a:rPr lang="en-US" sz="1150" dirty="0">
+                <a:solidFill>
+                  <a:schemeClr val="tx2"/>
+                </a:solidFill>
+              </a:rPr>
+              <a:t>Write the date in Notes. The record is kept, but they leave the counts.</a:t>
+            </a:r>
+            <a:endParaRPr lang="en-US" sz="1150" dirty="0"/>
+          </a:p>
+        </p:txBody>
+      </p:sp>
+      <p:sp>
+        <p:nvSpPr>
+          <p:cNvPr id="24" name="Left the Church card"/>
           <p:cNvSpPr/>
           <p:nvPr/>
         </p:nvSpPr>
         <p:spPr>
           <a:xfrm>
-            <a:off x="7086600" y="1051560"/>
-            <a:ext cx="1600200" cy="1161288"/>
+            <a:off x="3264408" y="2971800"/>
+            <a:ext cx="2624328" cy="1627632"/>
           </a:xfrm>
           <a:prstGeom prst="roundRect">
             <a:avLst>
-              <a:gd name="adj" fmla="val 6299"/>
+              <a:gd name="adj" fmla="val 4494"/>
             </a:avLst>
           </a:prstGeom>
           <a:solidFill>
@@ -14873,121 +15642,27 @@
       </p:sp>
       <p:sp>
         <p:nvSpPr>
-          <p:cNvPr id="20" name="The family step 4 heading"/>
-          <p:cNvSpPr txBox="1"/>
-          <p:nvPr/>
-        </p:nvSpPr>
-        <p:spPr>
-          <a:xfrm>
-            <a:off x="7205472" y="1161288"/>
-            <a:ext cx="1371600" cy="256032"/>
-          </a:xfrm>
-          <a:prstGeom prst="rect">
-            <a:avLst/>
-          </a:prstGeom>
-          <a:noFill/>
-          <a:ln/>
-        </p:spPr>
-        <p:txBody>
-          <a:bodyPr wrap="square" lIns="0" tIns="0" rIns="0" bIns="0" rtlCol="0" anchor="t"/>
-          <a:lstStyle/>
-          <a:p>
-            <a:pPr indent="0" marL="0">
-              <a:buNone/>
-            </a:pPr>
-            <a:r>
-              <a:rPr lang="en-US" sz="1200" b="1" dirty="0">
-                <a:solidFill>
-                  <a:schemeClr val="tx1"/>
-                </a:solidFill>
-              </a:rPr>
-              <a:t>Send</a:t>
-            </a:r>
-            <a:endParaRPr lang="en-US" sz="1200" dirty="0"/>
-          </a:p>
-        </p:txBody>
-      </p:sp>
-      <p:sp>
-        <p:nvSpPr>
-          <p:cNvPr id="21" name="The family step 4 text"/>
-          <p:cNvSpPr txBox="1"/>
-          <p:nvPr/>
-        </p:nvSpPr>
-        <p:spPr>
-          <a:xfrm>
-            <a:off x="7205472" y="1444752"/>
-            <a:ext cx="1371600" cy="713232"/>
-          </a:xfrm>
-          <a:prstGeom prst="rect">
-            <a:avLst/>
-          </a:prstGeom>
-          <a:noFill/>
-          <a:ln/>
-        </p:spPr>
-        <p:txBody>
-          <a:bodyPr wrap="square" lIns="0" tIns="0" rIns="0" bIns="0" rtlCol="0" anchor="t"/>
-          <a:lstStyle/>
-          <a:p>
-            <a:pPr indent="0" marL="0">
-              <a:buNone/>
-            </a:pPr>
-            <a:r>
-              <a:rPr lang="en-US" sz="1050" dirty="0">
-                <a:solidFill>
-                  <a:schemeClr val="tx2"/>
-                </a:solidFill>
-              </a:rPr>
-              <a:t>Tick the privacy consent, then “Ipadala sa parokya”.</a:t>
-            </a:r>
-            <a:endParaRPr lang="en-US" sz="1050" dirty="0"/>
-          </a:p>
-        </p:txBody>
-      </p:sp>
-      <p:sp>
-        <p:nvSpPr>
-          <p:cNvPr id="22" name="You lane label"/>
+          <p:cNvPr id="25" name="Left the Church circle"/>
           <p:cNvSpPr/>
           <p:nvPr/>
         </p:nvSpPr>
         <p:spPr>
           <a:xfrm>
-            <a:off x="457200" y="2350008"/>
-            <a:ext cx="1143000" cy="1161288"/>
-          </a:xfrm>
-          <a:prstGeom prst="roundRect">
-            <a:avLst>
-              <a:gd name="adj" fmla="val 6400"/>
-            </a:avLst>
+            <a:off x="3429000" y="3154680"/>
+            <a:ext cx="457200" cy="457200"/>
+          </a:xfrm>
+          <a:prstGeom prst="ellipse">
+            <a:avLst/>
           </a:prstGeom>
           <a:solidFill>
-            <a:schemeClr val="accent2"/>
-          </a:solidFill>
-          <a:ln/>
-        </p:spPr>
-      </p:sp>
-      <p:sp>
-        <p:nvSpPr>
-          <p:cNvPr id="23" name="You lane circle"/>
-          <p:cNvSpPr/>
-          <p:nvPr/>
-        </p:nvSpPr>
-        <p:spPr>
-          <a:xfrm>
-            <a:off x="786384" y="2505456"/>
-            <a:ext cx="475488" cy="475488"/>
-          </a:xfrm>
-          <a:prstGeom prst="ellipse">
-            <a:avLst/>
-          </a:prstGeom>
-          <a:solidFill>
-            <a:schemeClr val="bg1"/>
+            <a:schemeClr val="accent5"/>
           </a:solidFill>
           <a:ln/>
         </p:spPr>
       </p:sp>
       <p:pic>
         <p:nvPicPr>
-          <p:cNvPr id="24" name="You lane icon" descr="You lane">    </p:cNvPr>
+          <p:cNvPr id="26" name="Left the Church icon" descr="Left the Church">    </p:cNvPr>
           <p:cNvPicPr>
             <a:picLocks noChangeAspect="1"/>
           </p:cNvPicPr>
@@ -15001,8 +15676,8 @@
         </p:blipFill>
         <p:spPr>
           <a:xfrm>
-            <a:off x="900501" y="2619573"/>
-            <a:ext cx="247254" cy="247254"/>
+            <a:off x="3538728" y="3264408"/>
+            <a:ext cx="237744" cy="237744"/>
           </a:xfrm>
           <a:prstGeom prst="rect">
             <a:avLst/>
@@ -15011,14 +15686,53 @@
       </p:pic>
       <p:sp>
         <p:nvSpPr>
-          <p:cNvPr id="25" name="You lane name"/>
-          <p:cNvSpPr txBox="1"/>
-          <p:nvPr/>
-        </p:nvSpPr>
-        <p:spPr>
-          <a:xfrm>
-            <a:off x="457200" y="3063240"/>
-            <a:ext cx="1143000" cy="320040"/>
+          <p:cNvPr id="27" name="Left the Church heading"/>
+          <p:cNvSpPr txBox="1"/>
+          <p:nvPr/>
+        </p:nvSpPr>
+        <p:spPr>
+          <a:xfrm>
+            <a:off x="3995928" y="3154680"/>
+            <a:ext cx="1755648" cy="457200"/>
+          </a:xfrm>
+          <a:prstGeom prst="rect">
+            <a:avLst/>
+          </a:prstGeom>
+          <a:noFill/>
+          <a:ln/>
+        </p:spPr>
+        <p:txBody>
+          <a:bodyPr wrap="square" lIns="0" tIns="0" rIns="0" bIns="0" rtlCol="0" anchor="ctr"/>
+          <a:lstStyle/>
+          <a:p>
+            <a:pPr indent="0" marL="0">
+              <a:buNone/>
+            </a:pPr>
+            <a:r>
+              <a:rPr lang="en-US" sz="1500" b="1" dirty="0">
+                <a:solidFill>
+                  <a:schemeClr val="tx1"/>
+                </a:solidFill>
+                <a:latin typeface="Cambria" pitchFamily="34" charset="0"/>
+                <a:ea typeface="Cambria" pitchFamily="34" charset="-122"/>
+                <a:cs typeface="Cambria" pitchFamily="34" charset="-120"/>
+              </a:rPr>
+              <a:t>Left the Church</a:t>
+            </a:r>
+            <a:endParaRPr lang="en-US" sz="1500" dirty="0"/>
+          </a:p>
+        </p:txBody>
+      </p:sp>
+      <p:sp>
+        <p:nvSpPr>
+          <p:cNvPr id="28" name="Left the Church text"/>
+          <p:cNvSpPr txBox="1"/>
+          <p:nvPr/>
+        </p:nvSpPr>
+        <p:spPr>
+          <a:xfrm>
+            <a:off x="3429000" y="3749040"/>
+            <a:ext cx="2295144" cy="758952"/>
           </a:xfrm>
           <a:prstGeom prst="rect">
             <a:avLst/>
@@ -15030,35 +15744,35 @@
           <a:bodyPr wrap="square" lIns="0" tIns="0" rIns="0" bIns="0" rtlCol="0" anchor="t"/>
           <a:lstStyle/>
           <a:p>
-            <a:pPr algn="ctr" indent="0" marL="0">
-              <a:buNone/>
-            </a:pPr>
-            <a:r>
-              <a:rPr lang="en-US" sz="1300" b="1" dirty="0">
-                <a:solidFill>
-                  <a:schemeClr val="bg1"/>
-                </a:solidFill>
-              </a:rPr>
-              <a:t>You</a:t>
-            </a:r>
-            <a:endParaRPr lang="en-US" sz="1300" dirty="0"/>
-          </a:p>
-        </p:txBody>
-      </p:sp>
-      <p:sp>
-        <p:nvSpPr>
-          <p:cNvPr id="26" name="You step 1 card"/>
+            <a:pPr indent="0" marL="0">
+              <a:buNone/>
+            </a:pPr>
+            <a:r>
+              <a:rPr lang="en-US" sz="1150" dirty="0">
+                <a:solidFill>
+                  <a:schemeClr val="tx2"/>
+                </a:solidFill>
+              </a:rPr>
+              <a:t>Has joined another faith. Choose this only when the family says so.</a:t>
+            </a:r>
+            <a:endParaRPr lang="en-US" sz="1150" dirty="0"/>
+          </a:p>
+        </p:txBody>
+      </p:sp>
+      <p:sp>
+        <p:nvSpPr>
+          <p:cNvPr id="29" name="Not confirmed yet card"/>
           <p:cNvSpPr/>
           <p:nvPr/>
         </p:nvSpPr>
         <p:spPr>
           <a:xfrm>
-            <a:off x="1737360" y="2350008"/>
-            <a:ext cx="1600200" cy="1161288"/>
+            <a:off x="6071616" y="2971800"/>
+            <a:ext cx="2624328" cy="1627632"/>
           </a:xfrm>
           <a:prstGeom prst="roundRect">
             <a:avLst>
-              <a:gd name="adj" fmla="val 6299"/>
+              <a:gd name="adj" fmla="val 4494"/>
             </a:avLst>
           </a:prstGeom>
           <a:solidFill>
@@ -15069,79 +15783,27 @@
       </p:sp>
       <p:sp>
         <p:nvSpPr>
-          <p:cNvPr id="27" name="You step 1 heading"/>
-          <p:cNvSpPr txBox="1"/>
-          <p:nvPr/>
-        </p:nvSpPr>
-        <p:spPr>
-          <a:xfrm>
-            <a:off x="1856232" y="2459736"/>
-            <a:ext cx="1371600" cy="256032"/>
-          </a:xfrm>
-          <a:prstGeom prst="rect">
-            <a:avLst/>
-          </a:prstGeom>
-          <a:noFill/>
-          <a:ln/>
-        </p:spPr>
-        <p:txBody>
-          <a:bodyPr wrap="square" lIns="0" tIns="0" rIns="0" bIns="0" rtlCol="0" anchor="t"/>
-          <a:lstStyle/>
-          <a:p>
-            <a:pPr indent="0" marL="0">
-              <a:buNone/>
-            </a:pPr>
-            <a:r>
-              <a:rPr lang="en-US" sz="1200" b="1" dirty="0">
-                <a:solidFill>
-                  <a:schemeClr val="tx1"/>
-                </a:solidFill>
-              </a:rPr>
-              <a:t>See the update</a:t>
-            </a:r>
-            <a:endParaRPr lang="en-US" sz="1200" dirty="0"/>
-          </a:p>
-        </p:txBody>
-      </p:sp>
-      <p:sp>
-        <p:nvSpPr>
-          <p:cNvPr id="28" name="You step 1 text"/>
-          <p:cNvSpPr txBox="1"/>
-          <p:nvPr/>
-        </p:nvSpPr>
-        <p:spPr>
-          <a:xfrm>
-            <a:off x="1856232" y="2743200"/>
-            <a:ext cx="1371600" cy="713232"/>
-          </a:xfrm>
-          <a:prstGeom prst="rect">
-            <a:avLst/>
-          </a:prstGeom>
-          <a:noFill/>
-          <a:ln/>
-        </p:spPr>
-        <p:txBody>
-          <a:bodyPr wrap="square" lIns="0" tIns="0" rIns="0" bIns="0" rtlCol="0" anchor="t"/>
-          <a:lstStyle/>
-          <a:p>
-            <a:pPr indent="0" marL="0">
-              <a:buNone/>
-            </a:pPr>
-            <a:r>
-              <a:rPr lang="en-US" sz="1050" dirty="0">
-                <a:solidFill>
-                  <a:schemeClr val="tx2"/>
-                </a:solidFill>
-              </a:rPr>
-              <a:t>Under Census → Online updates, or in a notification.</a:t>
-            </a:r>
-            <a:endParaRPr lang="en-US" sz="1050" dirty="0"/>
-          </a:p>
-        </p:txBody>
+          <p:cNvPr id="30" name="Not confirmed yet circle"/>
+          <p:cNvSpPr/>
+          <p:nvPr/>
+        </p:nvSpPr>
+        <p:spPr>
+          <a:xfrm>
+            <a:off x="6236208" y="3154680"/>
+            <a:ext cx="457200" cy="457200"/>
+          </a:xfrm>
+          <a:prstGeom prst="ellipse">
+            <a:avLst/>
+          </a:prstGeom>
+          <a:solidFill>
+            <a:schemeClr val="accent4"/>
+          </a:solidFill>
+          <a:ln/>
+        </p:spPr>
       </p:sp>
       <p:pic>
         <p:nvPicPr>
-          <p:cNvPr id="29" name="You arrow 1" descr="preencoded.png">    </p:cNvPr>
+          <p:cNvPr id="31" name="Not confirmed yet icon" descr="Not confirmed yet">    </p:cNvPr>
           <p:cNvPicPr>
             <a:picLocks noChangeAspect="1"/>
           </p:cNvPicPr>
@@ -15155,8 +15817,8 @@
         </p:blipFill>
         <p:spPr>
           <a:xfrm>
-            <a:off x="3355848" y="2862072"/>
-            <a:ext cx="146304" cy="146304"/>
+            <a:off x="6345936" y="3264408"/>
+            <a:ext cx="237744" cy="237744"/>
           </a:xfrm>
           <a:prstGeom prst="rect">
             <a:avLst/>
@@ -15165,36 +15827,53 @@
       </p:pic>
       <p:sp>
         <p:nvSpPr>
-          <p:cNvPr id="30" name="You step 2 card"/>
-          <p:cNvSpPr/>
-          <p:nvPr/>
-        </p:nvSpPr>
-        <p:spPr>
-          <a:xfrm>
-            <a:off x="3520440" y="2350008"/>
-            <a:ext cx="1600200" cy="1161288"/>
-          </a:xfrm>
-          <a:prstGeom prst="roundRect">
-            <a:avLst>
-              <a:gd name="adj" fmla="val 6299"/>
-            </a:avLst>
-          </a:prstGeom>
-          <a:solidFill>
-            <a:schemeClr val="bg2"/>
-          </a:solidFill>
-          <a:ln/>
-        </p:spPr>
-      </p:sp>
-      <p:sp>
-        <p:nvSpPr>
-          <p:cNvPr id="31" name="You step 2 heading"/>
-          <p:cNvSpPr txBox="1"/>
-          <p:nvPr/>
-        </p:nvSpPr>
-        <p:spPr>
-          <a:xfrm>
-            <a:off x="3639312" y="2459736"/>
-            <a:ext cx="1371600" cy="256032"/>
+          <p:cNvPr id="32" name="Not confirmed yet heading"/>
+          <p:cNvSpPr txBox="1"/>
+          <p:nvPr/>
+        </p:nvSpPr>
+        <p:spPr>
+          <a:xfrm>
+            <a:off x="6803136" y="3154680"/>
+            <a:ext cx="1755648" cy="457200"/>
+          </a:xfrm>
+          <a:prstGeom prst="rect">
+            <a:avLst/>
+          </a:prstGeom>
+          <a:noFill/>
+          <a:ln/>
+        </p:spPr>
+        <p:txBody>
+          <a:bodyPr wrap="square" lIns="0" tIns="0" rIns="0" bIns="0" rtlCol="0" anchor="ctr"/>
+          <a:lstStyle/>
+          <a:p>
+            <a:pPr indent="0" marL="0">
+              <a:buNone/>
+            </a:pPr>
+            <a:r>
+              <a:rPr lang="en-US" sz="1500" b="1" dirty="0">
+                <a:solidFill>
+                  <a:schemeClr val="tx1"/>
+                </a:solidFill>
+                <a:latin typeface="Cambria" pitchFamily="34" charset="0"/>
+                <a:ea typeface="Cambria" pitchFamily="34" charset="-122"/>
+                <a:cs typeface="Cambria" pitchFamily="34" charset="-120"/>
+              </a:rPr>
+              <a:t>Not confirmed yet</a:t>
+            </a:r>
+            <a:endParaRPr lang="en-US" sz="1500" dirty="0"/>
+          </a:p>
+        </p:txBody>
+      </p:sp>
+      <p:sp>
+        <p:nvSpPr>
+          <p:cNvPr id="33" name="Not confirmed yet text"/>
+          <p:cNvSpPr txBox="1"/>
+          <p:nvPr/>
+        </p:nvSpPr>
+        <p:spPr>
+          <a:xfrm>
+            <a:off x="6236208" y="3749040"/>
+            <a:ext cx="2295144" cy="758952"/>
           </a:xfrm>
           <a:prstGeom prst="rect">
             <a:avLst/>
@@ -15210,559 +15889,14 @@
               <a:buNone/>
             </a:pPr>
             <a:r>
-              <a:rPr lang="en-US" sz="1200" b="1" dirty="0">
-                <a:solidFill>
-                  <a:schemeClr val="tx1"/>
-                </a:solidFill>
-              </a:rPr>
-              <a:t>Review</a:t>
-            </a:r>
-            <a:endParaRPr lang="en-US" sz="1200" dirty="0"/>
-          </a:p>
-        </p:txBody>
-      </p:sp>
-      <p:sp>
-        <p:nvSpPr>
-          <p:cNvPr id="32" name="You step 2 text"/>
-          <p:cNvSpPr txBox="1"/>
-          <p:nvPr/>
-        </p:nvSpPr>
-        <p:spPr>
-          <a:xfrm>
-            <a:off x="3639312" y="2743200"/>
-            <a:ext cx="1371600" cy="713232"/>
-          </a:xfrm>
-          <a:prstGeom prst="rect">
-            <a:avLst/>
-          </a:prstGeom>
-          <a:noFill/>
-          <a:ln/>
-        </p:spPr>
-        <p:txBody>
-          <a:bodyPr wrap="square" lIns="0" tIns="0" rIns="0" bIns="0" rtlCol="0" anchor="t"/>
-          <a:lstStyle/>
-          <a:p>
-            <a:pPr indent="0" marL="0">
-              <a:buNone/>
-            </a:pPr>
-            <a:r>
-              <a:rPr lang="en-US" sz="1050" dirty="0">
+              <a:rPr lang="en-US" sz="1150" dirty="0">
                 <a:solidFill>
                   <a:schemeClr val="tx2"/>
                 </a:solidFill>
               </a:rPr>
-              <a:t>Changes show the old value crossed out and the new one in bold.</a:t>
-            </a:r>
-            <a:endParaRPr lang="en-US" sz="1050" dirty="0"/>
-          </a:p>
-        </p:txBody>
-      </p:sp>
-      <p:pic>
-        <p:nvPicPr>
-          <p:cNvPr id="33" name="You arrow 2" descr="preencoded.png">    </p:cNvPr>
-          <p:cNvPicPr>
-            <a:picLocks noChangeAspect="1"/>
-          </p:cNvPicPr>
-          <p:nvPr/>
-        </p:nvPicPr>
-        <p:blipFill>
-          <a:blip r:embed="rId7"/>
-          <a:stretch>
-            <a:fillRect/>
-          </a:stretch>
-        </p:blipFill>
-        <p:spPr>
-          <a:xfrm>
-            <a:off x="5138928" y="2862072"/>
-            <a:ext cx="146304" cy="146304"/>
-          </a:xfrm>
-          <a:prstGeom prst="rect">
-            <a:avLst/>
-          </a:prstGeom>
-        </p:spPr>
-      </p:pic>
-      <p:sp>
-        <p:nvSpPr>
-          <p:cNvPr id="34" name="You step 3 card"/>
-          <p:cNvSpPr/>
-          <p:nvPr/>
-        </p:nvSpPr>
-        <p:spPr>
-          <a:xfrm>
-            <a:off x="5303520" y="2350008"/>
-            <a:ext cx="1600200" cy="1161288"/>
-          </a:xfrm>
-          <a:prstGeom prst="roundRect">
-            <a:avLst>
-              <a:gd name="adj" fmla="val 6299"/>
-            </a:avLst>
-          </a:prstGeom>
-          <a:solidFill>
-            <a:schemeClr val="bg2"/>
-          </a:solidFill>
-          <a:ln/>
-        </p:spPr>
-      </p:sp>
-      <p:sp>
-        <p:nvSpPr>
-          <p:cNvPr id="35" name="You step 3 heading"/>
-          <p:cNvSpPr txBox="1"/>
-          <p:nvPr/>
-        </p:nvSpPr>
-        <p:spPr>
-          <a:xfrm>
-            <a:off x="5422392" y="2459736"/>
-            <a:ext cx="1371600" cy="256032"/>
-          </a:xfrm>
-          <a:prstGeom prst="rect">
-            <a:avLst/>
-          </a:prstGeom>
-          <a:noFill/>
-          <a:ln/>
-        </p:spPr>
-        <p:txBody>
-          <a:bodyPr wrap="square" lIns="0" tIns="0" rIns="0" bIns="0" rtlCol="0" anchor="t"/>
-          <a:lstStyle/>
-          <a:p>
-            <a:pPr indent="0" marL="0">
-              <a:buNone/>
-            </a:pPr>
-            <a:r>
-              <a:rPr lang="en-US" sz="1200" b="1" dirty="0">
-                <a:solidFill>
-                  <a:schemeClr val="tx1"/>
-                </a:solidFill>
-              </a:rPr>
-              <a:t>Approve</a:t>
-            </a:r>
-            <a:endParaRPr lang="en-US" sz="1200" dirty="0"/>
-          </a:p>
-        </p:txBody>
-      </p:sp>
-      <p:sp>
-        <p:nvSpPr>
-          <p:cNvPr id="36" name="You step 3 text"/>
-          <p:cNvSpPr txBox="1"/>
-          <p:nvPr/>
-        </p:nvSpPr>
-        <p:spPr>
-          <a:xfrm>
-            <a:off x="5422392" y="2743200"/>
-            <a:ext cx="1371600" cy="713232"/>
-          </a:xfrm>
-          <a:prstGeom prst="rect">
-            <a:avLst/>
-          </a:prstGeom>
-          <a:noFill/>
-          <a:ln/>
-        </p:spPr>
-        <p:txBody>
-          <a:bodyPr wrap="square" lIns="0" tIns="0" rIns="0" bIns="0" rtlCol="0" anchor="t"/>
-          <a:lstStyle/>
-          <a:p>
-            <a:pPr indent="0" marL="0">
-              <a:buNone/>
-            </a:pPr>
-            <a:r>
-              <a:rPr lang="en-US" sz="1050" dirty="0">
-                <a:solidFill>
-                  <a:schemeClr val="tx2"/>
-                </a:solidFill>
-              </a:rPr>
-              <a:t>Only what the family changed is applied. Members become Confirmed.</a:t>
-            </a:r>
-            <a:endParaRPr lang="en-US" sz="1050" dirty="0"/>
-          </a:p>
-        </p:txBody>
-      </p:sp>
-      <p:pic>
-        <p:nvPicPr>
-          <p:cNvPr id="37" name="You arrow 3" descr="preencoded.png">    </p:cNvPr>
-          <p:cNvPicPr>
-            <a:picLocks noChangeAspect="1"/>
-          </p:cNvPicPr>
-          <p:nvPr/>
-        </p:nvPicPr>
-        <p:blipFill>
-          <a:blip r:embed="rId8"/>
-          <a:stretch>
-            <a:fillRect/>
-          </a:stretch>
-        </p:blipFill>
-        <p:spPr>
-          <a:xfrm>
-            <a:off x="6922008" y="2862072"/>
-            <a:ext cx="146304" cy="146304"/>
-          </a:xfrm>
-          <a:prstGeom prst="rect">
-            <a:avLst/>
-          </a:prstGeom>
-        </p:spPr>
-      </p:pic>
-      <p:sp>
-        <p:nvSpPr>
-          <p:cNvPr id="38" name="You step 4 card"/>
-          <p:cNvSpPr/>
-          <p:nvPr/>
-        </p:nvSpPr>
-        <p:spPr>
-          <a:xfrm>
-            <a:off x="7086600" y="2350008"/>
-            <a:ext cx="1600200" cy="1161288"/>
-          </a:xfrm>
-          <a:prstGeom prst="roundRect">
-            <a:avLst>
-              <a:gd name="adj" fmla="val 6299"/>
-            </a:avLst>
-          </a:prstGeom>
-          <a:solidFill>
-            <a:schemeClr val="bg2"/>
-          </a:solidFill>
-          <a:ln/>
-        </p:spPr>
-      </p:sp>
-      <p:sp>
-        <p:nvSpPr>
-          <p:cNvPr id="39" name="You step 4 heading"/>
-          <p:cNvSpPr txBox="1"/>
-          <p:nvPr/>
-        </p:nvSpPr>
-        <p:spPr>
-          <a:xfrm>
-            <a:off x="7205472" y="2459736"/>
-            <a:ext cx="1371600" cy="256032"/>
-          </a:xfrm>
-          <a:prstGeom prst="rect">
-            <a:avLst/>
-          </a:prstGeom>
-          <a:noFill/>
-          <a:ln/>
-        </p:spPr>
-        <p:txBody>
-          <a:bodyPr wrap="square" lIns="0" tIns="0" rIns="0" bIns="0" rtlCol="0" anchor="t"/>
-          <a:lstStyle/>
-          <a:p>
-            <a:pPr indent="0" marL="0">
-              <a:buNone/>
-            </a:pPr>
-            <a:r>
-              <a:rPr lang="en-US" sz="1200" b="1" dirty="0">
-                <a:solidFill>
-                  <a:schemeClr val="tx1"/>
-                </a:solidFill>
-              </a:rPr>
-              <a:t>Or Reject…</a:t>
-            </a:r>
-            <a:endParaRPr lang="en-US" sz="1200" dirty="0"/>
-          </a:p>
-        </p:txBody>
-      </p:sp>
-      <p:sp>
-        <p:nvSpPr>
-          <p:cNvPr id="40" name="You step 4 text"/>
-          <p:cNvSpPr txBox="1"/>
-          <p:nvPr/>
-        </p:nvSpPr>
-        <p:spPr>
-          <a:xfrm>
-            <a:off x="7205472" y="2743200"/>
-            <a:ext cx="1371600" cy="713232"/>
-          </a:xfrm>
-          <a:prstGeom prst="rect">
-            <a:avLst/>
-          </a:prstGeom>
-          <a:noFill/>
-          <a:ln/>
-        </p:spPr>
-        <p:txBody>
-          <a:bodyPr wrap="square" lIns="0" tIns="0" rIns="0" bIns="0" rtlCol="0" anchor="t"/>
-          <a:lstStyle/>
-          <a:p>
-            <a:pPr indent="0" marL="0">
-              <a:buNone/>
-            </a:pPr>
-            <a:r>
-              <a:rPr lang="en-US" sz="1050" dirty="0">
-                <a:solidFill>
-                  <a:schemeClr val="tx2"/>
-                </a:solidFill>
-              </a:rPr>
-              <a:t>Give a reason. Nothing in the record changes.</a:t>
-            </a:r>
-            <a:endParaRPr lang="en-US" sz="1050" dirty="0"/>
-          </a:p>
-        </p:txBody>
-      </p:sp>
-      <p:sp>
-        <p:nvSpPr>
-          <p:cNvPr id="41" name="Tip 1 circle"/>
-          <p:cNvSpPr/>
-          <p:nvPr/>
-        </p:nvSpPr>
-        <p:spPr>
-          <a:xfrm>
-            <a:off x="457200" y="3931920"/>
-            <a:ext cx="347472" cy="347472"/>
-          </a:xfrm>
-          <a:prstGeom prst="ellipse">
-            <a:avLst/>
-          </a:prstGeom>
-          <a:solidFill>
-            <a:schemeClr val="tx1"/>
-          </a:solidFill>
-          <a:ln/>
-        </p:spPr>
-      </p:sp>
-      <p:pic>
-        <p:nvPicPr>
-          <p:cNvPr id="42" name="Tip 1 icon" descr="Tip 1">    </p:cNvPr>
-          <p:cNvPicPr>
-            <a:picLocks noChangeAspect="1"/>
-          </p:cNvPicPr>
-          <p:nvPr/>
-        </p:nvPicPr>
-        <p:blipFill>
-          <a:blip r:embed="rId9"/>
-          <a:stretch>
-            <a:fillRect/>
-          </a:stretch>
-        </p:blipFill>
-        <p:spPr>
-          <a:xfrm>
-            <a:off x="540593" y="4015313"/>
-            <a:ext cx="180685" cy="180685"/>
-          </a:xfrm>
-          <a:prstGeom prst="rect">
-            <a:avLst/>
-          </a:prstGeom>
-        </p:spPr>
-      </p:pic>
-      <p:sp>
-        <p:nvSpPr>
-          <p:cNvPr id="43" name="Tip 1 text"/>
-          <p:cNvSpPr txBox="1"/>
-          <p:nvPr/>
-        </p:nvSpPr>
-        <p:spPr>
-          <a:xfrm>
-            <a:off x="896112" y="3895344"/>
-            <a:ext cx="2240280" cy="777240"/>
-          </a:xfrm>
-          <a:prstGeom prst="rect">
-            <a:avLst/>
-          </a:prstGeom>
-          <a:noFill/>
-          <a:ln/>
-        </p:spPr>
-        <p:txBody>
-          <a:bodyPr wrap="square" lIns="0" tIns="0" rIns="0" bIns="0" rtlCol="0" anchor="t"/>
-          <a:lstStyle/>
-          <a:p>
-            <a:pPr indent="0" marL="0">
-              <a:buNone/>
-            </a:pPr>
-            <a:r>
-              <a:rPr lang="en-US" sz="1050" b="1" dirty="0">
-                <a:solidFill>
-                  <a:schemeClr val="tx1"/>
-                </a:solidFill>
-              </a:rPr>
-              <a:t>Lost code? </a:t>
-            </a:r>
-            <a:pPr indent="0" marL="0">
-              <a:buNone/>
-            </a:pPr>
-            <a:r>
-              <a:rPr lang="en-US" sz="1050" dirty="0">
-                <a:solidFill>
-                  <a:schemeClr val="tx2"/>
-                </a:solidFill>
-              </a:rPr>
-              <a:t>Households → row menu → Get codes. Or New code in Record census; the old code stops working.</a:t>
-            </a:r>
-            <a:endParaRPr lang="en-US" sz="1050" dirty="0"/>
-          </a:p>
-        </p:txBody>
-      </p:sp>
-      <p:sp>
-        <p:nvSpPr>
-          <p:cNvPr id="44" name="Tip 2 circle"/>
-          <p:cNvSpPr/>
-          <p:nvPr/>
-        </p:nvSpPr>
-        <p:spPr>
-          <a:xfrm>
-            <a:off x="3246120" y="3931920"/>
-            <a:ext cx="347472" cy="347472"/>
-          </a:xfrm>
-          <a:prstGeom prst="ellipse">
-            <a:avLst/>
-          </a:prstGeom>
-          <a:solidFill>
-            <a:schemeClr val="tx1"/>
-          </a:solidFill>
-          <a:ln/>
-        </p:spPr>
-      </p:sp>
-      <p:pic>
-        <p:nvPicPr>
-          <p:cNvPr id="45" name="Tip 2 icon" descr="Tip 2">    </p:cNvPr>
-          <p:cNvPicPr>
-            <a:picLocks noChangeAspect="1"/>
-          </p:cNvPicPr>
-          <p:nvPr/>
-        </p:nvPicPr>
-        <p:blipFill>
-          <a:blip r:embed="rId10"/>
-          <a:stretch>
-            <a:fillRect/>
-          </a:stretch>
-        </p:blipFill>
-        <p:spPr>
-          <a:xfrm>
-            <a:off x="3329513" y="4015313"/>
-            <a:ext cx="180685" cy="180685"/>
-          </a:xfrm>
-          <a:prstGeom prst="rect">
-            <a:avLst/>
-          </a:prstGeom>
-        </p:spPr>
-      </p:pic>
-      <p:sp>
-        <p:nvSpPr>
-          <p:cNvPr id="46" name="Tip 2 text"/>
-          <p:cNvSpPr txBox="1"/>
-          <p:nvPr/>
-        </p:nvSpPr>
-        <p:spPr>
-          <a:xfrm>
-            <a:off x="3685032" y="3895344"/>
-            <a:ext cx="2240280" cy="777240"/>
-          </a:xfrm>
-          <a:prstGeom prst="rect">
-            <a:avLst/>
-          </a:prstGeom>
-          <a:noFill/>
-          <a:ln/>
-        </p:spPr>
-        <p:txBody>
-          <a:bodyPr wrap="square" lIns="0" tIns="0" rIns="0" bIns="0" rtlCol="0" anchor="t"/>
-          <a:lstStyle/>
-          <a:p>
-            <a:pPr indent="0" marL="0">
-              <a:buNone/>
-            </a:pPr>
-            <a:r>
-              <a:rPr lang="en-US" sz="1050" b="1" dirty="0">
-                <a:solidFill>
-                  <a:schemeClr val="tx1"/>
-                </a:solidFill>
-              </a:rPr>
-              <a:t>Locked out? </a:t>
-            </a:r>
-            <a:pPr indent="0" marL="0">
-              <a:buNone/>
-            </a:pPr>
-            <a:r>
-              <a:rPr lang="en-US" sz="1050" dirty="0">
-                <a:solidFill>
-                  <a:schemeClr val="tx2"/>
-                </a:solidFill>
-              </a:rPr>
-              <a:t>Five wrong codes lock that household’s sign-in for 15 minutes.</a:t>
-            </a:r>
-            <a:endParaRPr lang="en-US" sz="1050" dirty="0"/>
-          </a:p>
-        </p:txBody>
-      </p:sp>
-      <p:sp>
-        <p:nvSpPr>
-          <p:cNvPr id="47" name="Tip 3 circle"/>
-          <p:cNvSpPr/>
-          <p:nvPr/>
-        </p:nvSpPr>
-        <p:spPr>
-          <a:xfrm>
-            <a:off x="6035040" y="3931920"/>
-            <a:ext cx="347472" cy="347472"/>
-          </a:xfrm>
-          <a:prstGeom prst="ellipse">
-            <a:avLst/>
-          </a:prstGeom>
-          <a:solidFill>
-            <a:schemeClr val="tx1"/>
-          </a:solidFill>
-          <a:ln/>
-        </p:spPr>
-      </p:sp>
-      <p:pic>
-        <p:nvPicPr>
-          <p:cNvPr id="48" name="Tip 3 icon" descr="Tip 3">    </p:cNvPr>
-          <p:cNvPicPr>
-            <a:picLocks noChangeAspect="1"/>
-          </p:cNvPicPr>
-          <p:nvPr/>
-        </p:nvPicPr>
-        <p:blipFill>
-          <a:blip r:embed="rId11"/>
-          <a:stretch>
-            <a:fillRect/>
-          </a:stretch>
-        </p:blipFill>
-        <p:spPr>
-          <a:xfrm>
-            <a:off x="6118433" y="4015313"/>
-            <a:ext cx="180685" cy="180685"/>
-          </a:xfrm>
-          <a:prstGeom prst="rect">
-            <a:avLst/>
-          </a:prstGeom>
-        </p:spPr>
-      </p:pic>
-      <p:sp>
-        <p:nvSpPr>
-          <p:cNvPr id="49" name="Tip 3 text"/>
-          <p:cNvSpPr txBox="1"/>
-          <p:nvPr/>
-        </p:nvSpPr>
-        <p:spPr>
-          <a:xfrm>
-            <a:off x="6473952" y="3895344"/>
-            <a:ext cx="2240280" cy="777240"/>
-          </a:xfrm>
-          <a:prstGeom prst="rect">
-            <a:avLst/>
-          </a:prstGeom>
-          <a:noFill/>
-          <a:ln/>
-        </p:spPr>
-        <p:txBody>
-          <a:bodyPr wrap="square" lIns="0" tIns="0" rIns="0" bIns="0" rtlCol="0" anchor="t"/>
-          <a:lstStyle/>
-          <a:p>
-            <a:pPr indent="0" marL="0">
-              <a:buNone/>
-            </a:pPr>
-            <a:r>
-              <a:rPr lang="en-US" sz="1050" b="1" dirty="0">
-                <a:solidFill>
-                  <a:schemeClr val="tx1"/>
-                </a:solidFill>
-              </a:rPr>
-              <a:t>Sent twice? </a:t>
-            </a:r>
-            <a:pPr indent="0" marL="0">
-              <a:buNone/>
-            </a:pPr>
-            <a:r>
-              <a:rPr lang="en-US" sz="1050" dirty="0">
-                <a:solidFill>
-                  <a:schemeClr val="tx2"/>
-                </a:solidFill>
-              </a:rPr>
-              <a:t>A family can resend with “Usba pag-usab”. You only see the latest.</a:t>
-            </a:r>
-            <a:endParaRPr lang="en-US" sz="1050" dirty="0"/>
+              <a:t>No answer yet. These members are listed for follow-up when the census closes.</a:t>
+            </a:r>
+            <a:endParaRPr lang="en-US" sz="1150" dirty="0"/>
           </a:p>
         </p:txBody>
       </p:sp>
@@ -16236,7 +16370,7 @@
                   <a:schemeClr val="accent2"/>
                 </a:solidFill>
               </a:rPr>
-              <a:t>Home-visit cycle</a:t>
+              <a:t>Follow-up cycle</a:t>
             </a:r>
             <a:endParaRPr lang="en-US" sz="1300" dirty="0"/>
           </a:p>
@@ -16244,7 +16378,7 @@
       </p:sp>
       <p:sp>
         <p:nvSpPr>
-          <p:cNvPr id="14" name="Print the visit list circle"/>
+          <p:cNvPr id="14" name="Find who hasn’t answered circle"/>
           <p:cNvSpPr/>
           <p:nvPr/>
         </p:nvSpPr>
@@ -16264,7 +16398,7 @@
       </p:sp>
       <p:pic>
         <p:nvPicPr>
-          <p:cNvPr id="15" name="Print the visit list icon" descr="Print the visit list">    </p:cNvPr>
+          <p:cNvPr id="15" name="Find who hasn’t answered icon" descr="Find who hasn’t answered">    </p:cNvPr>
           <p:cNvPicPr>
             <a:picLocks noChangeAspect="1"/>
           </p:cNvPicPr>
@@ -16339,7 +16473,7 @@
                   <a:schemeClr val="tx1"/>
                 </a:solidFill>
               </a:rPr>
-              <a:t>Print the visit list</a:t>
+              <a:t>Find who hasn’t answered</a:t>
             </a:r>
             <a:endParaRPr lang="en-US" sz="1250" dirty="0"/>
           </a:p>
@@ -16375,7 +16509,7 @@
                   <a:schemeClr val="tx2"/>
                 </a:solidFill>
               </a:rPr>
-              <a:t>“Print not yet registered” gives a sheet with a Resulta sa bisita column. Also filter Households by Not started.</a:t>
+              <a:t>Filter Households by Not started. Last year’s list can also print a visit sheet of names not yet registered.</a:t>
             </a:r>
             <a:endParaRPr lang="en-US" sz="1050" dirty="0"/>
           </a:p>
@@ -16383,7 +16517,7 @@
       </p:sp>
       <p:sp>
         <p:nvSpPr>
-          <p:cNvPr id="19" name="Visit the family circle"/>
+          <p:cNvPr id="19" name="Remind, call or visit circle"/>
           <p:cNvSpPr/>
           <p:nvPr/>
         </p:nvSpPr>
@@ -16403,7 +16537,7 @@
       </p:sp>
       <p:pic>
         <p:nvPicPr>
-          <p:cNvPr id="20" name="Visit the family icon" descr="Visit the family">    </p:cNvPr>
+          <p:cNvPr id="20" name="Remind, call or visit icon" descr="Remind, call or visit">    </p:cNvPr>
           <p:cNvPicPr>
             <a:picLocks noChangeAspect="1"/>
           </p:cNvPicPr>
@@ -16478,7 +16612,7 @@
                   <a:schemeClr val="tx1"/>
                 </a:solidFill>
               </a:rPr>
-              <a:t>Visit the family</a:t>
+              <a:t>Remind, call or visit</a:t>
             </a:r>
             <a:endParaRPr lang="en-US" sz="1250" dirty="0"/>
           </a:p>
@@ -16514,7 +16648,7 @@
                   <a:schemeClr val="tx2"/>
                 </a:solidFill>
               </a:rPr>
-              <a:t>Bring their census form, or help them answer on their phone.</a:t>
+              <a:t>Resend their code, or help them update on their own phone during your visit.</a:t>
             </a:r>
             <a:endParaRPr lang="en-US" sz="1050" dirty="0"/>
           </a:p>
@@ -16630,7 +16764,7 @@
                   <a:schemeClr val="tx2"/>
                 </a:solidFill>
               </a:rPr>
-              <a:t>Record census for registered families. New families register with the form on the parish website; the office verifies them.</a:t>
+              <a:t>No phone? Record census with Staff / GKK home visit. New families register online on the parish website; the office verifies them.</a:t>
             </a:r>
             <a:endParaRPr lang="en-US" sz="1050" dirty="0"/>
           </a:p>
